--- a/presentation/aesthetic_memory_model_deck_draft2.pptx
+++ b/presentation/aesthetic_memory_model_deck_draft2.pptx
@@ -5,24 +5,24 @@
     <p:sldMasterId id="2147483648" r:id="rId1"/>
   </p:sldMasterIdLst>
   <p:sldIdLst>
-    <p:sldId id="256" r:id="rId7"/>
-    <p:sldId id="257" r:id="rId8"/>
-    <p:sldId id="258" r:id="rId9"/>
-    <p:sldId id="259" r:id="rId10"/>
-    <p:sldId id="260" r:id="rId11"/>
-    <p:sldId id="261" r:id="rId12"/>
-    <p:sldId id="262" r:id="rId13"/>
-    <p:sldId id="263" r:id="rId14"/>
-    <p:sldId id="264" r:id="rId15"/>
-    <p:sldId id="265" r:id="rId16"/>
-    <p:sldId id="266" r:id="rId17"/>
-    <p:sldId id="267" r:id="rId18"/>
-    <p:sldId id="268" r:id="rId19"/>
-    <p:sldId id="269" r:id="rId20"/>
-    <p:sldId id="270" r:id="rId21"/>
-    <p:sldId id="271" r:id="rId22"/>
+    <p:sldId id="256" r:id="rId2"/>
+    <p:sldId id="257" r:id="rId3"/>
+    <p:sldId id="258" r:id="rId4"/>
+    <p:sldId id="259" r:id="rId5"/>
+    <p:sldId id="260" r:id="rId6"/>
+    <p:sldId id="261" r:id="rId7"/>
+    <p:sldId id="262" r:id="rId8"/>
+    <p:sldId id="263" r:id="rId9"/>
+    <p:sldId id="264" r:id="rId10"/>
+    <p:sldId id="265" r:id="rId11"/>
+    <p:sldId id="266" r:id="rId12"/>
+    <p:sldId id="267" r:id="rId13"/>
+    <p:sldId id="268" r:id="rId14"/>
+    <p:sldId id="269" r:id="rId15"/>
+    <p:sldId id="270" r:id="rId16"/>
+    <p:sldId id="271" r:id="rId17"/>
   </p:sldIdLst>
-  <p:sldSz cx="12191695" cy="6858000" type="screen4x3"/>
+  <p:sldSz cx="12192000" cy="6858000"/>
   <p:notesSz cx="6858000" cy="9144000"/>
   <p:defaultTextStyle>
     <a:defPPr>
@@ -119,12 +119,31 @@
       </a:defRPr>
     </a:lvl9pPr>
   </p:defaultTextStyle>
+  <p:extLst>
+    <p:ext uri="{EFAFB233-063F-42B5-8137-9DF3F51BA10A}">
+      <p15:sldGuideLst xmlns:p15="http://schemas.microsoft.com/office/powerpoint/2012/main">
+        <p15:guide id="1" orient="horz" pos="2160">
+          <p15:clr>
+            <a:srgbClr val="A4A3A4"/>
+          </p15:clr>
+        </p15:guide>
+        <p15:guide id="2" pos="2880">
+          <p15:clr>
+            <a:srgbClr val="A4A3A4"/>
+          </p15:clr>
+        </p15:guide>
+      </p15:sldGuideLst>
+    </p:ext>
+  </p:extLst>
 </p:presentation>
 </file>
 
 <file path=ppt/charts/chart1.xml><?xml version="1.0" encoding="utf-8"?>
-<c:chartSpace xmlns:c="http://schemas.openxmlformats.org/drawingml/2006/chart" xmlns:a="http://schemas.openxmlformats.org/drawingml/2006/main" xmlns:r="http://schemas.openxmlformats.org/officeDocument/2006/relationships">
+<c:chartSpace xmlns:c="http://schemas.openxmlformats.org/drawingml/2006/chart" xmlns:a="http://schemas.openxmlformats.org/drawingml/2006/main" xmlns:r="http://schemas.openxmlformats.org/officeDocument/2006/relationships" xmlns:c16r2="http://schemas.microsoft.com/office/drawing/2015/06/chart">
   <c:date1904 val="0"/>
+  <c:lang val="en-US"/>
+  <c:roundedCorners val="1"/>
+  <c:style val="2"/>
   <c:chart>
     <c:title>
       <c:tx>
@@ -133,7 +152,7 @@
           <a:lstStyle/>
           <a:p>
             <a:r>
-              <a:rPr sz="1300">
+              <a:rPr lang="en-US" sz="1300">
                 <a:latin typeface="Cambria"/>
               </a:rPr>
               <a:t>Design 5: evaluation and running surprise over 600 exposures</a:t>
@@ -141,11 +160,11 @@
           </a:p>
         </c:rich>
       </c:tx>
-      <c:layout/>
       <c:overlay val="0"/>
     </c:title>
     <c:autoTitleDeleted val="0"/>
     <c:plotArea>
+      <c:layout/>
       <c:lineChart>
         <c:grouping val="standard"/>
         <c:varyColors val="0"/>
@@ -474,58 +493,58 @@
                 <c:formatCode>General</c:formatCode>
                 <c:ptCount val="95"/>
                 <c:pt idx="0">
-                  <c:v>0.0</c:v>
+                  <c:v>0</c:v>
                 </c:pt>
                 <c:pt idx="1">
-                  <c:v>0.0</c:v>
+                  <c:v>0</c:v>
                 </c:pt>
                 <c:pt idx="2">
-                  <c:v>0.0</c:v>
+                  <c:v>0</c:v>
                 </c:pt>
                 <c:pt idx="3">
-                  <c:v>0.0</c:v>
+                  <c:v>0</c:v>
                 </c:pt>
                 <c:pt idx="4">
                   <c:v>0.63</c:v>
                 </c:pt>
                 <c:pt idx="5">
-                  <c:v>0.715</c:v>
+                  <c:v>0.71499999999999997</c:v>
                 </c:pt>
                 <c:pt idx="6">
-                  <c:v>0.835</c:v>
+                  <c:v>0.83499999999999996</c:v>
                 </c:pt>
                 <c:pt idx="7">
-                  <c:v>0.868</c:v>
+                  <c:v>0.86799999999999999</c:v>
                 </c:pt>
                 <c:pt idx="8">
-                  <c:v>0.852</c:v>
+                  <c:v>0.85199999999999998</c:v>
                 </c:pt>
                 <c:pt idx="9">
-                  <c:v>0.887</c:v>
+                  <c:v>0.88700000000000001</c:v>
                 </c:pt>
                 <c:pt idx="10">
-                  <c:v>0.736</c:v>
+                  <c:v>0.73599999999999999</c:v>
                 </c:pt>
                 <c:pt idx="11">
                   <c:v>0.755</c:v>
                 </c:pt>
                 <c:pt idx="12">
-                  <c:v>0.728</c:v>
+                  <c:v>0.72799999999999998</c:v>
                 </c:pt>
                 <c:pt idx="13">
-                  <c:v>0.737</c:v>
+                  <c:v>0.73699999999999999</c:v>
                 </c:pt>
                 <c:pt idx="14">
                   <c:v>0.749</c:v>
                 </c:pt>
                 <c:pt idx="15">
-                  <c:v>0.765</c:v>
+                  <c:v>0.76500000000000001</c:v>
                 </c:pt>
                 <c:pt idx="16">
-                  <c:v>0.759</c:v>
+                  <c:v>0.75900000000000001</c:v>
                 </c:pt>
                 <c:pt idx="17">
-                  <c:v>0.738</c:v>
+                  <c:v>0.73799999999999999</c:v>
                 </c:pt>
                 <c:pt idx="18">
                   <c:v>0.752</c:v>
@@ -537,76 +556,76 @@
                   <c:v>0.745</c:v>
                 </c:pt>
                 <c:pt idx="21">
-                  <c:v>0.692</c:v>
+                  <c:v>0.69199999999999995</c:v>
                 </c:pt>
                 <c:pt idx="22">
-                  <c:v>0.594</c:v>
+                  <c:v>0.59399999999999997</c:v>
                 </c:pt>
                 <c:pt idx="23">
-                  <c:v>0.578</c:v>
+                  <c:v>0.57799999999999996</c:v>
                 </c:pt>
                 <c:pt idx="24">
                   <c:v>0.68</c:v>
                 </c:pt>
                 <c:pt idx="25">
-                  <c:v>0.823</c:v>
+                  <c:v>0.82299999999999995</c:v>
                 </c:pt>
                 <c:pt idx="26">
-                  <c:v>0.807</c:v>
+                  <c:v>0.80700000000000005</c:v>
                 </c:pt>
                 <c:pt idx="27">
-                  <c:v>0.867</c:v>
+                  <c:v>0.86699999999999999</c:v>
                 </c:pt>
                 <c:pt idx="28">
-                  <c:v>0.817</c:v>
+                  <c:v>0.81699999999999995</c:v>
                 </c:pt>
                 <c:pt idx="29">
                   <c:v>0.83</c:v>
                 </c:pt>
                 <c:pt idx="30">
-                  <c:v>0.853</c:v>
+                  <c:v>0.85299999999999998</c:v>
                 </c:pt>
                 <c:pt idx="31">
-                  <c:v>0.863</c:v>
+                  <c:v>0.86299999999999999</c:v>
                 </c:pt>
                 <c:pt idx="32">
-                  <c:v>0.887</c:v>
+                  <c:v>0.88700000000000001</c:v>
                 </c:pt>
                 <c:pt idx="33">
-                  <c:v>0.848</c:v>
+                  <c:v>0.84799999999999998</c:v>
                 </c:pt>
                 <c:pt idx="34">
-                  <c:v>0.839</c:v>
+                  <c:v>0.83899999999999997</c:v>
                 </c:pt>
                 <c:pt idx="35">
-                  <c:v>0.812</c:v>
+                  <c:v>0.81200000000000006</c:v>
                 </c:pt>
                 <c:pt idx="36">
                   <c:v>0.85</c:v>
                 </c:pt>
                 <c:pt idx="37">
-                  <c:v>0.796</c:v>
+                  <c:v>0.79600000000000004</c:v>
                 </c:pt>
                 <c:pt idx="38">
-                  <c:v>0.799</c:v>
+                  <c:v>0.79900000000000004</c:v>
                 </c:pt>
                 <c:pt idx="39">
                   <c:v>0.754</c:v>
                 </c:pt>
                 <c:pt idx="40">
-                  <c:v>0.744</c:v>
+                  <c:v>0.74399999999999999</c:v>
                 </c:pt>
                 <c:pt idx="41">
-                  <c:v>0.771</c:v>
+                  <c:v>0.77100000000000002</c:v>
                 </c:pt>
                 <c:pt idx="42">
-                  <c:v>0.824</c:v>
+                  <c:v>0.82399999999999995</c:v>
                 </c:pt>
                 <c:pt idx="43">
-                  <c:v>0.815</c:v>
+                  <c:v>0.81499999999999995</c:v>
                 </c:pt>
                 <c:pt idx="44">
-                  <c:v>0.815</c:v>
+                  <c:v>0.81499999999999995</c:v>
                 </c:pt>
                 <c:pt idx="45">
                   <c:v>0.79</c:v>
@@ -615,28 +634,28 @@
                   <c:v>0.751</c:v>
                 </c:pt>
                 <c:pt idx="47">
-                  <c:v>0.766</c:v>
+                  <c:v>0.76600000000000001</c:v>
                 </c:pt>
                 <c:pt idx="48">
-                  <c:v>0.742</c:v>
+                  <c:v>0.74199999999999999</c:v>
                 </c:pt>
                 <c:pt idx="49">
-                  <c:v>0.795</c:v>
+                  <c:v>0.79500000000000004</c:v>
                 </c:pt>
                 <c:pt idx="50">
-                  <c:v>0.805</c:v>
+                  <c:v>0.80500000000000005</c:v>
                 </c:pt>
                 <c:pt idx="51">
                   <c:v>0.83</c:v>
                 </c:pt>
                 <c:pt idx="52">
-                  <c:v>0.711</c:v>
+                  <c:v>0.71099999999999997</c:v>
                 </c:pt>
                 <c:pt idx="53">
-                  <c:v>0.712</c:v>
+                  <c:v>0.71199999999999997</c:v>
                 </c:pt>
                 <c:pt idx="54">
-                  <c:v>0.728</c:v>
+                  <c:v>0.72799999999999998</c:v>
                 </c:pt>
                 <c:pt idx="55">
                   <c:v>0.73</c:v>
@@ -648,120 +667,125 @@
                   <c:v>0.77</c:v>
                 </c:pt>
                 <c:pt idx="58">
-                  <c:v>0.823</c:v>
+                  <c:v>0.82299999999999995</c:v>
                 </c:pt>
                 <c:pt idx="59">
-                  <c:v>0.865</c:v>
+                  <c:v>0.86499999999999999</c:v>
                 </c:pt>
                 <c:pt idx="60">
-                  <c:v>0.862</c:v>
+                  <c:v>0.86199999999999999</c:v>
                 </c:pt>
                 <c:pt idx="61">
-                  <c:v>0.861</c:v>
+                  <c:v>0.86099999999999999</c:v>
                 </c:pt>
                 <c:pt idx="62">
-                  <c:v>0.854</c:v>
+                  <c:v>0.85399999999999998</c:v>
                 </c:pt>
                 <c:pt idx="63">
-                  <c:v>0.804</c:v>
+                  <c:v>0.80400000000000005</c:v>
                 </c:pt>
                 <c:pt idx="64">
-                  <c:v>0.829</c:v>
+                  <c:v>0.82899999999999996</c:v>
                 </c:pt>
                 <c:pt idx="65">
-                  <c:v>0.838</c:v>
+                  <c:v>0.83799999999999997</c:v>
                 </c:pt>
                 <c:pt idx="66">
-                  <c:v>0.716</c:v>
+                  <c:v>0.71599999999999997</c:v>
                 </c:pt>
                 <c:pt idx="67">
                   <c:v>0.71</c:v>
                 </c:pt>
                 <c:pt idx="68">
-                  <c:v>0.685</c:v>
+                  <c:v>0.68500000000000005</c:v>
                 </c:pt>
                 <c:pt idx="69">
-                  <c:v>0.763</c:v>
+                  <c:v>0.76300000000000001</c:v>
                 </c:pt>
                 <c:pt idx="70">
-                  <c:v>0.856</c:v>
+                  <c:v>0.85599999999999998</c:v>
                 </c:pt>
                 <c:pt idx="71">
                   <c:v>0.85</c:v>
                 </c:pt>
                 <c:pt idx="72">
-                  <c:v>0.738</c:v>
+                  <c:v>0.73799999999999999</c:v>
                 </c:pt>
                 <c:pt idx="73">
-                  <c:v>0.758</c:v>
+                  <c:v>0.75800000000000001</c:v>
                 </c:pt>
                 <c:pt idx="74">
                   <c:v>0.746</c:v>
                 </c:pt>
                 <c:pt idx="75">
-                  <c:v>0.818</c:v>
+                  <c:v>0.81799999999999995</c:v>
                 </c:pt>
                 <c:pt idx="76">
-                  <c:v>0.826</c:v>
+                  <c:v>0.82599999999999996</c:v>
                 </c:pt>
                 <c:pt idx="77">
-                  <c:v>0.735</c:v>
+                  <c:v>0.73499999999999999</c:v>
                 </c:pt>
                 <c:pt idx="78">
-                  <c:v>0.808</c:v>
+                  <c:v>0.80800000000000005</c:v>
                 </c:pt>
                 <c:pt idx="79">
-                  <c:v>0.813</c:v>
+                  <c:v>0.81299999999999994</c:v>
                 </c:pt>
                 <c:pt idx="80">
-                  <c:v>0.856</c:v>
+                  <c:v>0.85599999999999998</c:v>
                 </c:pt>
                 <c:pt idx="81">
-                  <c:v>0.912</c:v>
+                  <c:v>0.91200000000000003</c:v>
                 </c:pt>
                 <c:pt idx="82">
                   <c:v>0.878</c:v>
                 </c:pt>
                 <c:pt idx="83">
-                  <c:v>0.856</c:v>
+                  <c:v>0.85599999999999998</c:v>
                 </c:pt>
                 <c:pt idx="84">
-                  <c:v>0.771</c:v>
+                  <c:v>0.77100000000000002</c:v>
                 </c:pt>
                 <c:pt idx="85">
-                  <c:v>0.767</c:v>
+                  <c:v>0.76700000000000002</c:v>
                 </c:pt>
                 <c:pt idx="86">
-                  <c:v>0.779</c:v>
+                  <c:v>0.77900000000000003</c:v>
                 </c:pt>
                 <c:pt idx="87">
-                  <c:v>0.811</c:v>
+                  <c:v>0.81100000000000005</c:v>
                 </c:pt>
                 <c:pt idx="88">
-                  <c:v>0.855</c:v>
+                  <c:v>0.85499999999999998</c:v>
                 </c:pt>
                 <c:pt idx="89">
-                  <c:v>0.837</c:v>
+                  <c:v>0.83699999999999997</c:v>
                 </c:pt>
                 <c:pt idx="90">
-                  <c:v>0.811</c:v>
+                  <c:v>0.81100000000000005</c:v>
                 </c:pt>
                 <c:pt idx="91">
-                  <c:v>0.761</c:v>
+                  <c:v>0.76100000000000001</c:v>
                 </c:pt>
                 <c:pt idx="92">
-                  <c:v>0.719</c:v>
+                  <c:v>0.71899999999999997</c:v>
                 </c:pt>
                 <c:pt idx="93">
-                  <c:v>0.757</c:v>
+                  <c:v>0.75700000000000001</c:v>
                 </c:pt>
                 <c:pt idx="94">
-                  <c:v>0.781</c:v>
+                  <c:v>0.78100000000000003</c:v>
                 </c:pt>
               </c:numCache>
             </c:numRef>
           </c:val>
           <c:smooth val="0"/>
+          <c:extLst>
+            <c:ext xmlns:c16="http://schemas.microsoft.com/office/drawing/2014/chart" uri="{C3380CC4-5D6E-409C-BE32-E72D297353CC}">
+              <c16:uniqueId val="{00000000-53AC-A84B-9EF2-EAFCB02E0E2A}"/>
+            </c:ext>
+          </c:extLst>
         </c:ser>
         <c:ser>
           <c:idx val="1"/>
@@ -1091,34 +1115,34 @@
                   <c:v>0.245</c:v>
                 </c:pt>
                 <c:pt idx="1">
-                  <c:v>1.059</c:v>
+                  <c:v>1.0589999999999999</c:v>
                 </c:pt>
                 <c:pt idx="2">
-                  <c:v>1.154</c:v>
+                  <c:v>1.1539999999999999</c:v>
                 </c:pt>
                 <c:pt idx="3">
-                  <c:v>1.293</c:v>
+                  <c:v>1.2929999999999999</c:v>
                 </c:pt>
                 <c:pt idx="4">
-                  <c:v>1.505</c:v>
+                  <c:v>1.5049999999999999</c:v>
                 </c:pt>
                 <c:pt idx="5">
                   <c:v>1.5</c:v>
                 </c:pt>
                 <c:pt idx="6">
-                  <c:v>1.565</c:v>
+                  <c:v>1.5649999999999999</c:v>
                 </c:pt>
                 <c:pt idx="7">
                   <c:v>1.528</c:v>
                 </c:pt>
                 <c:pt idx="8">
-                  <c:v>1.558</c:v>
+                  <c:v>1.5580000000000001</c:v>
                 </c:pt>
                 <c:pt idx="9">
-                  <c:v>1.567</c:v>
+                  <c:v>1.5669999999999999</c:v>
                 </c:pt>
                 <c:pt idx="10">
-                  <c:v>1.471</c:v>
+                  <c:v>1.4710000000000001</c:v>
                 </c:pt>
                 <c:pt idx="11">
                   <c:v>1.63</c:v>
@@ -1127,13 +1151,13 @@
                   <c:v>1.522</c:v>
                 </c:pt>
                 <c:pt idx="13">
-                  <c:v>1.501</c:v>
+                  <c:v>1.5009999999999999</c:v>
                 </c:pt>
                 <c:pt idx="14">
                   <c:v>1.421</c:v>
                 </c:pt>
                 <c:pt idx="15">
-                  <c:v>1.418</c:v>
+                  <c:v>1.4179999999999999</c:v>
                 </c:pt>
                 <c:pt idx="16">
                   <c:v>1.6</c:v>
@@ -1145,7 +1169,7 @@
                   <c:v>1.482</c:v>
                 </c:pt>
                 <c:pt idx="19">
-                  <c:v>1.457</c:v>
+                  <c:v>1.4570000000000001</c:v>
                 </c:pt>
                 <c:pt idx="20">
                   <c:v>1.401</c:v>
@@ -1154,10 +1178,10 @@
                   <c:v>1.339</c:v>
                 </c:pt>
                 <c:pt idx="22">
-                  <c:v>1.144</c:v>
+                  <c:v>1.1439999999999999</c:v>
                 </c:pt>
                 <c:pt idx="23">
-                  <c:v>1.441</c:v>
+                  <c:v>1.4410000000000001</c:v>
                 </c:pt>
                 <c:pt idx="24">
                   <c:v>1.518</c:v>
@@ -1172,22 +1196,22 @@
                   <c:v>1.585</c:v>
                 </c:pt>
                 <c:pt idx="28">
-                  <c:v>1.404</c:v>
+                  <c:v>1.4039999999999999</c:v>
                 </c:pt>
                 <c:pt idx="29">
-                  <c:v>1.439</c:v>
+                  <c:v>1.4390000000000001</c:v>
                 </c:pt>
                 <c:pt idx="30">
-                  <c:v>1.434</c:v>
+                  <c:v>1.4339999999999999</c:v>
                 </c:pt>
                 <c:pt idx="31">
-                  <c:v>1.497</c:v>
+                  <c:v>1.4970000000000001</c:v>
                 </c:pt>
                 <c:pt idx="32">
-                  <c:v>1.689</c:v>
+                  <c:v>1.6890000000000001</c:v>
                 </c:pt>
                 <c:pt idx="33">
-                  <c:v>1.545</c:v>
+                  <c:v>1.5449999999999999</c:v>
                 </c:pt>
                 <c:pt idx="34">
                   <c:v>1.456</c:v>
@@ -1196,7 +1220,7 @@
                   <c:v>1.581</c:v>
                 </c:pt>
                 <c:pt idx="36">
-                  <c:v>1.572</c:v>
+                  <c:v>1.5720000000000001</c:v>
                 </c:pt>
                 <c:pt idx="37">
                   <c:v>1.599</c:v>
@@ -1217,7 +1241,7 @@
                   <c:v>1.6</c:v>
                 </c:pt>
                 <c:pt idx="43">
-                  <c:v>1.664</c:v>
+                  <c:v>1.6639999999999999</c:v>
                 </c:pt>
                 <c:pt idx="44">
                   <c:v>1.776</c:v>
@@ -1229,10 +1253,10 @@
                   <c:v>1.306</c:v>
                 </c:pt>
                 <c:pt idx="47">
-                  <c:v>1.253</c:v>
+                  <c:v>1.2529999999999999</c:v>
                 </c:pt>
                 <c:pt idx="48">
-                  <c:v>1.334</c:v>
+                  <c:v>1.3340000000000001</c:v>
                 </c:pt>
                 <c:pt idx="49">
                   <c:v>1.357</c:v>
@@ -1241,31 +1265,31 @@
                   <c:v>1.556</c:v>
                 </c:pt>
                 <c:pt idx="51">
-                  <c:v>1.428</c:v>
+                  <c:v>1.4279999999999999</c:v>
                 </c:pt>
                 <c:pt idx="52">
                   <c:v>1.262</c:v>
                 </c:pt>
                 <c:pt idx="53">
-                  <c:v>1.263</c:v>
+                  <c:v>1.2629999999999999</c:v>
                 </c:pt>
                 <c:pt idx="54">
-                  <c:v>1.191</c:v>
+                  <c:v>1.1910000000000001</c:v>
                 </c:pt>
                 <c:pt idx="55">
                   <c:v>1.345</c:v>
                 </c:pt>
                 <c:pt idx="56">
-                  <c:v>1.586</c:v>
+                  <c:v>1.5860000000000001</c:v>
                 </c:pt>
                 <c:pt idx="57">
                   <c:v>1.5</c:v>
                 </c:pt>
                 <c:pt idx="58">
-                  <c:v>1.644</c:v>
+                  <c:v>1.6439999999999999</c:v>
                 </c:pt>
                 <c:pt idx="59">
-                  <c:v>1.559</c:v>
+                  <c:v>1.5589999999999999</c:v>
                 </c:pt>
                 <c:pt idx="60">
                   <c:v>1.32</c:v>
@@ -1283,7 +1307,7 @@
                   <c:v>1.383</c:v>
                 </c:pt>
                 <c:pt idx="65">
-                  <c:v>1.378</c:v>
+                  <c:v>1.3779999999999999</c:v>
                 </c:pt>
                 <c:pt idx="66">
                   <c:v>1.512</c:v>
@@ -1292,7 +1316,7 @@
                   <c:v>1.538</c:v>
                 </c:pt>
                 <c:pt idx="68">
-                  <c:v>1.481</c:v>
+                  <c:v>1.4810000000000001</c:v>
                 </c:pt>
                 <c:pt idx="69">
                   <c:v>1.62</c:v>
@@ -1301,19 +1325,19 @@
                   <c:v>1.292</c:v>
                 </c:pt>
                 <c:pt idx="71">
-                  <c:v>1.436</c:v>
+                  <c:v>1.4359999999999999</c:v>
                 </c:pt>
                 <c:pt idx="72">
                   <c:v>1.601</c:v>
                 </c:pt>
                 <c:pt idx="73">
-                  <c:v>1.646</c:v>
+                  <c:v>1.6459999999999999</c:v>
                 </c:pt>
                 <c:pt idx="74">
                   <c:v>1.786</c:v>
                 </c:pt>
                 <c:pt idx="75">
-                  <c:v>1.592</c:v>
+                  <c:v>1.5920000000000001</c:v>
                 </c:pt>
                 <c:pt idx="76">
                   <c:v>1.641</c:v>
@@ -1322,7 +1346,7 @@
                   <c:v>1.581</c:v>
                 </c:pt>
                 <c:pt idx="78">
-                  <c:v>1.662</c:v>
+                  <c:v>1.6619999999999999</c:v>
                 </c:pt>
                 <c:pt idx="79">
                   <c:v>1.704</c:v>
@@ -1337,19 +1361,19 @@
                   <c:v>1.468</c:v>
                 </c:pt>
                 <c:pt idx="83">
-                  <c:v>1.368</c:v>
+                  <c:v>1.3680000000000001</c:v>
                 </c:pt>
                 <c:pt idx="84">
-                  <c:v>1.301</c:v>
+                  <c:v>1.3009999999999999</c:v>
                 </c:pt>
                 <c:pt idx="85">
-                  <c:v>1.344</c:v>
+                  <c:v>1.3440000000000001</c:v>
                 </c:pt>
                 <c:pt idx="86">
-                  <c:v>1.457</c:v>
+                  <c:v>1.4570000000000001</c:v>
                 </c:pt>
                 <c:pt idx="87">
-                  <c:v>1.473</c:v>
+                  <c:v>1.4730000000000001</c:v>
                 </c:pt>
                 <c:pt idx="88">
                   <c:v>1.677</c:v>
@@ -1361,7 +1385,7 @@
                   <c:v>1.43</c:v>
                 </c:pt>
                 <c:pt idx="91">
-                  <c:v>1.384</c:v>
+                  <c:v>1.3839999999999999</c:v>
                 </c:pt>
                 <c:pt idx="92">
                   <c:v>1.456</c:v>
@@ -1370,14 +1394,26 @@
                   <c:v>1.5</c:v>
                 </c:pt>
                 <c:pt idx="94">
-                  <c:v>1.479</c:v>
+                  <c:v>1.4790000000000001</c:v>
                 </c:pt>
               </c:numCache>
             </c:numRef>
           </c:val>
           <c:smooth val="0"/>
+          <c:extLst>
+            <c:ext xmlns:c16="http://schemas.microsoft.com/office/drawing/2014/chart" uri="{C3380CC4-5D6E-409C-BE32-E72D297353CC}">
+              <c16:uniqueId val="{00000001-53AC-A84B-9EF2-EAFCB02E0E2A}"/>
+            </c:ext>
+          </c:extLst>
         </c:ser>
-        <c:marker val="1"/>
+        <c:dLbls>
+          <c:showLegendKey val="0"/>
+          <c:showVal val="0"/>
+          <c:showCatName val="0"/>
+          <c:showSerName val="0"/>
+          <c:showPercent val="0"/>
+          <c:showBubbleSize val="0"/>
+        </c:dLbls>
         <c:smooth val="0"/>
         <c:axId val="2118791784"/>
         <c:axId val="2140495176"/>
@@ -1389,6 +1425,7 @@
         </c:scaling>
         <c:delete val="0"/>
         <c:axPos val="b"/>
+        <c:numFmt formatCode="General" sourceLinked="0"/>
         <c:majorTickMark val="out"/>
         <c:minorTickMark val="none"/>
         <c:tickLblPos val="nextTo"/>
@@ -1399,6 +1436,7 @@
             <a:pPr>
               <a:defRPr sz="1000"/>
             </a:pPr>
+            <a:endParaRPr lang="en-US"/>
           </a:p>
         </c:txPr>
         <c:crossAx val="2140495176"/>
@@ -1410,7 +1448,9 @@
       </c:catAx>
       <c:valAx>
         <c:axId val="2140495176"/>
-        <c:scaling/>
+        <c:scaling>
+          <c:orientation val="minMax"/>
+        </c:scaling>
         <c:delete val="0"/>
         <c:axPos val="l"/>
         <c:majorGridlines>
@@ -1422,6 +1462,7 @@
             </a:ln>
           </c:spPr>
         </c:majorGridlines>
+        <c:numFmt formatCode="General" sourceLinked="1"/>
         <c:majorTickMark val="out"/>
         <c:minorTickMark val="none"/>
         <c:tickLblPos val="nextTo"/>
@@ -1432,15 +1473,16 @@
             <a:pPr>
               <a:defRPr sz="1000"/>
             </a:pPr>
+            <a:endParaRPr lang="en-US"/>
           </a:p>
         </c:txPr>
         <c:crossAx val="2118791784"/>
         <c:crosses val="autoZero"/>
+        <c:crossBetween val="between"/>
       </c:valAx>
     </c:plotArea>
     <c:legend>
       <c:legendPos val="b"/>
-      <c:layout/>
       <c:overlay val="0"/>
       <c:txPr>
         <a:bodyPr/>
@@ -1449,6 +1491,7 @@
           <a:pPr>
             <a:defRPr sz="1100"/>
           </a:pPr>
+          <a:endParaRPr lang="en-US"/>
         </a:p>
       </c:txPr>
     </c:legend>
@@ -1473,8 +1516,11 @@
 </file>
 
 <file path=ppt/charts/chart2.xml><?xml version="1.0" encoding="utf-8"?>
-<c:chartSpace xmlns:c="http://schemas.openxmlformats.org/drawingml/2006/chart" xmlns:a="http://schemas.openxmlformats.org/drawingml/2006/main" xmlns:r="http://schemas.openxmlformats.org/officeDocument/2006/relationships">
+<c:chartSpace xmlns:c="http://schemas.openxmlformats.org/drawingml/2006/chart" xmlns:a="http://schemas.openxmlformats.org/drawingml/2006/main" xmlns:r="http://schemas.openxmlformats.org/officeDocument/2006/relationships" xmlns:c16r2="http://schemas.microsoft.com/office/drawing/2015/06/chart">
   <c:date1904 val="0"/>
+  <c:lang val="en-US"/>
+  <c:roundedCorners val="1"/>
+  <c:style val="2"/>
   <c:chart>
     <c:title>
       <c:tx>
@@ -1483,7 +1529,7 @@
           <a:lstStyle/>
           <a:p>
             <a:r>
-              <a:rPr sz="1300">
+              <a:rPr lang="en-US" sz="1300">
                 <a:latin typeface="Cambria"/>
               </a:rPr>
               <a:t>evaluation (rolling mean) over 600 exposures</a:t>
@@ -1491,11 +1537,11 @@
           </a:p>
         </c:rich>
       </c:tx>
-      <c:layout/>
       <c:overlay val="0"/>
     </c:title>
     <c:autoTitleDeleted val="0"/>
     <c:plotArea>
+      <c:layout/>
       <c:lineChart>
         <c:grouping val="standard"/>
         <c:varyColors val="0"/>
@@ -1824,58 +1870,58 @@
                 <c:formatCode>General</c:formatCode>
                 <c:ptCount val="95"/>
                 <c:pt idx="0">
-                  <c:v>0.0</c:v>
+                  <c:v>0</c:v>
                 </c:pt>
                 <c:pt idx="1">
-                  <c:v>0.0</c:v>
+                  <c:v>0</c:v>
                 </c:pt>
                 <c:pt idx="2">
-                  <c:v>0.0</c:v>
+                  <c:v>0</c:v>
                 </c:pt>
                 <c:pt idx="3">
-                  <c:v>0.0</c:v>
+                  <c:v>0</c:v>
                 </c:pt>
                 <c:pt idx="4">
                   <c:v>0.63</c:v>
                 </c:pt>
                 <c:pt idx="5">
-                  <c:v>0.715</c:v>
+                  <c:v>0.71499999999999997</c:v>
                 </c:pt>
                 <c:pt idx="6">
-                  <c:v>0.835</c:v>
+                  <c:v>0.83499999999999996</c:v>
                 </c:pt>
                 <c:pt idx="7">
-                  <c:v>0.868</c:v>
+                  <c:v>0.86799999999999999</c:v>
                 </c:pt>
                 <c:pt idx="8">
-                  <c:v>0.852</c:v>
+                  <c:v>0.85199999999999998</c:v>
                 </c:pt>
                 <c:pt idx="9">
-                  <c:v>0.887</c:v>
+                  <c:v>0.88700000000000001</c:v>
                 </c:pt>
                 <c:pt idx="10">
-                  <c:v>0.736</c:v>
+                  <c:v>0.73599999999999999</c:v>
                 </c:pt>
                 <c:pt idx="11">
                   <c:v>0.755</c:v>
                 </c:pt>
                 <c:pt idx="12">
-                  <c:v>0.728</c:v>
+                  <c:v>0.72799999999999998</c:v>
                 </c:pt>
                 <c:pt idx="13">
-                  <c:v>0.737</c:v>
+                  <c:v>0.73699999999999999</c:v>
                 </c:pt>
                 <c:pt idx="14">
                   <c:v>0.749</c:v>
                 </c:pt>
                 <c:pt idx="15">
-                  <c:v>0.765</c:v>
+                  <c:v>0.76500000000000001</c:v>
                 </c:pt>
                 <c:pt idx="16">
-                  <c:v>0.759</c:v>
+                  <c:v>0.75900000000000001</c:v>
                 </c:pt>
                 <c:pt idx="17">
-                  <c:v>0.738</c:v>
+                  <c:v>0.73799999999999999</c:v>
                 </c:pt>
                 <c:pt idx="18">
                   <c:v>0.752</c:v>
@@ -1887,76 +1933,76 @@
                   <c:v>0.745</c:v>
                 </c:pt>
                 <c:pt idx="21">
-                  <c:v>0.692</c:v>
+                  <c:v>0.69199999999999995</c:v>
                 </c:pt>
                 <c:pt idx="22">
-                  <c:v>0.594</c:v>
+                  <c:v>0.59399999999999997</c:v>
                 </c:pt>
                 <c:pt idx="23">
-                  <c:v>0.578</c:v>
+                  <c:v>0.57799999999999996</c:v>
                 </c:pt>
                 <c:pt idx="24">
                   <c:v>0.68</c:v>
                 </c:pt>
                 <c:pt idx="25">
-                  <c:v>0.823</c:v>
+                  <c:v>0.82299999999999995</c:v>
                 </c:pt>
                 <c:pt idx="26">
-                  <c:v>0.807</c:v>
+                  <c:v>0.80700000000000005</c:v>
                 </c:pt>
                 <c:pt idx="27">
-                  <c:v>0.867</c:v>
+                  <c:v>0.86699999999999999</c:v>
                 </c:pt>
                 <c:pt idx="28">
-                  <c:v>0.817</c:v>
+                  <c:v>0.81699999999999995</c:v>
                 </c:pt>
                 <c:pt idx="29">
                   <c:v>0.83</c:v>
                 </c:pt>
                 <c:pt idx="30">
-                  <c:v>0.853</c:v>
+                  <c:v>0.85299999999999998</c:v>
                 </c:pt>
                 <c:pt idx="31">
-                  <c:v>0.863</c:v>
+                  <c:v>0.86299999999999999</c:v>
                 </c:pt>
                 <c:pt idx="32">
-                  <c:v>0.887</c:v>
+                  <c:v>0.88700000000000001</c:v>
                 </c:pt>
                 <c:pt idx="33">
-                  <c:v>0.848</c:v>
+                  <c:v>0.84799999999999998</c:v>
                 </c:pt>
                 <c:pt idx="34">
-                  <c:v>0.839</c:v>
+                  <c:v>0.83899999999999997</c:v>
                 </c:pt>
                 <c:pt idx="35">
-                  <c:v>0.812</c:v>
+                  <c:v>0.81200000000000006</c:v>
                 </c:pt>
                 <c:pt idx="36">
                   <c:v>0.85</c:v>
                 </c:pt>
                 <c:pt idx="37">
-                  <c:v>0.796</c:v>
+                  <c:v>0.79600000000000004</c:v>
                 </c:pt>
                 <c:pt idx="38">
-                  <c:v>0.799</c:v>
+                  <c:v>0.79900000000000004</c:v>
                 </c:pt>
                 <c:pt idx="39">
                   <c:v>0.754</c:v>
                 </c:pt>
                 <c:pt idx="40">
-                  <c:v>0.744</c:v>
+                  <c:v>0.74399999999999999</c:v>
                 </c:pt>
                 <c:pt idx="41">
-                  <c:v>0.771</c:v>
+                  <c:v>0.77100000000000002</c:v>
                 </c:pt>
                 <c:pt idx="42">
-                  <c:v>0.824</c:v>
+                  <c:v>0.82399999999999995</c:v>
                 </c:pt>
                 <c:pt idx="43">
-                  <c:v>0.815</c:v>
+                  <c:v>0.81499999999999995</c:v>
                 </c:pt>
                 <c:pt idx="44">
-                  <c:v>0.815</c:v>
+                  <c:v>0.81499999999999995</c:v>
                 </c:pt>
                 <c:pt idx="45">
                   <c:v>0.79</c:v>
@@ -1965,28 +2011,28 @@
                   <c:v>0.751</c:v>
                 </c:pt>
                 <c:pt idx="47">
-                  <c:v>0.766</c:v>
+                  <c:v>0.76600000000000001</c:v>
                 </c:pt>
                 <c:pt idx="48">
-                  <c:v>0.742</c:v>
+                  <c:v>0.74199999999999999</c:v>
                 </c:pt>
                 <c:pt idx="49">
-                  <c:v>0.795</c:v>
+                  <c:v>0.79500000000000004</c:v>
                 </c:pt>
                 <c:pt idx="50">
-                  <c:v>0.805</c:v>
+                  <c:v>0.80500000000000005</c:v>
                 </c:pt>
                 <c:pt idx="51">
                   <c:v>0.83</c:v>
                 </c:pt>
                 <c:pt idx="52">
-                  <c:v>0.711</c:v>
+                  <c:v>0.71099999999999997</c:v>
                 </c:pt>
                 <c:pt idx="53">
-                  <c:v>0.712</c:v>
+                  <c:v>0.71199999999999997</c:v>
                 </c:pt>
                 <c:pt idx="54">
-                  <c:v>0.728</c:v>
+                  <c:v>0.72799999999999998</c:v>
                 </c:pt>
                 <c:pt idx="55">
                   <c:v>0.73</c:v>
@@ -1998,120 +2044,125 @@
                   <c:v>0.77</c:v>
                 </c:pt>
                 <c:pt idx="58">
-                  <c:v>0.823</c:v>
+                  <c:v>0.82299999999999995</c:v>
                 </c:pt>
                 <c:pt idx="59">
-                  <c:v>0.865</c:v>
+                  <c:v>0.86499999999999999</c:v>
                 </c:pt>
                 <c:pt idx="60">
-                  <c:v>0.862</c:v>
+                  <c:v>0.86199999999999999</c:v>
                 </c:pt>
                 <c:pt idx="61">
-                  <c:v>0.861</c:v>
+                  <c:v>0.86099999999999999</c:v>
                 </c:pt>
                 <c:pt idx="62">
-                  <c:v>0.854</c:v>
+                  <c:v>0.85399999999999998</c:v>
                 </c:pt>
                 <c:pt idx="63">
-                  <c:v>0.804</c:v>
+                  <c:v>0.80400000000000005</c:v>
                 </c:pt>
                 <c:pt idx="64">
-                  <c:v>0.829</c:v>
+                  <c:v>0.82899999999999996</c:v>
                 </c:pt>
                 <c:pt idx="65">
-                  <c:v>0.838</c:v>
+                  <c:v>0.83799999999999997</c:v>
                 </c:pt>
                 <c:pt idx="66">
-                  <c:v>0.716</c:v>
+                  <c:v>0.71599999999999997</c:v>
                 </c:pt>
                 <c:pt idx="67">
                   <c:v>0.71</c:v>
                 </c:pt>
                 <c:pt idx="68">
-                  <c:v>0.685</c:v>
+                  <c:v>0.68500000000000005</c:v>
                 </c:pt>
                 <c:pt idx="69">
-                  <c:v>0.763</c:v>
+                  <c:v>0.76300000000000001</c:v>
                 </c:pt>
                 <c:pt idx="70">
-                  <c:v>0.856</c:v>
+                  <c:v>0.85599999999999998</c:v>
                 </c:pt>
                 <c:pt idx="71">
                   <c:v>0.85</c:v>
                 </c:pt>
                 <c:pt idx="72">
-                  <c:v>0.738</c:v>
+                  <c:v>0.73799999999999999</c:v>
                 </c:pt>
                 <c:pt idx="73">
-                  <c:v>0.758</c:v>
+                  <c:v>0.75800000000000001</c:v>
                 </c:pt>
                 <c:pt idx="74">
                   <c:v>0.746</c:v>
                 </c:pt>
                 <c:pt idx="75">
-                  <c:v>0.818</c:v>
+                  <c:v>0.81799999999999995</c:v>
                 </c:pt>
                 <c:pt idx="76">
-                  <c:v>0.826</c:v>
+                  <c:v>0.82599999999999996</c:v>
                 </c:pt>
                 <c:pt idx="77">
-                  <c:v>0.735</c:v>
+                  <c:v>0.73499999999999999</c:v>
                 </c:pt>
                 <c:pt idx="78">
-                  <c:v>0.808</c:v>
+                  <c:v>0.80800000000000005</c:v>
                 </c:pt>
                 <c:pt idx="79">
-                  <c:v>0.813</c:v>
+                  <c:v>0.81299999999999994</c:v>
                 </c:pt>
                 <c:pt idx="80">
-                  <c:v>0.856</c:v>
+                  <c:v>0.85599999999999998</c:v>
                 </c:pt>
                 <c:pt idx="81">
-                  <c:v>0.912</c:v>
+                  <c:v>0.91200000000000003</c:v>
                 </c:pt>
                 <c:pt idx="82">
                   <c:v>0.878</c:v>
                 </c:pt>
                 <c:pt idx="83">
-                  <c:v>0.856</c:v>
+                  <c:v>0.85599999999999998</c:v>
                 </c:pt>
                 <c:pt idx="84">
-                  <c:v>0.771</c:v>
+                  <c:v>0.77100000000000002</c:v>
                 </c:pt>
                 <c:pt idx="85">
-                  <c:v>0.767</c:v>
+                  <c:v>0.76700000000000002</c:v>
                 </c:pt>
                 <c:pt idx="86">
-                  <c:v>0.779</c:v>
+                  <c:v>0.77900000000000003</c:v>
                 </c:pt>
                 <c:pt idx="87">
-                  <c:v>0.811</c:v>
+                  <c:v>0.81100000000000005</c:v>
                 </c:pt>
                 <c:pt idx="88">
-                  <c:v>0.855</c:v>
+                  <c:v>0.85499999999999998</c:v>
                 </c:pt>
                 <c:pt idx="89">
-                  <c:v>0.837</c:v>
+                  <c:v>0.83699999999999997</c:v>
                 </c:pt>
                 <c:pt idx="90">
-                  <c:v>0.811</c:v>
+                  <c:v>0.81100000000000005</c:v>
                 </c:pt>
                 <c:pt idx="91">
-                  <c:v>0.761</c:v>
+                  <c:v>0.76100000000000001</c:v>
                 </c:pt>
                 <c:pt idx="92">
-                  <c:v>0.719</c:v>
+                  <c:v>0.71899999999999997</c:v>
                 </c:pt>
                 <c:pt idx="93">
-                  <c:v>0.757</c:v>
+                  <c:v>0.75700000000000001</c:v>
                 </c:pt>
                 <c:pt idx="94">
-                  <c:v>0.781</c:v>
+                  <c:v>0.78100000000000003</c:v>
                 </c:pt>
               </c:numCache>
             </c:numRef>
           </c:val>
           <c:smooth val="0"/>
+          <c:extLst>
+            <c:ext xmlns:c16="http://schemas.microsoft.com/office/drawing/2014/chart" uri="{C3380CC4-5D6E-409C-BE32-E72D297353CC}">
+              <c16:uniqueId val="{00000000-C4C9-834A-BFCF-34EDA3BBBF4A}"/>
+            </c:ext>
+          </c:extLst>
         </c:ser>
         <c:ser>
           <c:idx val="1"/>
@@ -2438,124 +2489,124 @@
                 <c:formatCode>General</c:formatCode>
                 <c:ptCount val="95"/>
                 <c:pt idx="0">
-                  <c:v>0.0</c:v>
+                  <c:v>0</c:v>
                 </c:pt>
                 <c:pt idx="1">
-                  <c:v>0.0</c:v>
+                  <c:v>0</c:v>
                 </c:pt>
                 <c:pt idx="2">
-                  <c:v>0.0</c:v>
+                  <c:v>0</c:v>
                 </c:pt>
                 <c:pt idx="3">
-                  <c:v>0.0</c:v>
+                  <c:v>0</c:v>
                 </c:pt>
                 <c:pt idx="4">
-                  <c:v>0.904</c:v>
+                  <c:v>0.90400000000000003</c:v>
                 </c:pt>
                 <c:pt idx="5">
-                  <c:v>0.921</c:v>
+                  <c:v>0.92100000000000004</c:v>
                 </c:pt>
                 <c:pt idx="6">
-                  <c:v>0.861</c:v>
+                  <c:v>0.86099999999999999</c:v>
                 </c:pt>
                 <c:pt idx="7">
-                  <c:v>0.861</c:v>
+                  <c:v>0.86099999999999999</c:v>
                 </c:pt>
                 <c:pt idx="8">
-                  <c:v>0.835</c:v>
+                  <c:v>0.83499999999999996</c:v>
                 </c:pt>
                 <c:pt idx="9">
-                  <c:v>0.794</c:v>
+                  <c:v>0.79400000000000004</c:v>
                 </c:pt>
                 <c:pt idx="10">
-                  <c:v>0.801</c:v>
+                  <c:v>0.80100000000000005</c:v>
                 </c:pt>
                 <c:pt idx="11">
-                  <c:v>0.818</c:v>
+                  <c:v>0.81799999999999995</c:v>
                 </c:pt>
                 <c:pt idx="12">
-                  <c:v>0.914</c:v>
+                  <c:v>0.91400000000000003</c:v>
                 </c:pt>
                 <c:pt idx="13">
-                  <c:v>0.935</c:v>
+                  <c:v>0.93500000000000005</c:v>
                 </c:pt>
                 <c:pt idx="14">
-                  <c:v>0.963</c:v>
+                  <c:v>0.96299999999999997</c:v>
                 </c:pt>
                 <c:pt idx="15">
-                  <c:v>0.938</c:v>
+                  <c:v>0.93799999999999994</c:v>
                 </c:pt>
                 <c:pt idx="16">
-                  <c:v>0.888</c:v>
+                  <c:v>0.88800000000000001</c:v>
                 </c:pt>
                 <c:pt idx="17">
-                  <c:v>0.844</c:v>
+                  <c:v>0.84399999999999997</c:v>
                 </c:pt>
                 <c:pt idx="18">
-                  <c:v>0.815</c:v>
+                  <c:v>0.81499999999999995</c:v>
                 </c:pt>
                 <c:pt idx="19">
-                  <c:v>0.865</c:v>
+                  <c:v>0.86499999999999999</c:v>
                 </c:pt>
                 <c:pt idx="20">
-                  <c:v>0.826</c:v>
+                  <c:v>0.82599999999999996</c:v>
                 </c:pt>
                 <c:pt idx="21">
                   <c:v>0.876</c:v>
                 </c:pt>
                 <c:pt idx="22">
-                  <c:v>0.883</c:v>
+                  <c:v>0.88300000000000001</c:v>
                 </c:pt>
                 <c:pt idx="23">
-                  <c:v>0.902</c:v>
+                  <c:v>0.90200000000000002</c:v>
                 </c:pt>
                 <c:pt idx="24">
-                  <c:v>0.919</c:v>
+                  <c:v>0.91900000000000004</c:v>
                 </c:pt>
                 <c:pt idx="25">
-                  <c:v>0.908</c:v>
+                  <c:v>0.90800000000000003</c:v>
                 </c:pt>
                 <c:pt idx="26">
-                  <c:v>0.901</c:v>
+                  <c:v>0.90100000000000002</c:v>
                 </c:pt>
                 <c:pt idx="27">
-                  <c:v>0.907</c:v>
+                  <c:v>0.90700000000000003</c:v>
                 </c:pt>
                 <c:pt idx="28">
-                  <c:v>0.911</c:v>
+                  <c:v>0.91100000000000003</c:v>
                 </c:pt>
                 <c:pt idx="29">
-                  <c:v>0.928</c:v>
+                  <c:v>0.92800000000000005</c:v>
                 </c:pt>
                 <c:pt idx="30">
-                  <c:v>0.935</c:v>
+                  <c:v>0.93500000000000005</c:v>
                 </c:pt>
                 <c:pt idx="31">
-                  <c:v>0.903</c:v>
+                  <c:v>0.90300000000000002</c:v>
                 </c:pt>
                 <c:pt idx="32">
-                  <c:v>0.914</c:v>
+                  <c:v>0.91400000000000003</c:v>
                 </c:pt>
                 <c:pt idx="33">
-                  <c:v>0.895</c:v>
+                  <c:v>0.89500000000000002</c:v>
                 </c:pt>
                 <c:pt idx="34">
-                  <c:v>0.935</c:v>
+                  <c:v>0.93500000000000005</c:v>
                 </c:pt>
                 <c:pt idx="35">
-                  <c:v>0.935</c:v>
+                  <c:v>0.93500000000000005</c:v>
                 </c:pt>
                 <c:pt idx="36">
-                  <c:v>0.955</c:v>
+                  <c:v>0.95499999999999996</c:v>
                 </c:pt>
                 <c:pt idx="37">
-                  <c:v>0.952</c:v>
+                  <c:v>0.95199999999999996</c:v>
                 </c:pt>
                 <c:pt idx="38">
-                  <c:v>0.909</c:v>
+                  <c:v>0.90900000000000003</c:v>
                 </c:pt>
                 <c:pt idx="39">
-                  <c:v>0.887</c:v>
+                  <c:v>0.88700000000000001</c:v>
                 </c:pt>
                 <c:pt idx="40">
                   <c:v>0.874</c:v>
@@ -2564,31 +2615,31 @@
                   <c:v>0.92</c:v>
                 </c:pt>
                 <c:pt idx="42">
-                  <c:v>0.928</c:v>
+                  <c:v>0.92800000000000005</c:v>
                 </c:pt>
                 <c:pt idx="43">
-                  <c:v>0.924</c:v>
+                  <c:v>0.92400000000000004</c:v>
                 </c:pt>
                 <c:pt idx="44">
-                  <c:v>0.919</c:v>
+                  <c:v>0.91900000000000004</c:v>
                 </c:pt>
                 <c:pt idx="45">
-                  <c:v>0.883</c:v>
+                  <c:v>0.88300000000000001</c:v>
                 </c:pt>
                 <c:pt idx="46">
-                  <c:v>0.898</c:v>
+                  <c:v>0.89800000000000002</c:v>
                 </c:pt>
                 <c:pt idx="47">
                   <c:v>0.91</c:v>
                 </c:pt>
                 <c:pt idx="48">
-                  <c:v>0.849</c:v>
+                  <c:v>0.84899999999999998</c:v>
                 </c:pt>
                 <c:pt idx="49">
-                  <c:v>0.826</c:v>
+                  <c:v>0.82599999999999996</c:v>
                 </c:pt>
                 <c:pt idx="50">
-                  <c:v>0.817</c:v>
+                  <c:v>0.81699999999999995</c:v>
                 </c:pt>
                 <c:pt idx="51">
                   <c:v>0.872</c:v>
@@ -2597,135 +2648,140 @@
                   <c:v>0.874</c:v>
                 </c:pt>
                 <c:pt idx="53">
-                  <c:v>0.892</c:v>
+                  <c:v>0.89200000000000002</c:v>
                 </c:pt>
                 <c:pt idx="54">
-                  <c:v>0.884</c:v>
+                  <c:v>0.88400000000000001</c:v>
                 </c:pt>
                 <c:pt idx="55">
-                  <c:v>0.896</c:v>
+                  <c:v>0.89600000000000002</c:v>
                 </c:pt>
                 <c:pt idx="56">
-                  <c:v>0.933</c:v>
+                  <c:v>0.93300000000000005</c:v>
                 </c:pt>
                 <c:pt idx="57">
-                  <c:v>0.931</c:v>
+                  <c:v>0.93100000000000005</c:v>
                 </c:pt>
                 <c:pt idx="58">
-                  <c:v>0.928</c:v>
+                  <c:v>0.92800000000000005</c:v>
                 </c:pt>
                 <c:pt idx="59">
-                  <c:v>0.894</c:v>
+                  <c:v>0.89400000000000002</c:v>
                 </c:pt>
                 <c:pt idx="60">
-                  <c:v>0.896</c:v>
+                  <c:v>0.89600000000000002</c:v>
                 </c:pt>
                 <c:pt idx="61">
-                  <c:v>0.897</c:v>
+                  <c:v>0.89700000000000002</c:v>
                 </c:pt>
                 <c:pt idx="62">
-                  <c:v>0.902</c:v>
+                  <c:v>0.90200000000000002</c:v>
                 </c:pt>
                 <c:pt idx="63">
-                  <c:v>0.892</c:v>
+                  <c:v>0.89200000000000002</c:v>
                 </c:pt>
                 <c:pt idx="64">
-                  <c:v>0.882</c:v>
+                  <c:v>0.88200000000000001</c:v>
                 </c:pt>
                 <c:pt idx="65">
-                  <c:v>0.855</c:v>
+                  <c:v>0.85499999999999998</c:v>
                 </c:pt>
                 <c:pt idx="66">
-                  <c:v>0.838</c:v>
+                  <c:v>0.83799999999999997</c:v>
                 </c:pt>
                 <c:pt idx="67">
-                  <c:v>0.866</c:v>
+                  <c:v>0.86599999999999999</c:v>
                 </c:pt>
                 <c:pt idx="68">
-                  <c:v>0.867</c:v>
+                  <c:v>0.86699999999999999</c:v>
                 </c:pt>
                 <c:pt idx="69">
-                  <c:v>0.886</c:v>
+                  <c:v>0.88600000000000001</c:v>
                 </c:pt>
                 <c:pt idx="70">
-                  <c:v>0.922</c:v>
+                  <c:v>0.92200000000000004</c:v>
                 </c:pt>
                 <c:pt idx="71">
-                  <c:v>0.934</c:v>
+                  <c:v>0.93400000000000005</c:v>
                 </c:pt>
                 <c:pt idx="72">
                   <c:v>0.872</c:v>
                 </c:pt>
                 <c:pt idx="73">
-                  <c:v>0.886</c:v>
+                  <c:v>0.88600000000000001</c:v>
                 </c:pt>
                 <c:pt idx="74">
-                  <c:v>0.884</c:v>
+                  <c:v>0.88400000000000001</c:v>
                 </c:pt>
                 <c:pt idx="75">
-                  <c:v>0.918</c:v>
+                  <c:v>0.91800000000000004</c:v>
                 </c:pt>
                 <c:pt idx="76">
-                  <c:v>0.946</c:v>
+                  <c:v>0.94599999999999995</c:v>
                 </c:pt>
                 <c:pt idx="77">
-                  <c:v>0.952</c:v>
+                  <c:v>0.95199999999999996</c:v>
                 </c:pt>
                 <c:pt idx="78">
-                  <c:v>0.934</c:v>
+                  <c:v>0.93400000000000005</c:v>
                 </c:pt>
                 <c:pt idx="79">
-                  <c:v>0.948</c:v>
+                  <c:v>0.94799999999999995</c:v>
                 </c:pt>
                 <c:pt idx="80">
-                  <c:v>0.945</c:v>
+                  <c:v>0.94499999999999995</c:v>
                 </c:pt>
                 <c:pt idx="81">
-                  <c:v>0.949</c:v>
+                  <c:v>0.94899999999999995</c:v>
                 </c:pt>
                 <c:pt idx="82">
-                  <c:v>0.957</c:v>
+                  <c:v>0.95699999999999996</c:v>
                 </c:pt>
                 <c:pt idx="83">
                   <c:v>0.85</c:v>
                 </c:pt>
                 <c:pt idx="84">
-                  <c:v>0.829</c:v>
+                  <c:v>0.82899999999999996</c:v>
                 </c:pt>
                 <c:pt idx="85">
-                  <c:v>0.771</c:v>
+                  <c:v>0.77100000000000002</c:v>
                 </c:pt>
                 <c:pt idx="86">
-                  <c:v>0.788</c:v>
+                  <c:v>0.78800000000000003</c:v>
                 </c:pt>
                 <c:pt idx="87">
-                  <c:v>0.864</c:v>
+                  <c:v>0.86399999999999999</c:v>
                 </c:pt>
                 <c:pt idx="88">
-                  <c:v>0.795</c:v>
+                  <c:v>0.79500000000000004</c:v>
                 </c:pt>
                 <c:pt idx="89">
                   <c:v>0.77</c:v>
                 </c:pt>
                 <c:pt idx="90">
-                  <c:v>0.683</c:v>
+                  <c:v>0.68300000000000005</c:v>
                 </c:pt>
                 <c:pt idx="91">
-                  <c:v>0.702</c:v>
+                  <c:v>0.70199999999999996</c:v>
                 </c:pt>
                 <c:pt idx="92">
-                  <c:v>0.535</c:v>
+                  <c:v>0.53500000000000003</c:v>
                 </c:pt>
                 <c:pt idx="93">
                   <c:v>0.497</c:v>
                 </c:pt>
                 <c:pt idx="94">
-                  <c:v>0.447</c:v>
+                  <c:v>0.44700000000000001</c:v>
                 </c:pt>
               </c:numCache>
             </c:numRef>
           </c:val>
           <c:smooth val="0"/>
+          <c:extLst>
+            <c:ext xmlns:c16="http://schemas.microsoft.com/office/drawing/2014/chart" uri="{C3380CC4-5D6E-409C-BE32-E72D297353CC}">
+              <c16:uniqueId val="{00000001-C4C9-834A-BFCF-34EDA3BBBF4A}"/>
+            </c:ext>
+          </c:extLst>
         </c:ser>
         <c:ser>
           <c:idx val="2"/>
@@ -3052,97 +3108,97 @@
                 <c:formatCode>General</c:formatCode>
                 <c:ptCount val="95"/>
                 <c:pt idx="0">
-                  <c:v>0.0</c:v>
+                  <c:v>0</c:v>
                 </c:pt>
                 <c:pt idx="1">
-                  <c:v>0.0</c:v>
+                  <c:v>0</c:v>
                 </c:pt>
                 <c:pt idx="2">
-                  <c:v>0.0</c:v>
+                  <c:v>0</c:v>
                 </c:pt>
                 <c:pt idx="3">
-                  <c:v>0.0</c:v>
+                  <c:v>0</c:v>
                 </c:pt>
                 <c:pt idx="4">
                   <c:v>0.89</c:v>
                 </c:pt>
                 <c:pt idx="5">
-                  <c:v>0.863</c:v>
+                  <c:v>0.86299999999999999</c:v>
                 </c:pt>
                 <c:pt idx="6">
-                  <c:v>0.925</c:v>
+                  <c:v>0.92500000000000004</c:v>
                 </c:pt>
                 <c:pt idx="7">
-                  <c:v>0.926</c:v>
+                  <c:v>0.92600000000000005</c:v>
                 </c:pt>
                 <c:pt idx="8">
                   <c:v>0.96</c:v>
                 </c:pt>
                 <c:pt idx="9">
-                  <c:v>0.963</c:v>
+                  <c:v>0.96299999999999997</c:v>
                 </c:pt>
                 <c:pt idx="10">
                   <c:v>0.95</c:v>
                 </c:pt>
                 <c:pt idx="11">
-                  <c:v>0.956</c:v>
+                  <c:v>0.95599999999999996</c:v>
                 </c:pt>
                 <c:pt idx="12">
-                  <c:v>0.938</c:v>
+                  <c:v>0.93799999999999994</c:v>
                 </c:pt>
                 <c:pt idx="13">
-                  <c:v>0.947</c:v>
+                  <c:v>0.94699999999999995</c:v>
                 </c:pt>
                 <c:pt idx="14">
-                  <c:v>0.939</c:v>
+                  <c:v>0.93899999999999995</c:v>
                 </c:pt>
                 <c:pt idx="15">
-                  <c:v>0.889</c:v>
+                  <c:v>0.88900000000000001</c:v>
                 </c:pt>
                 <c:pt idx="16">
-                  <c:v>0.884</c:v>
+                  <c:v>0.88400000000000001</c:v>
                 </c:pt>
                 <c:pt idx="17">
                   <c:v>0.877</c:v>
                 </c:pt>
                 <c:pt idx="18">
-                  <c:v>0.924</c:v>
+                  <c:v>0.92400000000000004</c:v>
                 </c:pt>
                 <c:pt idx="19">
                   <c:v>0.91</c:v>
                 </c:pt>
                 <c:pt idx="20">
-                  <c:v>0.919</c:v>
+                  <c:v>0.91900000000000004</c:v>
                 </c:pt>
                 <c:pt idx="21">
-                  <c:v>0.912</c:v>
+                  <c:v>0.91200000000000003</c:v>
                 </c:pt>
                 <c:pt idx="22">
-                  <c:v>0.921</c:v>
+                  <c:v>0.92100000000000004</c:v>
                 </c:pt>
                 <c:pt idx="23">
-                  <c:v>0.948</c:v>
+                  <c:v>0.94799999999999995</c:v>
                 </c:pt>
                 <c:pt idx="24">
-                  <c:v>0.964</c:v>
+                  <c:v>0.96399999999999997</c:v>
                 </c:pt>
                 <c:pt idx="25">
-                  <c:v>0.967</c:v>
+                  <c:v>0.96699999999999997</c:v>
                 </c:pt>
                 <c:pt idx="26">
-                  <c:v>0.959</c:v>
+                  <c:v>0.95899999999999996</c:v>
                 </c:pt>
                 <c:pt idx="27">
-                  <c:v>0.961</c:v>
+                  <c:v>0.96099999999999997</c:v>
                 </c:pt>
                 <c:pt idx="28">
-                  <c:v>0.951</c:v>
+                  <c:v>0.95099999999999996</c:v>
                 </c:pt>
                 <c:pt idx="29">
                   <c:v>0.96</c:v>
                 </c:pt>
                 <c:pt idx="30">
-                  <c:v>0.944</c:v>
+                  <c:v>0.94399999999999995</c:v>
                 </c:pt>
                 <c:pt idx="31">
                   <c:v>0.86</c:v>
@@ -3154,194 +3210,206 @@
                   <c:v>0.88</c:v>
                 </c:pt>
                 <c:pt idx="34">
-                  <c:v>0.936</c:v>
+                  <c:v>0.93600000000000005</c:v>
                 </c:pt>
                 <c:pt idx="35">
-                  <c:v>0.937</c:v>
+                  <c:v>0.93700000000000006</c:v>
                 </c:pt>
                 <c:pt idx="36">
-                  <c:v>0.931</c:v>
+                  <c:v>0.93100000000000005</c:v>
                 </c:pt>
                 <c:pt idx="37">
-                  <c:v>0.922</c:v>
+                  <c:v>0.92200000000000004</c:v>
                 </c:pt>
                 <c:pt idx="38">
-                  <c:v>0.924</c:v>
+                  <c:v>0.92400000000000004</c:v>
                 </c:pt>
                 <c:pt idx="39">
-                  <c:v>0.887</c:v>
+                  <c:v>0.88700000000000001</c:v>
                 </c:pt>
                 <c:pt idx="40">
-                  <c:v>0.913</c:v>
+                  <c:v>0.91300000000000003</c:v>
                 </c:pt>
                 <c:pt idx="41">
-                  <c:v>0.901</c:v>
+                  <c:v>0.90100000000000002</c:v>
                 </c:pt>
                 <c:pt idx="42">
-                  <c:v>0.884</c:v>
+                  <c:v>0.88400000000000001</c:v>
                 </c:pt>
                 <c:pt idx="43">
                   <c:v>0.89</c:v>
                 </c:pt>
                 <c:pt idx="44">
-                  <c:v>0.815</c:v>
+                  <c:v>0.81499999999999995</c:v>
                 </c:pt>
                 <c:pt idx="45">
-                  <c:v>0.837</c:v>
+                  <c:v>0.83699999999999997</c:v>
                 </c:pt>
                 <c:pt idx="46">
-                  <c:v>0.862</c:v>
+                  <c:v>0.86199999999999999</c:v>
                 </c:pt>
                 <c:pt idx="47">
-                  <c:v>0.926</c:v>
+                  <c:v>0.92600000000000005</c:v>
                 </c:pt>
                 <c:pt idx="48">
-                  <c:v>0.929</c:v>
+                  <c:v>0.92900000000000005</c:v>
                 </c:pt>
                 <c:pt idx="49">
                   <c:v>0.91</c:v>
                 </c:pt>
                 <c:pt idx="50">
-                  <c:v>0.903</c:v>
+                  <c:v>0.90300000000000002</c:v>
                 </c:pt>
                 <c:pt idx="51">
-                  <c:v>0.892</c:v>
+                  <c:v>0.89200000000000002</c:v>
                 </c:pt>
                 <c:pt idx="52">
-                  <c:v>0.891</c:v>
+                  <c:v>0.89100000000000001</c:v>
                 </c:pt>
                 <c:pt idx="53">
-                  <c:v>0.911</c:v>
+                  <c:v>0.91100000000000003</c:v>
                 </c:pt>
                 <c:pt idx="54">
-                  <c:v>0.909</c:v>
+                  <c:v>0.90900000000000003</c:v>
                 </c:pt>
                 <c:pt idx="55">
-                  <c:v>0.903</c:v>
+                  <c:v>0.90300000000000002</c:v>
                 </c:pt>
                 <c:pt idx="56">
-                  <c:v>0.934</c:v>
+                  <c:v>0.93400000000000005</c:v>
                 </c:pt>
                 <c:pt idx="57">
-                  <c:v>0.911</c:v>
+                  <c:v>0.91100000000000003</c:v>
                 </c:pt>
                 <c:pt idx="58">
-                  <c:v>0.887</c:v>
+                  <c:v>0.88700000000000001</c:v>
                 </c:pt>
                 <c:pt idx="59">
                   <c:v>0.87</c:v>
                 </c:pt>
                 <c:pt idx="60">
-                  <c:v>0.888</c:v>
+                  <c:v>0.88800000000000001</c:v>
                 </c:pt>
                 <c:pt idx="61">
-                  <c:v>0.919</c:v>
+                  <c:v>0.91900000000000004</c:v>
                 </c:pt>
                 <c:pt idx="62">
-                  <c:v>0.952</c:v>
+                  <c:v>0.95199999999999996</c:v>
                 </c:pt>
                 <c:pt idx="63">
-                  <c:v>0.948</c:v>
+                  <c:v>0.94799999999999995</c:v>
                 </c:pt>
                 <c:pt idx="64">
-                  <c:v>0.918</c:v>
+                  <c:v>0.91800000000000004</c:v>
                 </c:pt>
                 <c:pt idx="65">
                   <c:v>0.875</c:v>
                 </c:pt>
                 <c:pt idx="66">
-                  <c:v>0.885</c:v>
+                  <c:v>0.88500000000000001</c:v>
                 </c:pt>
                 <c:pt idx="67">
                   <c:v>0.877</c:v>
                 </c:pt>
                 <c:pt idx="68">
-                  <c:v>0.913</c:v>
+                  <c:v>0.91300000000000003</c:v>
                 </c:pt>
                 <c:pt idx="69">
-                  <c:v>0.915</c:v>
+                  <c:v>0.91500000000000004</c:v>
                 </c:pt>
                 <c:pt idx="70">
-                  <c:v>0.926</c:v>
+                  <c:v>0.92600000000000005</c:v>
                 </c:pt>
                 <c:pt idx="71">
-                  <c:v>0.937</c:v>
+                  <c:v>0.93700000000000006</c:v>
                 </c:pt>
                 <c:pt idx="72">
-                  <c:v>0.924</c:v>
+                  <c:v>0.92400000000000004</c:v>
                 </c:pt>
                 <c:pt idx="73">
-                  <c:v>0.881</c:v>
+                  <c:v>0.88100000000000001</c:v>
                 </c:pt>
                 <c:pt idx="74">
-                  <c:v>0.892</c:v>
+                  <c:v>0.89200000000000002</c:v>
                 </c:pt>
                 <c:pt idx="75">
-                  <c:v>0.909</c:v>
+                  <c:v>0.90900000000000003</c:v>
                 </c:pt>
                 <c:pt idx="76">
-                  <c:v>0.951</c:v>
+                  <c:v>0.95099999999999996</c:v>
                 </c:pt>
                 <c:pt idx="77">
                   <c:v>0.96</c:v>
                 </c:pt>
                 <c:pt idx="78">
-                  <c:v>0.931</c:v>
+                  <c:v>0.93100000000000005</c:v>
                 </c:pt>
                 <c:pt idx="79">
-                  <c:v>0.918</c:v>
+                  <c:v>0.91800000000000004</c:v>
                 </c:pt>
                 <c:pt idx="80">
-                  <c:v>0.886</c:v>
+                  <c:v>0.88600000000000001</c:v>
                 </c:pt>
                 <c:pt idx="81">
-                  <c:v>0.891</c:v>
+                  <c:v>0.89100000000000001</c:v>
                 </c:pt>
                 <c:pt idx="82">
-                  <c:v>0.865</c:v>
+                  <c:v>0.86499999999999999</c:v>
                 </c:pt>
                 <c:pt idx="83">
-                  <c:v>0.898</c:v>
+                  <c:v>0.89800000000000002</c:v>
                 </c:pt>
                 <c:pt idx="84">
-                  <c:v>0.886</c:v>
+                  <c:v>0.88600000000000001</c:v>
                 </c:pt>
                 <c:pt idx="85">
-                  <c:v>0.917</c:v>
+                  <c:v>0.91700000000000004</c:v>
                 </c:pt>
                 <c:pt idx="86">
-                  <c:v>0.926</c:v>
+                  <c:v>0.92600000000000005</c:v>
                 </c:pt>
                 <c:pt idx="87">
                   <c:v>0.93</c:v>
                 </c:pt>
                 <c:pt idx="88">
-                  <c:v>0.904</c:v>
+                  <c:v>0.90400000000000003</c:v>
                 </c:pt>
                 <c:pt idx="89">
-                  <c:v>0.919</c:v>
+                  <c:v>0.91900000000000004</c:v>
                 </c:pt>
                 <c:pt idx="90">
-                  <c:v>0.926</c:v>
+                  <c:v>0.92600000000000005</c:v>
                 </c:pt>
                 <c:pt idx="91">
-                  <c:v>0.944</c:v>
+                  <c:v>0.94399999999999995</c:v>
                 </c:pt>
                 <c:pt idx="92">
-                  <c:v>0.897</c:v>
+                  <c:v>0.89700000000000002</c:v>
                 </c:pt>
                 <c:pt idx="93">
-                  <c:v>0.869</c:v>
+                  <c:v>0.86899999999999999</c:v>
                 </c:pt>
                 <c:pt idx="94">
-                  <c:v>0.853</c:v>
+                  <c:v>0.85299999999999998</c:v>
                 </c:pt>
               </c:numCache>
             </c:numRef>
           </c:val>
           <c:smooth val="0"/>
+          <c:extLst>
+            <c:ext xmlns:c16="http://schemas.microsoft.com/office/drawing/2014/chart" uri="{C3380CC4-5D6E-409C-BE32-E72D297353CC}">
+              <c16:uniqueId val="{00000002-C4C9-834A-BFCF-34EDA3BBBF4A}"/>
+            </c:ext>
+          </c:extLst>
         </c:ser>
-        <c:marker val="1"/>
+        <c:dLbls>
+          <c:showLegendKey val="0"/>
+          <c:showVal val="0"/>
+          <c:showCatName val="0"/>
+          <c:showSerName val="0"/>
+          <c:showPercent val="0"/>
+          <c:showBubbleSize val="0"/>
+        </c:dLbls>
         <c:smooth val="0"/>
         <c:axId val="2118791784"/>
         <c:axId val="2140495176"/>
@@ -3353,6 +3421,7 @@
         </c:scaling>
         <c:delete val="0"/>
         <c:axPos val="b"/>
+        <c:numFmt formatCode="General" sourceLinked="0"/>
         <c:majorTickMark val="out"/>
         <c:minorTickMark val="none"/>
         <c:tickLblPos val="nextTo"/>
@@ -3363,6 +3432,7 @@
             <a:pPr>
               <a:defRPr sz="950"/>
             </a:pPr>
+            <a:endParaRPr lang="en-US"/>
           </a:p>
         </c:txPr>
         <c:crossAx val="2140495176"/>
@@ -3374,7 +3444,9 @@
       </c:catAx>
       <c:valAx>
         <c:axId val="2140495176"/>
-        <c:scaling/>
+        <c:scaling>
+          <c:orientation val="minMax"/>
+        </c:scaling>
         <c:delete val="0"/>
         <c:axPos val="l"/>
         <c:majorGridlines>
@@ -3386,6 +3458,7 @@
             </a:ln>
           </c:spPr>
         </c:majorGridlines>
+        <c:numFmt formatCode="General" sourceLinked="1"/>
         <c:majorTickMark val="out"/>
         <c:minorTickMark val="none"/>
         <c:tickLblPos val="nextTo"/>
@@ -3396,15 +3469,16 @@
             <a:pPr>
               <a:defRPr sz="950"/>
             </a:pPr>
+            <a:endParaRPr lang="en-US"/>
           </a:p>
         </c:txPr>
         <c:crossAx val="2118791784"/>
         <c:crosses val="autoZero"/>
+        <c:crossBetween val="between"/>
       </c:valAx>
     </c:plotArea>
     <c:legend>
       <c:legendPos val="b"/>
-      <c:layout/>
       <c:overlay val="0"/>
       <c:txPr>
         <a:bodyPr/>
@@ -3413,6 +3487,7 @@
           <a:pPr>
             <a:defRPr sz="1050"/>
           </a:pPr>
+          <a:endParaRPr lang="en-US"/>
         </a:p>
       </c:txPr>
     </c:legend>
@@ -3474,10 +3549,9 @@
           <a:lstStyle/>
           <a:p>
             <a:r>
-              <a:rPr lang="en-US" smtClean="0"/>
+              <a:rPr lang="en-US"/>
               <a:t>Click to edit Master title style</a:t>
             </a:r>
-            <a:endParaRPr lang="en-US"/>
           </a:p>
         </p:txBody>
       </p:sp>
@@ -3593,10 +3667,9 @@
           </a:lstStyle>
           <a:p>
             <a:r>
-              <a:rPr lang="en-US" smtClean="0"/>
+              <a:rPr lang="en-US"/>
               <a:t>Click to edit Master subtitle style</a:t>
             </a:r>
-            <a:endParaRPr lang="en-US"/>
           </a:p>
         </p:txBody>
       </p:sp>
@@ -3617,7 +3690,7 @@
           <a:p>
             <a:fld id="{5BCAD085-E8A6-8845-BD4E-CB4CCA059FC4}" type="datetimeFigureOut">
               <a:rPr lang="en-US" smtClean="0"/>
-              <a:t>1/27/13</a:t>
+              <a:t>7/19/26</a:t>
             </a:fld>
             <a:endParaRPr lang="en-US"/>
           </a:p>
@@ -3711,10 +3784,9 @@
           <a:lstStyle/>
           <a:p>
             <a:r>
-              <a:rPr lang="en-US" smtClean="0"/>
+              <a:rPr lang="en-US"/>
               <a:t>Click to edit Master title style</a:t>
             </a:r>
-            <a:endParaRPr lang="en-US"/>
           </a:p>
         </p:txBody>
       </p:sp>
@@ -3735,38 +3807,37 @@
           <a:p>
             <a:pPr lvl="0"/>
             <a:r>
-              <a:rPr lang="en-US" smtClean="0"/>
+              <a:rPr lang="en-US"/>
               <a:t>Click to edit Master text styles</a:t>
             </a:r>
           </a:p>
           <a:p>
             <a:pPr lvl="1"/>
             <a:r>
-              <a:rPr lang="en-US" smtClean="0"/>
+              <a:rPr lang="en-US"/>
               <a:t>Second level</a:t>
             </a:r>
           </a:p>
           <a:p>
             <a:pPr lvl="2"/>
             <a:r>
-              <a:rPr lang="en-US" smtClean="0"/>
+              <a:rPr lang="en-US"/>
               <a:t>Third level</a:t>
             </a:r>
           </a:p>
           <a:p>
             <a:pPr lvl="3"/>
             <a:r>
-              <a:rPr lang="en-US" smtClean="0"/>
+              <a:rPr lang="en-US"/>
               <a:t>Fourth level</a:t>
             </a:r>
           </a:p>
           <a:p>
             <a:pPr lvl="4"/>
             <a:r>
-              <a:rPr lang="en-US" smtClean="0"/>
+              <a:rPr lang="en-US"/>
               <a:t>Fifth level</a:t>
             </a:r>
-            <a:endParaRPr lang="en-US"/>
           </a:p>
         </p:txBody>
       </p:sp>
@@ -3787,7 +3858,7 @@
           <a:p>
             <a:fld id="{5BCAD085-E8A6-8845-BD4E-CB4CCA059FC4}" type="datetimeFigureOut">
               <a:rPr lang="en-US" smtClean="0"/>
-              <a:t>1/27/13</a:t>
+              <a:t>7/19/26</a:t>
             </a:fld>
             <a:endParaRPr lang="en-US"/>
           </a:p>
@@ -3886,10 +3957,9 @@
           <a:lstStyle/>
           <a:p>
             <a:r>
-              <a:rPr lang="en-US" smtClean="0"/>
+              <a:rPr lang="en-US"/>
               <a:t>Click to edit Master title style</a:t>
             </a:r>
-            <a:endParaRPr lang="en-US"/>
           </a:p>
         </p:txBody>
       </p:sp>
@@ -3915,38 +3985,37 @@
           <a:p>
             <a:pPr lvl="0"/>
             <a:r>
-              <a:rPr lang="en-US" smtClean="0"/>
+              <a:rPr lang="en-US"/>
               <a:t>Click to edit Master text styles</a:t>
             </a:r>
           </a:p>
           <a:p>
             <a:pPr lvl="1"/>
             <a:r>
-              <a:rPr lang="en-US" smtClean="0"/>
+              <a:rPr lang="en-US"/>
               <a:t>Second level</a:t>
             </a:r>
           </a:p>
           <a:p>
             <a:pPr lvl="2"/>
             <a:r>
-              <a:rPr lang="en-US" smtClean="0"/>
+              <a:rPr lang="en-US"/>
               <a:t>Third level</a:t>
             </a:r>
           </a:p>
           <a:p>
             <a:pPr lvl="3"/>
             <a:r>
-              <a:rPr lang="en-US" smtClean="0"/>
+              <a:rPr lang="en-US"/>
               <a:t>Fourth level</a:t>
             </a:r>
           </a:p>
           <a:p>
             <a:pPr lvl="4"/>
             <a:r>
-              <a:rPr lang="en-US" smtClean="0"/>
+              <a:rPr lang="en-US"/>
               <a:t>Fifth level</a:t>
             </a:r>
-            <a:endParaRPr lang="en-US"/>
           </a:p>
         </p:txBody>
       </p:sp>
@@ -3967,7 +4036,7 @@
           <a:p>
             <a:fld id="{5BCAD085-E8A6-8845-BD4E-CB4CCA059FC4}" type="datetimeFigureOut">
               <a:rPr lang="en-US" smtClean="0"/>
-              <a:t>1/27/13</a:t>
+              <a:t>7/19/26</a:t>
             </a:fld>
             <a:endParaRPr lang="en-US"/>
           </a:p>
@@ -4061,10 +4130,9 @@
           <a:lstStyle/>
           <a:p>
             <a:r>
-              <a:rPr lang="en-US" smtClean="0"/>
+              <a:rPr lang="en-US"/>
               <a:t>Click to edit Master title style</a:t>
             </a:r>
-            <a:endParaRPr lang="en-US"/>
           </a:p>
         </p:txBody>
       </p:sp>
@@ -4085,38 +4153,37 @@
           <a:p>
             <a:pPr lvl="0"/>
             <a:r>
-              <a:rPr lang="en-US" smtClean="0"/>
+              <a:rPr lang="en-US"/>
               <a:t>Click to edit Master text styles</a:t>
             </a:r>
           </a:p>
           <a:p>
             <a:pPr lvl="1"/>
             <a:r>
-              <a:rPr lang="en-US" smtClean="0"/>
+              <a:rPr lang="en-US"/>
               <a:t>Second level</a:t>
             </a:r>
           </a:p>
           <a:p>
             <a:pPr lvl="2"/>
             <a:r>
-              <a:rPr lang="en-US" smtClean="0"/>
+              <a:rPr lang="en-US"/>
               <a:t>Third level</a:t>
             </a:r>
           </a:p>
           <a:p>
             <a:pPr lvl="3"/>
             <a:r>
-              <a:rPr lang="en-US" smtClean="0"/>
+              <a:rPr lang="en-US"/>
               <a:t>Fourth level</a:t>
             </a:r>
           </a:p>
           <a:p>
             <a:pPr lvl="4"/>
             <a:r>
-              <a:rPr lang="en-US" smtClean="0"/>
+              <a:rPr lang="en-US"/>
               <a:t>Fifth level</a:t>
             </a:r>
-            <a:endParaRPr lang="en-US"/>
           </a:p>
         </p:txBody>
       </p:sp>
@@ -4137,7 +4204,7 @@
           <a:p>
             <a:fld id="{5BCAD085-E8A6-8845-BD4E-CB4CCA059FC4}" type="datetimeFigureOut">
               <a:rPr lang="en-US" smtClean="0"/>
-              <a:t>1/27/13</a:t>
+              <a:t>7/19/26</a:t>
             </a:fld>
             <a:endParaRPr lang="en-US"/>
           </a:p>
@@ -4240,10 +4307,9 @@
           </a:lstStyle>
           <a:p>
             <a:r>
-              <a:rPr lang="en-US" smtClean="0"/>
+              <a:rPr lang="en-US"/>
               <a:t>Click to edit Master title style</a:t>
             </a:r>
-            <a:endParaRPr lang="en-US"/>
           </a:p>
         </p:txBody>
       </p:sp>
@@ -4360,7 +4426,7 @@
           <a:p>
             <a:pPr lvl="0"/>
             <a:r>
-              <a:rPr lang="en-US" smtClean="0"/>
+              <a:rPr lang="en-US"/>
               <a:t>Click to edit Master text styles</a:t>
             </a:r>
           </a:p>
@@ -4383,7 +4449,7 @@
           <a:p>
             <a:fld id="{5BCAD085-E8A6-8845-BD4E-CB4CCA059FC4}" type="datetimeFigureOut">
               <a:rPr lang="en-US" smtClean="0"/>
-              <a:t>1/27/13</a:t>
+              <a:t>7/19/26</a:t>
             </a:fld>
             <a:endParaRPr lang="en-US"/>
           </a:p>
@@ -4477,10 +4543,9 @@
           <a:lstStyle/>
           <a:p>
             <a:r>
-              <a:rPr lang="en-US" smtClean="0"/>
+              <a:rPr lang="en-US"/>
               <a:t>Click to edit Master title style</a:t>
             </a:r>
-            <a:endParaRPr lang="en-US"/>
           </a:p>
         </p:txBody>
       </p:sp>
@@ -4534,38 +4599,37 @@
           <a:p>
             <a:pPr lvl="0"/>
             <a:r>
-              <a:rPr lang="en-US" smtClean="0"/>
+              <a:rPr lang="en-US"/>
               <a:t>Click to edit Master text styles</a:t>
             </a:r>
           </a:p>
           <a:p>
             <a:pPr lvl="1"/>
             <a:r>
-              <a:rPr lang="en-US" smtClean="0"/>
+              <a:rPr lang="en-US"/>
               <a:t>Second level</a:t>
             </a:r>
           </a:p>
           <a:p>
             <a:pPr lvl="2"/>
             <a:r>
-              <a:rPr lang="en-US" smtClean="0"/>
+              <a:rPr lang="en-US"/>
               <a:t>Third level</a:t>
             </a:r>
           </a:p>
           <a:p>
             <a:pPr lvl="3"/>
             <a:r>
-              <a:rPr lang="en-US" smtClean="0"/>
+              <a:rPr lang="en-US"/>
               <a:t>Fourth level</a:t>
             </a:r>
           </a:p>
           <a:p>
             <a:pPr lvl="4"/>
             <a:r>
-              <a:rPr lang="en-US" smtClean="0"/>
+              <a:rPr lang="en-US"/>
               <a:t>Fifth level</a:t>
             </a:r>
-            <a:endParaRPr lang="en-US"/>
           </a:p>
         </p:txBody>
       </p:sp>
@@ -4619,38 +4683,37 @@
           <a:p>
             <a:pPr lvl="0"/>
             <a:r>
-              <a:rPr lang="en-US" smtClean="0"/>
+              <a:rPr lang="en-US"/>
               <a:t>Click to edit Master text styles</a:t>
             </a:r>
           </a:p>
           <a:p>
             <a:pPr lvl="1"/>
             <a:r>
-              <a:rPr lang="en-US" smtClean="0"/>
+              <a:rPr lang="en-US"/>
               <a:t>Second level</a:t>
             </a:r>
           </a:p>
           <a:p>
             <a:pPr lvl="2"/>
             <a:r>
-              <a:rPr lang="en-US" smtClean="0"/>
+              <a:rPr lang="en-US"/>
               <a:t>Third level</a:t>
             </a:r>
           </a:p>
           <a:p>
             <a:pPr lvl="3"/>
             <a:r>
-              <a:rPr lang="en-US" smtClean="0"/>
+              <a:rPr lang="en-US"/>
               <a:t>Fourth level</a:t>
             </a:r>
           </a:p>
           <a:p>
             <a:pPr lvl="4"/>
             <a:r>
-              <a:rPr lang="en-US" smtClean="0"/>
+              <a:rPr lang="en-US"/>
               <a:t>Fifth level</a:t>
             </a:r>
-            <a:endParaRPr lang="en-US"/>
           </a:p>
         </p:txBody>
       </p:sp>
@@ -4671,7 +4734,7 @@
           <a:p>
             <a:fld id="{5BCAD085-E8A6-8845-BD4E-CB4CCA059FC4}" type="datetimeFigureOut">
               <a:rPr lang="en-US" smtClean="0"/>
-              <a:t>1/27/13</a:t>
+              <a:t>7/19/26</a:t>
             </a:fld>
             <a:endParaRPr lang="en-US"/>
           </a:p>
@@ -4769,10 +4832,9 @@
           </a:lstStyle>
           <a:p>
             <a:r>
-              <a:rPr lang="en-US" smtClean="0"/>
+              <a:rPr lang="en-US"/>
               <a:t>Click to edit Master title style</a:t>
             </a:r>
-            <a:endParaRPr lang="en-US"/>
           </a:p>
         </p:txBody>
       </p:sp>
@@ -4835,7 +4897,7 @@
           <a:p>
             <a:pPr lvl="0"/>
             <a:r>
-              <a:rPr lang="en-US" smtClean="0"/>
+              <a:rPr lang="en-US"/>
               <a:t>Click to edit Master text styles</a:t>
             </a:r>
           </a:p>
@@ -4891,38 +4953,37 @@
           <a:p>
             <a:pPr lvl="0"/>
             <a:r>
-              <a:rPr lang="en-US" smtClean="0"/>
+              <a:rPr lang="en-US"/>
               <a:t>Click to edit Master text styles</a:t>
             </a:r>
           </a:p>
           <a:p>
             <a:pPr lvl="1"/>
             <a:r>
-              <a:rPr lang="en-US" smtClean="0"/>
+              <a:rPr lang="en-US"/>
               <a:t>Second level</a:t>
             </a:r>
           </a:p>
           <a:p>
             <a:pPr lvl="2"/>
             <a:r>
-              <a:rPr lang="en-US" smtClean="0"/>
+              <a:rPr lang="en-US"/>
               <a:t>Third level</a:t>
             </a:r>
           </a:p>
           <a:p>
             <a:pPr lvl="3"/>
             <a:r>
-              <a:rPr lang="en-US" smtClean="0"/>
+              <a:rPr lang="en-US"/>
               <a:t>Fourth level</a:t>
             </a:r>
           </a:p>
           <a:p>
             <a:pPr lvl="4"/>
             <a:r>
-              <a:rPr lang="en-US" smtClean="0"/>
+              <a:rPr lang="en-US"/>
               <a:t>Fifth level</a:t>
             </a:r>
-            <a:endParaRPr lang="en-US"/>
           </a:p>
         </p:txBody>
       </p:sp>
@@ -4985,7 +5046,7 @@
           <a:p>
             <a:pPr lvl="0"/>
             <a:r>
-              <a:rPr lang="en-US" smtClean="0"/>
+              <a:rPr lang="en-US"/>
               <a:t>Click to edit Master text styles</a:t>
             </a:r>
           </a:p>
@@ -5041,38 +5102,37 @@
           <a:p>
             <a:pPr lvl="0"/>
             <a:r>
-              <a:rPr lang="en-US" smtClean="0"/>
+              <a:rPr lang="en-US"/>
               <a:t>Click to edit Master text styles</a:t>
             </a:r>
           </a:p>
           <a:p>
             <a:pPr lvl="1"/>
             <a:r>
-              <a:rPr lang="en-US" smtClean="0"/>
+              <a:rPr lang="en-US"/>
               <a:t>Second level</a:t>
             </a:r>
           </a:p>
           <a:p>
             <a:pPr lvl="2"/>
             <a:r>
-              <a:rPr lang="en-US" smtClean="0"/>
+              <a:rPr lang="en-US"/>
               <a:t>Third level</a:t>
             </a:r>
           </a:p>
           <a:p>
             <a:pPr lvl="3"/>
             <a:r>
-              <a:rPr lang="en-US" smtClean="0"/>
+              <a:rPr lang="en-US"/>
               <a:t>Fourth level</a:t>
             </a:r>
           </a:p>
           <a:p>
             <a:pPr lvl="4"/>
             <a:r>
-              <a:rPr lang="en-US" smtClean="0"/>
+              <a:rPr lang="en-US"/>
               <a:t>Fifth level</a:t>
             </a:r>
-            <a:endParaRPr lang="en-US"/>
           </a:p>
         </p:txBody>
       </p:sp>
@@ -5093,7 +5153,7 @@
           <a:p>
             <a:fld id="{5BCAD085-E8A6-8845-BD4E-CB4CCA059FC4}" type="datetimeFigureOut">
               <a:rPr lang="en-US" smtClean="0"/>
-              <a:t>1/27/13</a:t>
+              <a:t>7/19/26</a:t>
             </a:fld>
             <a:endParaRPr lang="en-US"/>
           </a:p>
@@ -5187,10 +5247,9 @@
           <a:lstStyle/>
           <a:p>
             <a:r>
-              <a:rPr lang="en-US" smtClean="0"/>
+              <a:rPr lang="en-US"/>
               <a:t>Click to edit Master title style</a:t>
             </a:r>
-            <a:endParaRPr lang="en-US"/>
           </a:p>
         </p:txBody>
       </p:sp>
@@ -5211,7 +5270,7 @@
           <a:p>
             <a:fld id="{5BCAD085-E8A6-8845-BD4E-CB4CCA059FC4}" type="datetimeFigureOut">
               <a:rPr lang="en-US" smtClean="0"/>
-              <a:t>1/27/13</a:t>
+              <a:t>7/19/26</a:t>
             </a:fld>
             <a:endParaRPr lang="en-US"/>
           </a:p>
@@ -5306,7 +5365,7 @@
           <a:p>
             <a:fld id="{5BCAD085-E8A6-8845-BD4E-CB4CCA059FC4}" type="datetimeFigureOut">
               <a:rPr lang="en-US" smtClean="0"/>
-              <a:t>1/27/13</a:t>
+              <a:t>7/19/26</a:t>
             </a:fld>
             <a:endParaRPr lang="en-US"/>
           </a:p>
@@ -5409,10 +5468,9 @@
           </a:lstStyle>
           <a:p>
             <a:r>
-              <a:rPr lang="en-US" smtClean="0"/>
+              <a:rPr lang="en-US"/>
               <a:t>Click to edit Master title style</a:t>
             </a:r>
-            <a:endParaRPr lang="en-US"/>
           </a:p>
         </p:txBody>
       </p:sp>
@@ -5466,38 +5524,37 @@
           <a:p>
             <a:pPr lvl="0"/>
             <a:r>
-              <a:rPr lang="en-US" smtClean="0"/>
+              <a:rPr lang="en-US"/>
               <a:t>Click to edit Master text styles</a:t>
             </a:r>
           </a:p>
           <a:p>
             <a:pPr lvl="1"/>
             <a:r>
-              <a:rPr lang="en-US" smtClean="0"/>
+              <a:rPr lang="en-US"/>
               <a:t>Second level</a:t>
             </a:r>
           </a:p>
           <a:p>
             <a:pPr lvl="2"/>
             <a:r>
-              <a:rPr lang="en-US" smtClean="0"/>
+              <a:rPr lang="en-US"/>
               <a:t>Third level</a:t>
             </a:r>
           </a:p>
           <a:p>
             <a:pPr lvl="3"/>
             <a:r>
-              <a:rPr lang="en-US" smtClean="0"/>
+              <a:rPr lang="en-US"/>
               <a:t>Fourth level</a:t>
             </a:r>
           </a:p>
           <a:p>
             <a:pPr lvl="4"/>
             <a:r>
-              <a:rPr lang="en-US" smtClean="0"/>
+              <a:rPr lang="en-US"/>
               <a:t>Fifth level</a:t>
             </a:r>
-            <a:endParaRPr lang="en-US"/>
           </a:p>
         </p:txBody>
       </p:sp>
@@ -5560,7 +5617,7 @@
           <a:p>
             <a:pPr lvl="0"/>
             <a:r>
-              <a:rPr lang="en-US" smtClean="0"/>
+              <a:rPr lang="en-US"/>
               <a:t>Click to edit Master text styles</a:t>
             </a:r>
           </a:p>
@@ -5583,7 +5640,7 @@
           <a:p>
             <a:fld id="{5BCAD085-E8A6-8845-BD4E-CB4CCA059FC4}" type="datetimeFigureOut">
               <a:rPr lang="en-US" smtClean="0"/>
-              <a:t>1/27/13</a:t>
+              <a:t>7/19/26</a:t>
             </a:fld>
             <a:endParaRPr lang="en-US"/>
           </a:p>
@@ -5686,10 +5743,9 @@
           </a:lstStyle>
           <a:p>
             <a:r>
-              <a:rPr lang="en-US" smtClean="0"/>
+              <a:rPr lang="en-US"/>
               <a:t>Click to edit Master title style</a:t>
             </a:r>
-            <a:endParaRPr lang="en-US"/>
           </a:p>
         </p:txBody>
       </p:sp>
@@ -5813,7 +5869,7 @@
           <a:p>
             <a:pPr lvl="0"/>
             <a:r>
-              <a:rPr lang="en-US" smtClean="0"/>
+              <a:rPr lang="en-US"/>
               <a:t>Click to edit Master text styles</a:t>
             </a:r>
           </a:p>
@@ -5836,7 +5892,7 @@
           <a:p>
             <a:fld id="{5BCAD085-E8A6-8845-BD4E-CB4CCA059FC4}" type="datetimeFigureOut">
               <a:rPr lang="en-US" smtClean="0"/>
-              <a:t>1/27/13</a:t>
+              <a:t>7/19/26</a:t>
             </a:fld>
             <a:endParaRPr lang="en-US"/>
           </a:p>
@@ -5945,10 +6001,9 @@
           <a:lstStyle/>
           <a:p>
             <a:r>
-              <a:rPr lang="en-US" smtClean="0"/>
+              <a:rPr lang="en-US"/>
               <a:t>Click to edit Master title style</a:t>
             </a:r>
-            <a:endParaRPr lang="en-US"/>
           </a:p>
         </p:txBody>
       </p:sp>
@@ -5979,38 +6034,37 @@
           <a:p>
             <a:pPr lvl="0"/>
             <a:r>
-              <a:rPr lang="en-US" smtClean="0"/>
+              <a:rPr lang="en-US"/>
               <a:t>Click to edit Master text styles</a:t>
             </a:r>
           </a:p>
           <a:p>
             <a:pPr lvl="1"/>
             <a:r>
-              <a:rPr lang="en-US" smtClean="0"/>
+              <a:rPr lang="en-US"/>
               <a:t>Second level</a:t>
             </a:r>
           </a:p>
           <a:p>
             <a:pPr lvl="2"/>
             <a:r>
-              <a:rPr lang="en-US" smtClean="0"/>
+              <a:rPr lang="en-US"/>
               <a:t>Third level</a:t>
             </a:r>
           </a:p>
           <a:p>
             <a:pPr lvl="3"/>
             <a:r>
-              <a:rPr lang="en-US" smtClean="0"/>
+              <a:rPr lang="en-US"/>
               <a:t>Fourth level</a:t>
             </a:r>
           </a:p>
           <a:p>
             <a:pPr lvl="4"/>
             <a:r>
-              <a:rPr lang="en-US" smtClean="0"/>
+              <a:rPr lang="en-US"/>
               <a:t>Fifth level</a:t>
             </a:r>
-            <a:endParaRPr lang="en-US"/>
           </a:p>
         </p:txBody>
       </p:sp>
@@ -6049,7 +6103,7 @@
           <a:p>
             <a:fld id="{5BCAD085-E8A6-8845-BD4E-CB4CCA059FC4}" type="datetimeFigureOut">
               <a:rPr lang="en-US" smtClean="0"/>
-              <a:t>1/27/13</a:t>
+              <a:t>7/19/26</a:t>
             </a:fld>
             <a:endParaRPr lang="en-US"/>
           </a:p>
@@ -6408,7 +6462,7 @@
 </file>
 
 <file path=ppt/slides/slide1.xml><?xml version="1.0" encoding="utf-8"?>
-<p:sld xmlns:a="http://schemas.openxmlformats.org/drawingml/2006/main" xmlns:p="http://schemas.openxmlformats.org/presentationml/2006/main" xmlns:r="http://schemas.openxmlformats.org/officeDocument/2006/relationships">
+<p:sld xmlns:a="http://schemas.openxmlformats.org/drawingml/2006/main" xmlns:r="http://schemas.openxmlformats.org/officeDocument/2006/relationships" xmlns:p="http://schemas.openxmlformats.org/presentationml/2006/main">
   <p:cSld>
     <p:bg>
       <p:bgPr>
@@ -6424,7 +6478,14 @@
         <p:cNvGrpSpPr/>
         <p:nvPr/>
       </p:nvGrpSpPr>
-      <p:grpSpPr/>
+      <p:grpSpPr>
+        <a:xfrm>
+          <a:off x="0" y="0"/>
+          <a:ext cx="0" cy="0"/>
+          <a:chOff x="0" y="0"/>
+          <a:chExt cx="0" cy="0"/>
+        </a:xfrm>
+      </p:grpSpPr>
       <p:sp>
         <p:nvSpPr>
           <p:cNvPr id="2" name="TextBox 1"/>
@@ -6442,7 +6503,7 @@
           <a:noFill/>
         </p:spPr>
         <p:txBody>
-          <a:bodyPr wrap="square" anchor="t" lIns="0" rIns="0" tIns="0" bIns="0">
+          <a:bodyPr wrap="square" lIns="0" tIns="0" rIns="0" bIns="0" anchor="t">
             <a:spAutoFit/>
           </a:bodyPr>
           <a:lstStyle/>
@@ -6481,7 +6542,7 @@
           <a:noFill/>
         </p:spPr>
         <p:txBody>
-          <a:bodyPr wrap="square" anchor="t" lIns="0" rIns="0" tIns="0" bIns="0">
+          <a:bodyPr wrap="square" lIns="0" tIns="0" rIns="0" bIns="0" anchor="t">
             <a:spAutoFit/>
           </a:bodyPr>
           <a:lstStyle/>
@@ -6520,7 +6581,7 @@
           <a:noFill/>
         </p:spPr>
         <p:txBody>
-          <a:bodyPr wrap="square" anchor="t" lIns="0" rIns="0" tIns="0" bIns="0">
+          <a:bodyPr wrap="square" lIns="0" tIns="0" rIns="0" bIns="0" anchor="t">
             <a:spAutoFit/>
           </a:bodyPr>
           <a:lstStyle/>
@@ -6583,6 +6644,7 @@
           <a:lstStyle/>
           <a:p>
             <a:pPr algn="ctr"/>
+            <a:endParaRPr/>
           </a:p>
         </p:txBody>
       </p:sp>
@@ -6603,7 +6665,7 @@
           <a:noFill/>
         </p:spPr>
         <p:txBody>
-          <a:bodyPr wrap="square" anchor="t" lIns="0" rIns="0" tIns="0" bIns="0">
+          <a:bodyPr wrap="square" lIns="0" tIns="0" rIns="0" bIns="0" anchor="t">
             <a:spAutoFit/>
           </a:bodyPr>
           <a:lstStyle/>
@@ -6634,7 +6696,7 @@
         <p:spPr>
           <a:xfrm>
             <a:off x="502920" y="6510528"/>
-            <a:ext cx="9144000" cy="274320"/>
+            <a:ext cx="9144000" cy="153888"/>
           </a:xfrm>
           <a:prstGeom prst="rect">
             <a:avLst/>
@@ -6642,25 +6704,39 @@
           <a:noFill/>
         </p:spPr>
         <p:txBody>
-          <a:bodyPr wrap="square" anchor="t" lIns="0" rIns="0" tIns="0" bIns="0">
+          <a:bodyPr wrap="square" lIns="0" tIns="0" rIns="0" bIns="0" anchor="t">
             <a:spAutoFit/>
           </a:bodyPr>
           <a:lstStyle/>
           <a:p>
-            <a:pPr algn="l">
+            <a:pPr>
               <a:spcAft>
                 <a:spcPts val="600"/>
               </a:spcAft>
             </a:pPr>
             <a:r>
-              <a:rPr sz="1000" b="0" i="0">
+              <a:rPr lang="en-US" sz="1000" dirty="0">
                 <a:solidFill>
                   <a:srgbClr val="C9C9C7"/>
                 </a:solidFill>
-                <a:latin typeface="Calibri"/>
-              </a:rPr>
-              <a:t>aesthetic-memory-model  —  mark-orr.github.io/aesthetic-memory-model</a:t>
-            </a:r>
+                <a:hlinkClick r:id="rId2"/>
+              </a:rPr>
+              <a:t>https://github.com/mark-orr/aesthetic-memory-model</a:t>
+            </a:r>
+            <a:r>
+              <a:rPr lang="en-US" sz="1000" dirty="0">
+                <a:solidFill>
+                  <a:srgbClr val="C9C9C7"/>
+                </a:solidFill>
+              </a:rPr>
+              <a:t> </a:t>
+            </a:r>
+            <a:endParaRPr sz="1000" b="0" i="0" dirty="0">
+              <a:solidFill>
+                <a:srgbClr val="C9C9C7"/>
+              </a:solidFill>
+              <a:latin typeface="Calibri"/>
+            </a:endParaRPr>
           </a:p>
         </p:txBody>
       </p:sp>
@@ -6673,7 +6749,7 @@
 </file>
 
 <file path=ppt/slides/slide10.xml><?xml version="1.0" encoding="utf-8"?>
-<p:sld xmlns:a="http://schemas.openxmlformats.org/drawingml/2006/main" xmlns:p="http://schemas.openxmlformats.org/presentationml/2006/main" xmlns:r="http://schemas.openxmlformats.org/officeDocument/2006/relationships">
+<p:sld xmlns:a="http://schemas.openxmlformats.org/drawingml/2006/main" xmlns:r="http://schemas.openxmlformats.org/officeDocument/2006/relationships" xmlns:p="http://schemas.openxmlformats.org/presentationml/2006/main">
   <p:cSld>
     <p:bg>
       <p:bgPr>
@@ -6689,7 +6765,14 @@
         <p:cNvGrpSpPr/>
         <p:nvPr/>
       </p:nvGrpSpPr>
-      <p:grpSpPr/>
+      <p:grpSpPr>
+        <a:xfrm>
+          <a:off x="0" y="0"/>
+          <a:ext cx="0" cy="0"/>
+          <a:chOff x="0" y="0"/>
+          <a:chExt cx="0" cy="0"/>
+        </a:xfrm>
+      </p:grpSpPr>
       <p:sp>
         <p:nvSpPr>
           <p:cNvPr id="2" name="Oval 1"/>
@@ -6727,7 +6810,7 @@
           </a:fontRef>
         </p:style>
         <p:txBody>
-          <a:bodyPr rtlCol="0" anchor="ctr" wrap="none" lIns="0" rIns="0" tIns="0" bIns="0"/>
+          <a:bodyPr wrap="none" lIns="0" tIns="0" rIns="0" bIns="0" rtlCol="0" anchor="ctr"/>
           <a:lstStyle/>
           <a:p>
             <a:pPr algn="ctr"/>
@@ -6760,7 +6843,7 @@
           <a:noFill/>
         </p:spPr>
         <p:txBody>
-          <a:bodyPr wrap="square" anchor="t" lIns="0" rIns="0" tIns="0" bIns="0">
+          <a:bodyPr wrap="square" lIns="0" tIns="0" rIns="0" bIns="0" anchor="t">
             <a:spAutoFit/>
           </a:bodyPr>
           <a:lstStyle/>
@@ -6799,7 +6882,7 @@
           <a:noFill/>
         </p:spPr>
         <p:txBody>
-          <a:bodyPr wrap="square" anchor="t" lIns="0" rIns="0" tIns="0" bIns="0">
+          <a:bodyPr wrap="square" lIns="0" tIns="0" rIns="0" bIns="0" anchor="t">
             <a:spAutoFit/>
           </a:bodyPr>
           <a:lstStyle/>
@@ -6866,6 +6949,7 @@
           <a:lstStyle/>
           <a:p>
             <a:pPr algn="ctr"/>
+            <a:endParaRPr/>
           </a:p>
         </p:txBody>
       </p:sp>
@@ -6886,7 +6970,7 @@
           <a:noFill/>
         </p:spPr>
         <p:txBody>
-          <a:bodyPr wrap="square" anchor="t" lIns="0" rIns="0" tIns="0" bIns="0">
+          <a:bodyPr wrap="square" lIns="0" tIns="0" rIns="0" bIns="0" anchor="t">
             <a:spAutoFit/>
           </a:bodyPr>
           <a:lstStyle/>
@@ -6925,7 +7009,7 @@
           <a:noFill/>
         </p:spPr>
         <p:txBody>
-          <a:bodyPr wrap="square" anchor="t" lIns="0" rIns="0" tIns="0" bIns="0">
+          <a:bodyPr wrap="square" lIns="0" tIns="0" rIns="0" bIns="0" anchor="t">
             <a:spAutoFit/>
           </a:bodyPr>
           <a:lstStyle/>
@@ -6956,15 +7040,17 @@
         <p:spPr>
           <a:xfrm>
             <a:off x="2560320" y="4709160"/>
-            <a:ext cx="7040880" cy="548640"/>
+            <a:ext cx="7040880" cy="507831"/>
           </a:xfrm>
           <a:prstGeom prst="rect">
             <a:avLst/>
           </a:prstGeom>
-          <a:noFill/>
-        </p:spPr>
-        <p:txBody>
-          <a:bodyPr wrap="square" anchor="t" lIns="0" rIns="0" tIns="0" bIns="0">
+          <a:solidFill>
+            <a:schemeClr val="accent1"/>
+          </a:solidFill>
+        </p:spPr>
+        <p:txBody>
+          <a:bodyPr wrap="square" lIns="0" tIns="0" rIns="0" bIns="0" anchor="t">
             <a:spAutoFit/>
           </a:bodyPr>
           <a:lstStyle/>
@@ -6975,53 +7061,41 @@
               </a:spcAft>
             </a:pPr>
             <a:r>
-              <a:rPr sz="1650" b="1" i="0">
+              <a:rPr sz="1650" b="1" i="0" dirty="0">
                 <a:solidFill>
                   <a:srgbClr val="D9A61C"/>
                 </a:solidFill>
                 <a:latin typeface="Courier New"/>
-              </a:rPr>
-              <a:t>mark-orr.github.io/aesthetic-memory-model/design5-demo-2.html</a:t>
-            </a:r>
-          </a:p>
-        </p:txBody>
-      </p:sp>
-      <p:sp>
-        <p:nvSpPr>
-          <p:cNvPr id="9" name="TextBox 8"/>
-          <p:cNvSpPr txBox="1"/>
-          <p:nvPr/>
-        </p:nvSpPr>
-        <p:spPr>
-          <a:xfrm>
-            <a:off x="2560320" y="5257800"/>
-            <a:ext cx="7040880" cy="365760"/>
-          </a:xfrm>
-          <a:prstGeom prst="rect">
-            <a:avLst/>
-          </a:prstGeom>
-          <a:noFill/>
-        </p:spPr>
-        <p:txBody>
-          <a:bodyPr wrap="square" anchor="t" lIns="0" rIns="0" tIns="0" bIns="0">
-            <a:spAutoFit/>
-          </a:bodyPr>
-          <a:lstStyle/>
-          <a:p>
-            <a:pPr algn="l">
-              <a:spcAft>
-                <a:spcPts val="600"/>
-              </a:spcAft>
-            </a:pPr>
-            <a:r>
-              <a:rPr sz="1200" b="0" i="1">
-                <a:solidFill>
-                  <a:srgbClr val="747474"/>
-                </a:solidFill>
-                <a:latin typeface="Calibri"/>
-              </a:rPr>
-              <a:t>[ QR code / link placeholder — swap in before presenting ]</a:t>
-            </a:r>
+                <a:hlinkClick r:id="rId2"/>
+              </a:rPr>
+              <a:t>mark-</a:t>
+            </a:r>
+            <a:r>
+              <a:rPr sz="1650" b="1" i="0" dirty="0" err="1">
+                <a:solidFill>
+                  <a:srgbClr val="D9A61C"/>
+                </a:solidFill>
+                <a:latin typeface="Courier New"/>
+                <a:hlinkClick r:id="rId2"/>
+              </a:rPr>
+              <a:t>orr.github.io</a:t>
+            </a:r>
+            <a:r>
+              <a:rPr sz="1650" b="1" i="0" dirty="0">
+                <a:solidFill>
+                  <a:srgbClr val="D9A61C"/>
+                </a:solidFill>
+                <a:latin typeface="Courier New"/>
+                <a:hlinkClick r:id="rId2"/>
+              </a:rPr>
+              <a:t>/aesthetic-memory-model/design5-demo-2.html</a:t>
+            </a:r>
+            <a:endParaRPr sz="1650" b="1" i="0" dirty="0">
+              <a:solidFill>
+                <a:srgbClr val="D9A61C"/>
+              </a:solidFill>
+              <a:latin typeface="Courier New"/>
+            </a:endParaRPr>
           </a:p>
         </p:txBody>
       </p:sp>
@@ -7034,7 +7108,7 @@
 </file>
 
 <file path=ppt/slides/slide11.xml><?xml version="1.0" encoding="utf-8"?>
-<p:sld xmlns:a="http://schemas.openxmlformats.org/drawingml/2006/main" xmlns:p="http://schemas.openxmlformats.org/presentationml/2006/main" xmlns:r="http://schemas.openxmlformats.org/officeDocument/2006/relationships">
+<p:sld xmlns:a="http://schemas.openxmlformats.org/drawingml/2006/main" xmlns:r="http://schemas.openxmlformats.org/officeDocument/2006/relationships" xmlns:p="http://schemas.openxmlformats.org/presentationml/2006/main">
   <p:cSld>
     <p:bg>
       <p:bgPr>
@@ -7050,7 +7124,14 @@
         <p:cNvGrpSpPr/>
         <p:nvPr/>
       </p:nvGrpSpPr>
-      <p:grpSpPr/>
+      <p:grpSpPr>
+        <a:xfrm>
+          <a:off x="0" y="0"/>
+          <a:ext cx="0" cy="0"/>
+          <a:chOff x="0" y="0"/>
+          <a:chExt cx="0" cy="0"/>
+        </a:xfrm>
+      </p:grpSpPr>
       <p:sp>
         <p:nvSpPr>
           <p:cNvPr id="2" name="Oval 1"/>
@@ -7088,7 +7169,7 @@
           </a:fontRef>
         </p:style>
         <p:txBody>
-          <a:bodyPr rtlCol="0" anchor="ctr" wrap="none" lIns="0" rIns="0" tIns="0" bIns="0"/>
+          <a:bodyPr wrap="none" lIns="0" tIns="0" rIns="0" bIns="0" rtlCol="0" anchor="ctr"/>
           <a:lstStyle/>
           <a:p>
             <a:pPr algn="ctr"/>
@@ -7121,7 +7202,7 @@
           <a:noFill/>
         </p:spPr>
         <p:txBody>
-          <a:bodyPr wrap="square" anchor="t" lIns="0" rIns="0" tIns="0" bIns="0">
+          <a:bodyPr wrap="square" lIns="0" tIns="0" rIns="0" bIns="0" anchor="t">
             <a:spAutoFit/>
           </a:bodyPr>
           <a:lstStyle/>
@@ -7160,7 +7241,7 @@
           <a:noFill/>
         </p:spPr>
         <p:txBody>
-          <a:bodyPr wrap="square" anchor="t" lIns="0" rIns="0" tIns="0" bIns="0">
+          <a:bodyPr wrap="square" lIns="0" tIns="0" rIns="0" bIns="0" anchor="t">
             <a:spAutoFit/>
           </a:bodyPr>
           <a:lstStyle/>
@@ -7199,7 +7280,7 @@
           <a:noFill/>
         </p:spPr>
         <p:txBody>
-          <a:bodyPr wrap="square" anchor="t" lIns="0" rIns="0" tIns="0" bIns="0">
+          <a:bodyPr wrap="square" lIns="0" tIns="0" rIns="0" bIns="0" anchor="t">
             <a:spAutoFit/>
           </a:bodyPr>
           <a:lstStyle/>
@@ -7264,6 +7345,7 @@
           <a:lstStyle/>
           <a:p>
             <a:pPr algn="ctr"/>
+            <a:endParaRPr/>
           </a:p>
         </p:txBody>
       </p:sp>
@@ -7304,7 +7386,7 @@
           </a:fontRef>
         </p:style>
         <p:txBody>
-          <a:bodyPr rtlCol="0" anchor="ctr" wrap="none" lIns="0" rIns="0" tIns="0" bIns="0"/>
+          <a:bodyPr wrap="none" lIns="0" tIns="0" rIns="0" bIns="0" rtlCol="0" anchor="ctr"/>
           <a:lstStyle/>
           <a:p>
             <a:pPr algn="ctr"/>
@@ -7337,7 +7419,7 @@
           <a:noFill/>
         </p:spPr>
         <p:txBody>
-          <a:bodyPr wrap="square" anchor="t" lIns="0" rIns="0" tIns="0" bIns="0">
+          <a:bodyPr wrap="square" lIns="0" tIns="0" rIns="0" bIns="0" anchor="t">
             <a:spAutoFit/>
           </a:bodyPr>
           <a:lstStyle/>
@@ -7376,7 +7458,7 @@
           <a:noFill/>
         </p:spPr>
         <p:txBody>
-          <a:bodyPr wrap="square" anchor="t" lIns="0" rIns="0" tIns="0" bIns="0">
+          <a:bodyPr wrap="square" lIns="0" tIns="0" rIns="0" bIns="0" anchor="t">
             <a:spAutoFit/>
           </a:bodyPr>
           <a:lstStyle/>
@@ -7441,6 +7523,7 @@
           <a:lstStyle/>
           <a:p>
             <a:pPr algn="ctr"/>
+            <a:endParaRPr/>
           </a:p>
         </p:txBody>
       </p:sp>
@@ -7481,7 +7564,7 @@
           </a:fontRef>
         </p:style>
         <p:txBody>
-          <a:bodyPr rtlCol="0" anchor="ctr" wrap="none" lIns="0" rIns="0" tIns="0" bIns="0"/>
+          <a:bodyPr wrap="none" lIns="0" tIns="0" rIns="0" bIns="0" rtlCol="0" anchor="ctr"/>
           <a:lstStyle/>
           <a:p>
             <a:pPr algn="ctr"/>
@@ -7514,7 +7597,7 @@
           <a:noFill/>
         </p:spPr>
         <p:txBody>
-          <a:bodyPr wrap="square" anchor="t" lIns="0" rIns="0" tIns="0" bIns="0">
+          <a:bodyPr wrap="square" lIns="0" tIns="0" rIns="0" bIns="0" anchor="t">
             <a:spAutoFit/>
           </a:bodyPr>
           <a:lstStyle/>
@@ -7553,7 +7636,7 @@
           <a:noFill/>
         </p:spPr>
         <p:txBody>
-          <a:bodyPr wrap="square" anchor="t" lIns="0" rIns="0" tIns="0" bIns="0">
+          <a:bodyPr wrap="square" lIns="0" tIns="0" rIns="0" bIns="0" anchor="t">
             <a:spAutoFit/>
           </a:bodyPr>
           <a:lstStyle/>
@@ -7592,7 +7675,7 @@
           <a:noFill/>
         </p:spPr>
         <p:txBody>
-          <a:bodyPr wrap="square" anchor="t" lIns="0" rIns="0" tIns="0" bIns="0">
+          <a:bodyPr wrap="square" lIns="0" tIns="0" rIns="0" bIns="0" anchor="t">
             <a:spAutoFit/>
           </a:bodyPr>
           <a:lstStyle/>
@@ -7623,7 +7706,7 @@
 </file>
 
 <file path=ppt/slides/slide12.xml><?xml version="1.0" encoding="utf-8"?>
-<p:sld xmlns:a="http://schemas.openxmlformats.org/drawingml/2006/main" xmlns:p="http://schemas.openxmlformats.org/presentationml/2006/main" xmlns:r="http://schemas.openxmlformats.org/officeDocument/2006/relationships">
+<p:sld xmlns:a="http://schemas.openxmlformats.org/drawingml/2006/main" xmlns:r="http://schemas.openxmlformats.org/officeDocument/2006/relationships" xmlns:p="http://schemas.openxmlformats.org/presentationml/2006/main">
   <p:cSld>
     <p:bg>
       <p:bgPr>
@@ -7639,7 +7722,14 @@
         <p:cNvGrpSpPr/>
         <p:nvPr/>
       </p:nvGrpSpPr>
-      <p:grpSpPr/>
+      <p:grpSpPr>
+        <a:xfrm>
+          <a:off x="0" y="0"/>
+          <a:ext cx="0" cy="0"/>
+          <a:chOff x="0" y="0"/>
+          <a:chExt cx="0" cy="0"/>
+        </a:xfrm>
+      </p:grpSpPr>
       <p:sp>
         <p:nvSpPr>
           <p:cNvPr id="2" name="Oval 1"/>
@@ -7677,7 +7767,7 @@
           </a:fontRef>
         </p:style>
         <p:txBody>
-          <a:bodyPr rtlCol="0" anchor="ctr" wrap="none" lIns="0" rIns="0" tIns="0" bIns="0"/>
+          <a:bodyPr wrap="none" lIns="0" tIns="0" rIns="0" bIns="0" rtlCol="0" anchor="ctr"/>
           <a:lstStyle/>
           <a:p>
             <a:pPr algn="ctr"/>
@@ -7710,7 +7800,7 @@
           <a:noFill/>
         </p:spPr>
         <p:txBody>
-          <a:bodyPr wrap="square" anchor="t" lIns="0" rIns="0" tIns="0" bIns="0">
+          <a:bodyPr wrap="square" lIns="0" tIns="0" rIns="0" bIns="0" anchor="t">
             <a:spAutoFit/>
           </a:bodyPr>
           <a:lstStyle/>
@@ -7749,7 +7839,7 @@
           <a:noFill/>
         </p:spPr>
         <p:txBody>
-          <a:bodyPr wrap="square" anchor="t" lIns="0" rIns="0" tIns="0" bIns="0">
+          <a:bodyPr wrap="square" lIns="0" tIns="0" rIns="0" bIns="0" anchor="t">
             <a:spAutoFit/>
           </a:bodyPr>
           <a:lstStyle/>
@@ -7788,7 +7878,7 @@
           <a:noFill/>
         </p:spPr>
         <p:txBody>
-          <a:bodyPr wrap="square" anchor="t" lIns="0" rIns="0" tIns="0" bIns="0">
+          <a:bodyPr wrap="square" lIns="0" tIns="0" rIns="0" bIns="0" anchor="t">
             <a:spAutoFit/>
           </a:bodyPr>
           <a:lstStyle/>
@@ -7827,7 +7917,7 @@
           <a:noFill/>
         </p:spPr>
         <p:txBody>
-          <a:bodyPr wrap="square" anchor="t" lIns="0" rIns="0" tIns="0" bIns="0">
+          <a:bodyPr wrap="square" lIns="0" tIns="0" rIns="0" bIns="0" anchor="t">
             <a:spAutoFit/>
           </a:bodyPr>
           <a:lstStyle/>
@@ -7839,7 +7929,7 @@
               <a:buChar char="•"/>
             </a:pPr>
             <a:r>
-              <a:rPr sz="1500" b="0" i="0">
+              <a:rPr sz="1500" b="0" i="0" dirty="0">
                 <a:solidFill>
                   <a:srgbClr val="2A2A2A"/>
                 </a:solidFill>
@@ -7856,7 +7946,7 @@
               <a:buChar char="•"/>
             </a:pPr>
             <a:r>
-              <a:rPr sz="1500" b="0" i="0">
+              <a:rPr sz="1500" b="0" i="0" dirty="0">
                 <a:solidFill>
                   <a:srgbClr val="2A2A2A"/>
                 </a:solidFill>
@@ -7873,7 +7963,7 @@
               <a:buChar char="•"/>
             </a:pPr>
             <a:r>
-              <a:rPr sz="1500" b="0" i="0">
+              <a:rPr sz="1500" b="0" i="0" dirty="0">
                 <a:solidFill>
                   <a:srgbClr val="2A2A2A"/>
                 </a:solidFill>
@@ -7927,6 +8017,7 @@
           <a:lstStyle/>
           <a:p>
             <a:pPr algn="ctr"/>
+            <a:endParaRPr/>
           </a:p>
         </p:txBody>
       </p:sp>
@@ -7947,7 +8038,7 @@
           <a:noFill/>
         </p:spPr>
         <p:txBody>
-          <a:bodyPr wrap="square" anchor="t" lIns="0" rIns="0" tIns="0" bIns="0">
+          <a:bodyPr wrap="square" lIns="0" tIns="0" rIns="0" bIns="0" anchor="t">
             <a:spAutoFit/>
           </a:bodyPr>
           <a:lstStyle/>
@@ -7986,7 +8077,7 @@
           <a:noFill/>
         </p:spPr>
         <p:txBody>
-          <a:bodyPr wrap="square" anchor="t" lIns="0" rIns="0" tIns="0" bIns="0">
+          <a:bodyPr wrap="square" lIns="0" tIns="0" rIns="0" bIns="0" anchor="t">
             <a:spAutoFit/>
           </a:bodyPr>
           <a:lstStyle/>
@@ -8026,7 +8117,7 @@
           <a:noFill/>
         </p:spPr>
         <p:txBody>
-          <a:bodyPr wrap="square" anchor="t" lIns="0" rIns="0" tIns="0" bIns="0">
+          <a:bodyPr wrap="square" lIns="0" tIns="0" rIns="0" bIns="0" anchor="t">
             <a:spAutoFit/>
           </a:bodyPr>
           <a:lstStyle/>
@@ -8066,7 +8157,7 @@
           <a:noFill/>
         </p:spPr>
         <p:txBody>
-          <a:bodyPr wrap="square" anchor="t" lIns="0" rIns="0" tIns="0" bIns="0">
+          <a:bodyPr wrap="square" lIns="0" tIns="0" rIns="0" bIns="0" anchor="t">
             <a:spAutoFit/>
           </a:bodyPr>
           <a:lstStyle/>
@@ -8106,7 +8197,7 @@
           <a:noFill/>
         </p:spPr>
         <p:txBody>
-          <a:bodyPr wrap="square" anchor="t" lIns="0" rIns="0" tIns="0" bIns="0">
+          <a:bodyPr wrap="square" lIns="0" tIns="0" rIns="0" bIns="0" anchor="t">
             <a:spAutoFit/>
           </a:bodyPr>
           <a:lstStyle/>
@@ -8138,7 +8229,7 @@
 </file>
 
 <file path=ppt/slides/slide13.xml><?xml version="1.0" encoding="utf-8"?>
-<p:sld xmlns:a="http://schemas.openxmlformats.org/drawingml/2006/main" xmlns:p="http://schemas.openxmlformats.org/presentationml/2006/main" xmlns:r="http://schemas.openxmlformats.org/officeDocument/2006/relationships">
+<p:sld xmlns:a="http://schemas.openxmlformats.org/drawingml/2006/main" xmlns:r="http://schemas.openxmlformats.org/officeDocument/2006/relationships" xmlns:p="http://schemas.openxmlformats.org/presentationml/2006/main">
   <p:cSld>
     <p:bg>
       <p:bgPr>
@@ -8154,7 +8245,14 @@
         <p:cNvGrpSpPr/>
         <p:nvPr/>
       </p:nvGrpSpPr>
-      <p:grpSpPr/>
+      <p:grpSpPr>
+        <a:xfrm>
+          <a:off x="0" y="0"/>
+          <a:ext cx="0" cy="0"/>
+          <a:chOff x="0" y="0"/>
+          <a:chExt cx="0" cy="0"/>
+        </a:xfrm>
+      </p:grpSpPr>
       <p:sp>
         <p:nvSpPr>
           <p:cNvPr id="2" name="Oval 1"/>
@@ -8192,7 +8290,7 @@
           </a:fontRef>
         </p:style>
         <p:txBody>
-          <a:bodyPr rtlCol="0" anchor="ctr" wrap="none" lIns="0" rIns="0" tIns="0" bIns="0"/>
+          <a:bodyPr wrap="none" lIns="0" tIns="0" rIns="0" bIns="0" rtlCol="0" anchor="ctr"/>
           <a:lstStyle/>
           <a:p>
             <a:pPr algn="ctr"/>
@@ -8225,7 +8323,7 @@
           <a:noFill/>
         </p:spPr>
         <p:txBody>
-          <a:bodyPr wrap="square" anchor="t" lIns="0" rIns="0" tIns="0" bIns="0">
+          <a:bodyPr wrap="square" lIns="0" tIns="0" rIns="0" bIns="0" anchor="t">
             <a:spAutoFit/>
           </a:bodyPr>
           <a:lstStyle/>
@@ -8264,7 +8362,7 @@
           <a:noFill/>
         </p:spPr>
         <p:txBody>
-          <a:bodyPr wrap="square" anchor="t" lIns="0" rIns="0" tIns="0" bIns="0">
+          <a:bodyPr wrap="square" lIns="0" tIns="0" rIns="0" bIns="0" anchor="t">
             <a:spAutoFit/>
           </a:bodyPr>
           <a:lstStyle/>
@@ -8303,7 +8401,7 @@
           <a:noFill/>
         </p:spPr>
         <p:txBody>
-          <a:bodyPr wrap="square" anchor="t" lIns="0" rIns="0" tIns="0" bIns="0">
+          <a:bodyPr wrap="square" lIns="0" tIns="0" rIns="0" bIns="0" anchor="t">
             <a:spAutoFit/>
           </a:bodyPr>
           <a:lstStyle/>
@@ -8342,7 +8440,7 @@
           <a:noFill/>
         </p:spPr>
         <p:txBody>
-          <a:bodyPr wrap="square" anchor="t" lIns="0" rIns="0" tIns="0" bIns="0">
+          <a:bodyPr wrap="square" lIns="0" tIns="0" rIns="0" bIns="0" anchor="t">
             <a:spAutoFit/>
           </a:bodyPr>
           <a:lstStyle/>
@@ -8425,6 +8523,7 @@
           <a:lstStyle/>
           <a:p>
             <a:pPr algn="ctr"/>
+            <a:endParaRPr/>
           </a:p>
         </p:txBody>
       </p:sp>
@@ -8445,7 +8544,7 @@
           <a:noFill/>
         </p:spPr>
         <p:txBody>
-          <a:bodyPr wrap="square" anchor="t" lIns="0" rIns="0" tIns="0" bIns="0">
+          <a:bodyPr wrap="square" lIns="0" tIns="0" rIns="0" bIns="0" anchor="t">
             <a:spAutoFit/>
           </a:bodyPr>
           <a:lstStyle/>
@@ -8484,7 +8583,7 @@
           <a:noFill/>
         </p:spPr>
         <p:txBody>
-          <a:bodyPr wrap="square" anchor="t" lIns="0" rIns="0" tIns="0" bIns="0">
+          <a:bodyPr wrap="square" lIns="0" tIns="0" rIns="0" bIns="0" anchor="t">
             <a:spAutoFit/>
           </a:bodyPr>
           <a:lstStyle/>
@@ -8523,7 +8622,7 @@
           <a:noFill/>
         </p:spPr>
         <p:txBody>
-          <a:bodyPr wrap="square" anchor="t" lIns="0" rIns="0" tIns="0" bIns="0">
+          <a:bodyPr wrap="square" lIns="0" tIns="0" rIns="0" bIns="0" anchor="t">
             <a:spAutoFit/>
           </a:bodyPr>
           <a:lstStyle/>
@@ -8562,7 +8661,7 @@
           <a:noFill/>
         </p:spPr>
         <p:txBody>
-          <a:bodyPr wrap="square" anchor="t" lIns="0" rIns="0" tIns="0" bIns="0">
+          <a:bodyPr wrap="square" lIns="0" tIns="0" rIns="0" bIns="0" anchor="t">
             <a:spAutoFit/>
           </a:bodyPr>
           <a:lstStyle/>
@@ -8601,7 +8700,7 @@
           <a:noFill/>
         </p:spPr>
         <p:txBody>
-          <a:bodyPr wrap="square" anchor="t" lIns="0" rIns="0" tIns="0" bIns="0">
+          <a:bodyPr wrap="square" lIns="0" tIns="0" rIns="0" bIns="0" anchor="t">
             <a:spAutoFit/>
           </a:bodyPr>
           <a:lstStyle/>
@@ -8640,7 +8739,7 @@
           <a:noFill/>
         </p:spPr>
         <p:txBody>
-          <a:bodyPr wrap="square" anchor="t" lIns="0" rIns="0" tIns="0" bIns="0">
+          <a:bodyPr wrap="square" lIns="0" tIns="0" rIns="0" bIns="0" anchor="t">
             <a:spAutoFit/>
           </a:bodyPr>
           <a:lstStyle/>
@@ -8721,6 +8820,7 @@
           <a:lstStyle/>
           <a:p>
             <a:pPr algn="ctr"/>
+            <a:endParaRPr/>
           </a:p>
         </p:txBody>
       </p:sp>
@@ -8741,7 +8841,7 @@
           <a:noFill/>
         </p:spPr>
         <p:txBody>
-          <a:bodyPr wrap="square" anchor="t" lIns="0" rIns="0" tIns="0" bIns="0">
+          <a:bodyPr wrap="square" lIns="0" tIns="0" rIns="0" bIns="0" anchor="t">
             <a:spAutoFit/>
           </a:bodyPr>
           <a:lstStyle/>
@@ -8780,7 +8880,7 @@
           <a:noFill/>
         </p:spPr>
         <p:txBody>
-          <a:bodyPr wrap="square" anchor="t" lIns="0" rIns="0" tIns="0" bIns="0">
+          <a:bodyPr wrap="square" lIns="0" tIns="0" rIns="0" bIns="0" anchor="t">
             <a:spAutoFit/>
           </a:bodyPr>
           <a:lstStyle/>
@@ -8819,7 +8919,7 @@
           <a:noFill/>
         </p:spPr>
         <p:txBody>
-          <a:bodyPr wrap="square" anchor="t" lIns="0" rIns="0" tIns="0" bIns="0">
+          <a:bodyPr wrap="square" lIns="0" tIns="0" rIns="0" bIns="0" anchor="t">
             <a:spAutoFit/>
           </a:bodyPr>
           <a:lstStyle/>
@@ -8830,7 +8930,7 @@
               </a:spcAft>
             </a:pPr>
             <a:r>
-              <a:rPr sz="1150" b="0" i="1">
+              <a:rPr sz="1150" b="0" i="1" dirty="0">
                 <a:solidFill>
                   <a:srgbClr val="747474"/>
                 </a:solidFill>
@@ -8850,7 +8950,7 @@
 </file>
 
 <file path=ppt/slides/slide14.xml><?xml version="1.0" encoding="utf-8"?>
-<p:sld xmlns:a="http://schemas.openxmlformats.org/drawingml/2006/main" xmlns:p="http://schemas.openxmlformats.org/presentationml/2006/main" xmlns:r="http://schemas.openxmlformats.org/officeDocument/2006/relationships">
+<p:sld xmlns:a="http://schemas.openxmlformats.org/drawingml/2006/main" xmlns:r="http://schemas.openxmlformats.org/officeDocument/2006/relationships" xmlns:p="http://schemas.openxmlformats.org/presentationml/2006/main">
   <p:cSld>
     <p:bg>
       <p:bgPr>
@@ -8866,7 +8966,14 @@
         <p:cNvGrpSpPr/>
         <p:nvPr/>
       </p:nvGrpSpPr>
-      <p:grpSpPr/>
+      <p:grpSpPr>
+        <a:xfrm>
+          <a:off x="0" y="0"/>
+          <a:ext cx="0" cy="0"/>
+          <a:chOff x="0" y="0"/>
+          <a:chExt cx="0" cy="0"/>
+        </a:xfrm>
+      </p:grpSpPr>
       <p:sp>
         <p:nvSpPr>
           <p:cNvPr id="2" name="Oval 1"/>
@@ -8904,7 +9011,7 @@
           </a:fontRef>
         </p:style>
         <p:txBody>
-          <a:bodyPr rtlCol="0" anchor="ctr" wrap="none" lIns="0" rIns="0" tIns="0" bIns="0"/>
+          <a:bodyPr wrap="none" lIns="0" tIns="0" rIns="0" bIns="0" rtlCol="0" anchor="ctr"/>
           <a:lstStyle/>
           <a:p>
             <a:pPr algn="ctr"/>
@@ -8937,7 +9044,7 @@
           <a:noFill/>
         </p:spPr>
         <p:txBody>
-          <a:bodyPr wrap="square" anchor="t" lIns="0" rIns="0" tIns="0" bIns="0">
+          <a:bodyPr wrap="square" lIns="0" tIns="0" rIns="0" bIns="0" anchor="t">
             <a:spAutoFit/>
           </a:bodyPr>
           <a:lstStyle/>
@@ -8976,7 +9083,7 @@
           <a:noFill/>
         </p:spPr>
         <p:txBody>
-          <a:bodyPr wrap="square" anchor="t" lIns="0" rIns="0" tIns="0" bIns="0">
+          <a:bodyPr wrap="square" lIns="0" tIns="0" rIns="0" bIns="0" anchor="t">
             <a:spAutoFit/>
           </a:bodyPr>
           <a:lstStyle/>
@@ -9012,7 +9119,7 @@
         </p:xfrm>
         <a:graphic>
           <a:graphicData uri="http://schemas.openxmlformats.org/drawingml/2006/chart">
-            <c:chart xmlns:c="http://schemas.openxmlformats.org/drawingml/2006/chart" r:id="rId2"/>
+            <c:chart xmlns:c="http://schemas.openxmlformats.org/drawingml/2006/chart" xmlns:r="http://schemas.openxmlformats.org/officeDocument/2006/relationships" r:id="rId2"/>
           </a:graphicData>
         </a:graphic>
       </p:graphicFrame>
@@ -9035,9 +9142,27 @@
                 <a:tableStyleId>{5C22544A-7EE6-4342-B048-85BDC9FD1C3A}</a:tableStyleId>
               </a:tblPr>
               <a:tblGrid>
-                <a:gridCol w="1828800"/>
-                <a:gridCol w="960120"/>
-                <a:gridCol w="914400"/>
+                <a:gridCol w="1828800">
+                  <a:extLst>
+                    <a:ext uri="{9D8B030D-6E8A-4147-A177-3AD203B41FA5}">
+                      <a16:colId xmlns:a16="http://schemas.microsoft.com/office/drawing/2014/main" val="20000"/>
+                    </a:ext>
+                  </a:extLst>
+                </a:gridCol>
+                <a:gridCol w="960120">
+                  <a:extLst>
+                    <a:ext uri="{9D8B030D-6E8A-4147-A177-3AD203B41FA5}">
+                      <a16:colId xmlns:a16="http://schemas.microsoft.com/office/drawing/2014/main" val="20001"/>
+                    </a:ext>
+                  </a:extLst>
+                </a:gridCol>
+                <a:gridCol w="914400">
+                  <a:extLst>
+                    <a:ext uri="{9D8B030D-6E8A-4147-A177-3AD203B41FA5}">
+                      <a16:colId xmlns:a16="http://schemas.microsoft.com/office/drawing/2014/main" val="20002"/>
+                    </a:ext>
+                  </a:extLst>
+                </a:gridCol>
               </a:tblGrid>
               <a:tr h="457200">
                 <a:tc>
@@ -9109,6 +9234,11 @@
                     </a:solidFill>
                   </a:tcPr>
                 </a:tc>
+                <a:extLst>
+                  <a:ext uri="{0D108BD9-81ED-4DB2-BD59-A6C34878D82A}">
+                    <a16:rowId xmlns:a16="http://schemas.microsoft.com/office/drawing/2014/main" val="10000"/>
+                  </a:ext>
+                </a:extLst>
               </a:tr>
               <a:tr h="457200">
                 <a:tc>
@@ -9180,6 +9310,11 @@
                     </a:solidFill>
                   </a:tcPr>
                 </a:tc>
+                <a:extLst>
+                  <a:ext uri="{0D108BD9-81ED-4DB2-BD59-A6C34878D82A}">
+                    <a16:rowId xmlns:a16="http://schemas.microsoft.com/office/drawing/2014/main" val="10001"/>
+                  </a:ext>
+                </a:extLst>
               </a:tr>
               <a:tr h="457200">
                 <a:tc>
@@ -9251,6 +9386,11 @@
                     </a:solidFill>
                   </a:tcPr>
                 </a:tc>
+                <a:extLst>
+                  <a:ext uri="{0D108BD9-81ED-4DB2-BD59-A6C34878D82A}">
+                    <a16:rowId xmlns:a16="http://schemas.microsoft.com/office/drawing/2014/main" val="10002"/>
+                  </a:ext>
+                </a:extLst>
               </a:tr>
               <a:tr h="457200">
                 <a:tc>
@@ -9322,6 +9462,11 @@
                     </a:solidFill>
                   </a:tcPr>
                 </a:tc>
+                <a:extLst>
+                  <a:ext uri="{0D108BD9-81ED-4DB2-BD59-A6C34878D82A}">
+                    <a16:rowId xmlns:a16="http://schemas.microsoft.com/office/drawing/2014/main" val="10003"/>
+                  </a:ext>
+                </a:extLst>
               </a:tr>
             </a:tbl>
           </a:graphicData>
@@ -9344,7 +9489,7 @@
           <a:noFill/>
         </p:spPr>
         <p:txBody>
-          <a:bodyPr wrap="square" anchor="t" lIns="0" rIns="0" tIns="0" bIns="0">
+          <a:bodyPr wrap="square" lIns="0" tIns="0" rIns="0" bIns="0" anchor="t">
             <a:spAutoFit/>
           </a:bodyPr>
           <a:lstStyle/>
@@ -9383,7 +9528,7 @@
           <a:noFill/>
         </p:spPr>
         <p:txBody>
-          <a:bodyPr wrap="square" anchor="t" lIns="0" rIns="0" tIns="0" bIns="0">
+          <a:bodyPr wrap="square" lIns="0" tIns="0" rIns="0" bIns="0" anchor="t">
             <a:spAutoFit/>
           </a:bodyPr>
           <a:lstStyle/>
@@ -9414,7 +9559,7 @@
 </file>
 
 <file path=ppt/slides/slide15.xml><?xml version="1.0" encoding="utf-8"?>
-<p:sld xmlns:a="http://schemas.openxmlformats.org/drawingml/2006/main" xmlns:p="http://schemas.openxmlformats.org/presentationml/2006/main" xmlns:r="http://schemas.openxmlformats.org/officeDocument/2006/relationships">
+<p:sld xmlns:a="http://schemas.openxmlformats.org/drawingml/2006/main" xmlns:r="http://schemas.openxmlformats.org/officeDocument/2006/relationships" xmlns:p="http://schemas.openxmlformats.org/presentationml/2006/main">
   <p:cSld>
     <p:bg>
       <p:bgPr>
@@ -9430,7 +9575,14 @@
         <p:cNvGrpSpPr/>
         <p:nvPr/>
       </p:nvGrpSpPr>
-      <p:grpSpPr/>
+      <p:grpSpPr>
+        <a:xfrm>
+          <a:off x="0" y="0"/>
+          <a:ext cx="0" cy="0"/>
+          <a:chOff x="0" y="0"/>
+          <a:chExt cx="0" cy="0"/>
+        </a:xfrm>
+      </p:grpSpPr>
       <p:sp>
         <p:nvSpPr>
           <p:cNvPr id="2" name="Oval 1"/>
@@ -9468,7 +9620,7 @@
           </a:fontRef>
         </p:style>
         <p:txBody>
-          <a:bodyPr rtlCol="0" anchor="ctr" wrap="none" lIns="0" rIns="0" tIns="0" bIns="0"/>
+          <a:bodyPr wrap="none" lIns="0" tIns="0" rIns="0" bIns="0" rtlCol="0" anchor="ctr"/>
           <a:lstStyle/>
           <a:p>
             <a:pPr algn="ctr"/>
@@ -9501,7 +9653,7 @@
           <a:noFill/>
         </p:spPr>
         <p:txBody>
-          <a:bodyPr wrap="square" anchor="t" lIns="0" rIns="0" tIns="0" bIns="0">
+          <a:bodyPr wrap="square" lIns="0" tIns="0" rIns="0" bIns="0" anchor="t">
             <a:spAutoFit/>
           </a:bodyPr>
           <a:lstStyle/>
@@ -9540,7 +9692,7 @@
           <a:noFill/>
         </p:spPr>
         <p:txBody>
-          <a:bodyPr wrap="square" anchor="t" lIns="0" rIns="0" tIns="0" bIns="0">
+          <a:bodyPr wrap="square" lIns="0" tIns="0" rIns="0" bIns="0" anchor="t">
             <a:spAutoFit/>
           </a:bodyPr>
           <a:lstStyle/>
@@ -9579,7 +9731,7 @@
           <a:noFill/>
         </p:spPr>
         <p:txBody>
-          <a:bodyPr wrap="square" anchor="t" lIns="0" rIns="0" tIns="0" bIns="0">
+          <a:bodyPr wrap="square" lIns="0" tIns="0" rIns="0" bIns="0" anchor="t">
             <a:spAutoFit/>
           </a:bodyPr>
           <a:lstStyle/>
@@ -9638,19 +9790,11 @@
           </a:fontRef>
         </p:style>
         <p:txBody>
-          <a:bodyPr rtlCol="0" anchor="ctr" wrap="none" lIns="0" rIns="0" tIns="0" bIns="0"/>
+          <a:bodyPr wrap="none" lIns="0" tIns="0" rIns="0" bIns="0" rtlCol="0" anchor="ctr"/>
           <a:lstStyle/>
           <a:p>
             <a:pPr algn="ctr"/>
-            <a:r>
-              <a:rPr sz="1600" b="1" i="0">
-                <a:solidFill>
-                  <a:srgbClr val="212121"/>
-                </a:solidFill>
-                <a:latin typeface="Cambria"/>
-              </a:rPr>
-              <a:t/>
-            </a:r>
+            <a:endParaRPr/>
           </a:p>
         </p:txBody>
       </p:sp>
@@ -9663,7 +9807,7 @@
         <p:spPr>
           <a:xfrm>
             <a:off x="1051560" y="2304288"/>
-            <a:ext cx="10515600" cy="365760"/>
+            <a:ext cx="10515600" cy="238527"/>
           </a:xfrm>
           <a:prstGeom prst="rect">
             <a:avLst/>
@@ -9671,7 +9815,7 @@
           <a:noFill/>
         </p:spPr>
         <p:txBody>
-          <a:bodyPr wrap="square" anchor="t" lIns="0" rIns="0" tIns="0" bIns="0">
+          <a:bodyPr wrap="square" lIns="0" tIns="0" rIns="0" bIns="0" anchor="t">
             <a:spAutoFit/>
           </a:bodyPr>
           <a:lstStyle/>
@@ -9682,14 +9826,20 @@
               </a:spcAft>
             </a:pPr>
             <a:r>
-              <a:rPr sz="1550" b="1" i="0">
+              <a:rPr lang="en-US" sz="1550" b="1" dirty="0">
                 <a:solidFill>
                   <a:srgbClr val="2B4E71"/>
                 </a:solidFill>
                 <a:latin typeface="Cambria"/>
               </a:rPr>
-              <a:t>Reproduce the style-dependence finding</a:t>
-            </a:r>
+              <a:t>Memory prediction-error complexity over atomic symbols is first-order</a:t>
+            </a:r>
+            <a:endParaRPr sz="1550" b="1" i="0" dirty="0">
+              <a:solidFill>
+                <a:srgbClr val="2B4E71"/>
+              </a:solidFill>
+              <a:latin typeface="Cambria"/>
+            </a:endParaRPr>
           </a:p>
         </p:txBody>
       </p:sp>
@@ -9702,7 +9852,7 @@
         <p:spPr>
           <a:xfrm>
             <a:off x="1051560" y="2715768"/>
-            <a:ext cx="10515600" cy="594360"/>
+            <a:ext cx="10515600" cy="400110"/>
           </a:xfrm>
           <a:prstGeom prst="rect">
             <a:avLst/>
@@ -9710,7 +9860,7 @@
           <a:noFill/>
         </p:spPr>
         <p:txBody>
-          <a:bodyPr wrap="square" anchor="t" lIns="0" rIns="0" tIns="0" bIns="0">
+          <a:bodyPr wrap="square" lIns="0" tIns="0" rIns="0" bIns="0" anchor="t">
             <a:spAutoFit/>
           </a:bodyPr>
           <a:lstStyle/>
@@ -9721,14 +9871,38 @@
               </a:spcAft>
             </a:pPr>
             <a:r>
-              <a:rPr sz="1300" b="0" i="0">
+              <a:rPr lang="en-US" sz="1300" b="0" i="0" dirty="0">
                 <a:solidFill>
                   <a:srgbClr val="2A2A2A"/>
                 </a:solidFill>
                 <a:latin typeface="Calibri"/>
               </a:rPr>
-              <a:t>Give songs style-linked chunk structure and test whether the model reproduces a stronger inverted-U for one style than another, the way bluegrass and jazz diverged empirically (Orr &amp; Ohlsson, 2001).</a:t>
-            </a:r>
+              <a:t>What about higher-dimensional, realistic stimuli?  What abou</a:t>
+            </a:r>
+            <a:r>
+              <a:rPr lang="en-US" sz="1300" dirty="0">
+                <a:solidFill>
+                  <a:srgbClr val="2A2A2A"/>
+                </a:solidFill>
+                <a:latin typeface="Calibri"/>
+              </a:rPr>
+              <a:t>t other aspects of aesthetic judgment?  Our work is just first-order, simple-as-possible memory approach. </a:t>
+            </a:r>
+            <a:r>
+              <a:rPr lang="en-US" sz="1300" b="0" i="0" dirty="0">
+                <a:solidFill>
+                  <a:srgbClr val="2A2A2A"/>
+                </a:solidFill>
+                <a:latin typeface="Calibri"/>
+              </a:rPr>
+              <a:t> </a:t>
+            </a:r>
+            <a:endParaRPr sz="1300" b="0" i="0" dirty="0">
+              <a:solidFill>
+                <a:srgbClr val="2A2A2A"/>
+              </a:solidFill>
+              <a:latin typeface="Calibri"/>
+            </a:endParaRPr>
           </a:p>
         </p:txBody>
       </p:sp>
@@ -9769,19 +9943,11 @@
           </a:fontRef>
         </p:style>
         <p:txBody>
-          <a:bodyPr rtlCol="0" anchor="ctr" wrap="none" lIns="0" rIns="0" tIns="0" bIns="0"/>
+          <a:bodyPr wrap="none" lIns="0" tIns="0" rIns="0" bIns="0" rtlCol="0" anchor="ctr"/>
           <a:lstStyle/>
           <a:p>
             <a:pPr algn="ctr"/>
-            <a:r>
-              <a:rPr sz="1600" b="1" i="0">
-                <a:solidFill>
-                  <a:srgbClr val="212121"/>
-                </a:solidFill>
-                <a:latin typeface="Cambria"/>
-              </a:rPr>
-              <a:t/>
-            </a:r>
+            <a:endParaRPr/>
           </a:p>
         </p:txBody>
       </p:sp>
@@ -9794,7 +9960,7 @@
         <p:spPr>
           <a:xfrm>
             <a:off x="1051560" y="3355848"/>
-            <a:ext cx="10515600" cy="365760"/>
+            <a:ext cx="10515600" cy="238527"/>
           </a:xfrm>
           <a:prstGeom prst="rect">
             <a:avLst/>
@@ -9802,7 +9968,7 @@
           <a:noFill/>
         </p:spPr>
         <p:txBody>
-          <a:bodyPr wrap="square" anchor="t" lIns="0" rIns="0" tIns="0" bIns="0">
+          <a:bodyPr wrap="square" lIns="0" tIns="0" rIns="0" bIns="0" anchor="t">
             <a:spAutoFit/>
           </a:bodyPr>
           <a:lstStyle/>
@@ -9813,14 +9979,20 @@
               </a:spcAft>
             </a:pPr>
             <a:r>
-              <a:rPr sz="1550" b="1" i="0">
+              <a:rPr lang="en-US" sz="1550" b="1" i="0" dirty="0">
                 <a:solidFill>
                   <a:srgbClr val="2B4E71"/>
                 </a:solidFill>
                 <a:latin typeface="Cambria"/>
               </a:rPr>
-              <a:t>Reproduce the expertise finding</a:t>
-            </a:r>
+              <a:t>A memory model for recommender systems?  Call Netflix?</a:t>
+            </a:r>
+            <a:endParaRPr sz="1550" b="1" i="0" dirty="0">
+              <a:solidFill>
+                <a:srgbClr val="2B4E71"/>
+              </a:solidFill>
+              <a:latin typeface="Cambria"/>
+            </a:endParaRPr>
           </a:p>
         </p:txBody>
       </p:sp>
@@ -9833,7 +10005,7 @@
         <p:spPr>
           <a:xfrm>
             <a:off x="1051560" y="3767328"/>
-            <a:ext cx="10515600" cy="594360"/>
+            <a:ext cx="10515600" cy="200055"/>
           </a:xfrm>
           <a:prstGeom prst="rect">
             <a:avLst/>
@@ -9841,7 +10013,7 @@
           <a:noFill/>
         </p:spPr>
         <p:txBody>
-          <a:bodyPr wrap="square" anchor="t" lIns="0" rIns="0" tIns="0" bIns="0">
+          <a:bodyPr wrap="square" lIns="0" tIns="0" rIns="0" bIns="0" anchor="t">
             <a:spAutoFit/>
           </a:bodyPr>
           <a:lstStyle/>
@@ -9852,26 +10024,38 @@
               </a:spcAft>
             </a:pPr>
             <a:r>
-              <a:rPr sz="1300" b="0" i="0">
+              <a:rPr lang="en-US" sz="1300" dirty="0">
                 <a:solidFill>
                   <a:srgbClr val="2A2A2A"/>
                 </a:solidFill>
                 <a:latin typeface="Calibri"/>
               </a:rPr>
-              <a:t>Since IBL memory accumulates naturally with exposure, test whether growing total chunk history flattens the model's own evaluation curve — a direct computational analogue of expertise dissolving the complexity–liking link (Orr &amp; Ohlsson, 2005).</a:t>
-            </a:r>
-          </a:p>
-        </p:txBody>
-      </p:sp>
-      <p:sp>
-        <p:nvSpPr>
-          <p:cNvPr id="12" name="Oval 11"/>
+              <a:t>Are there usable data?   What would be the recommendations for such systems?</a:t>
+            </a:r>
+            <a:endParaRPr sz="1300" b="0" i="0" dirty="0">
+              <a:solidFill>
+                <a:srgbClr val="2A2A2A"/>
+              </a:solidFill>
+              <a:latin typeface="Calibri"/>
+            </a:endParaRPr>
+          </a:p>
+        </p:txBody>
+      </p:sp>
+      <p:sp>
+        <p:nvSpPr>
+          <p:cNvPr id="18" name="Oval 17">
+            <a:extLst>
+              <a:ext uri="{FF2B5EF4-FFF2-40B4-BE49-F238E27FC236}">
+                <a16:creationId xmlns:a16="http://schemas.microsoft.com/office/drawing/2014/main" id="{98E9AD3C-3664-4335-C4DF-0A44816D5C9A}"/>
+              </a:ext>
+            </a:extLst>
+          </p:cNvPr>
           <p:cNvSpPr/>
           <p:nvPr/>
         </p:nvSpPr>
         <p:spPr>
           <a:xfrm>
-            <a:off x="502920" y="4434840"/>
+            <a:off x="502920" y="4233672"/>
             <a:ext cx="365760" cy="365760"/>
           </a:xfrm>
           <a:prstGeom prst="ellipse">
@@ -9900,32 +10084,30 @@
           </a:fontRef>
         </p:style>
         <p:txBody>
-          <a:bodyPr rtlCol="0" anchor="ctr" wrap="none" lIns="0" rIns="0" tIns="0" bIns="0"/>
+          <a:bodyPr wrap="none" lIns="0" tIns="0" rIns="0" bIns="0" rtlCol="0" anchor="ctr"/>
           <a:lstStyle/>
           <a:p>
             <a:pPr algn="ctr"/>
-            <a:r>
-              <a:rPr sz="1600" b="1" i="0">
-                <a:solidFill>
-                  <a:srgbClr val="212121"/>
-                </a:solidFill>
-                <a:latin typeface="Cambria"/>
-              </a:rPr>
-              <a:t/>
-            </a:r>
-          </a:p>
-        </p:txBody>
-      </p:sp>
-      <p:sp>
-        <p:nvSpPr>
-          <p:cNvPr id="13" name="TextBox 12"/>
+            <a:endParaRPr/>
+          </a:p>
+        </p:txBody>
+      </p:sp>
+      <p:sp>
+        <p:nvSpPr>
+          <p:cNvPr id="19" name="TextBox 18">
+            <a:extLst>
+              <a:ext uri="{FF2B5EF4-FFF2-40B4-BE49-F238E27FC236}">
+                <a16:creationId xmlns:a16="http://schemas.microsoft.com/office/drawing/2014/main" id="{D2CEF874-2D00-5722-F931-149691E02DD7}"/>
+              </a:ext>
+            </a:extLst>
+          </p:cNvPr>
           <p:cNvSpPr txBox="1"/>
           <p:nvPr/>
         </p:nvSpPr>
         <p:spPr>
           <a:xfrm>
-            <a:off x="1051560" y="4407407"/>
-            <a:ext cx="10515600" cy="365760"/>
+            <a:off x="1051560" y="4206241"/>
+            <a:ext cx="10515600" cy="238527"/>
           </a:xfrm>
           <a:prstGeom prst="rect">
             <a:avLst/>
@@ -9933,7 +10115,7 @@
           <a:noFill/>
         </p:spPr>
         <p:txBody>
-          <a:bodyPr wrap="square" anchor="t" lIns="0" rIns="0" tIns="0" bIns="0">
+          <a:bodyPr wrap="square" lIns="0" tIns="0" rIns="0" bIns="0" anchor="t">
             <a:spAutoFit/>
           </a:bodyPr>
           <a:lstStyle/>
@@ -9944,27 +10126,39 @@
               </a:spcAft>
             </a:pPr>
             <a:r>
-              <a:rPr sz="1550" b="1" i="0">
+              <a:rPr lang="en-US" sz="1550" b="1" i="0" dirty="0">
                 <a:solidFill>
                   <a:srgbClr val="2B4E71"/>
                 </a:solidFill>
                 <a:latin typeface="Cambria"/>
               </a:rPr>
-              <a:t>Human vs. model control</a:t>
-            </a:r>
-          </a:p>
-        </p:txBody>
-      </p:sp>
-      <p:sp>
-        <p:nvSpPr>
-          <p:cNvPr id="14" name="TextBox 13"/>
+              <a:t>Could empirically test </a:t>
+            </a:r>
+            <a:endParaRPr sz="1550" b="1" i="0" dirty="0">
+              <a:solidFill>
+                <a:srgbClr val="2B4E71"/>
+              </a:solidFill>
+              <a:latin typeface="Cambria"/>
+            </a:endParaRPr>
+          </a:p>
+        </p:txBody>
+      </p:sp>
+      <p:sp>
+        <p:nvSpPr>
+          <p:cNvPr id="20" name="TextBox 19">
+            <a:extLst>
+              <a:ext uri="{FF2B5EF4-FFF2-40B4-BE49-F238E27FC236}">
+                <a16:creationId xmlns:a16="http://schemas.microsoft.com/office/drawing/2014/main" id="{E5FA20A4-6ADC-7802-2A59-3F420F518F73}"/>
+              </a:ext>
+            </a:extLst>
+          </p:cNvPr>
           <p:cNvSpPr txBox="1"/>
           <p:nvPr/>
         </p:nvSpPr>
         <p:spPr>
           <a:xfrm>
-            <a:off x="1051560" y="4818888"/>
-            <a:ext cx="10515600" cy="594360"/>
+            <a:off x="1051560" y="4617721"/>
+            <a:ext cx="10515600" cy="200055"/>
           </a:xfrm>
           <a:prstGeom prst="rect">
             <a:avLst/>
@@ -9972,7 +10166,7 @@
           <a:noFill/>
         </p:spPr>
         <p:txBody>
-          <a:bodyPr wrap="square" anchor="t" lIns="0" rIns="0" tIns="0" bIns="0">
+          <a:bodyPr wrap="square" lIns="0" tIns="0" rIns="0" bIns="0" anchor="t">
             <a:spAutoFit/>
           </a:bodyPr>
           <a:lstStyle/>
@@ -9983,26 +10177,38 @@
               </a:spcAft>
             </a:pPr>
             <a:r>
-              <a:rPr sz="1300" b="0" i="0">
+              <a:rPr lang="en-US" sz="1300" dirty="0">
                 <a:solidFill>
                   <a:srgbClr val="2A2A2A"/>
                 </a:solidFill>
                 <a:latin typeface="Calibri"/>
               </a:rPr>
-              <a:t>Have human listeners actively choose their own next song to maximize enjoyment, and compare their choice dynamics to Algorithm C1 (naive) vs. C2 (self-aware of habituation) — which controller do people behave more like?</a:t>
-            </a:r>
-          </a:p>
-        </p:txBody>
-      </p:sp>
-      <p:sp>
-        <p:nvSpPr>
-          <p:cNvPr id="15" name="Oval 14"/>
+              <a:t>Sure, but why?</a:t>
+            </a:r>
+            <a:endParaRPr sz="1300" b="0" i="0" dirty="0">
+              <a:solidFill>
+                <a:srgbClr val="2A2A2A"/>
+              </a:solidFill>
+              <a:latin typeface="Calibri"/>
+            </a:endParaRPr>
+          </a:p>
+        </p:txBody>
+      </p:sp>
+      <p:sp>
+        <p:nvSpPr>
+          <p:cNvPr id="21" name="Oval 20">
+            <a:extLst>
+              <a:ext uri="{FF2B5EF4-FFF2-40B4-BE49-F238E27FC236}">
+                <a16:creationId xmlns:a16="http://schemas.microsoft.com/office/drawing/2014/main" id="{682B0B85-23A0-AD5F-1E5B-5311C00FAD6C}"/>
+              </a:ext>
+            </a:extLst>
+          </p:cNvPr>
           <p:cNvSpPr/>
           <p:nvPr/>
         </p:nvSpPr>
         <p:spPr>
           <a:xfrm>
-            <a:off x="502920" y="5486400"/>
+            <a:off x="498663" y="5094027"/>
             <a:ext cx="365760" cy="365760"/>
           </a:xfrm>
           <a:prstGeom prst="ellipse">
@@ -10031,32 +10237,30 @@
           </a:fontRef>
         </p:style>
         <p:txBody>
-          <a:bodyPr rtlCol="0" anchor="ctr" wrap="none" lIns="0" rIns="0" tIns="0" bIns="0"/>
+          <a:bodyPr wrap="none" lIns="0" tIns="0" rIns="0" bIns="0" rtlCol="0" anchor="ctr"/>
           <a:lstStyle/>
           <a:p>
             <a:pPr algn="ctr"/>
-            <a:r>
-              <a:rPr sz="1600" b="1" i="0">
-                <a:solidFill>
-                  <a:srgbClr val="212121"/>
-                </a:solidFill>
-                <a:latin typeface="Cambria"/>
-              </a:rPr>
-              <a:t/>
-            </a:r>
-          </a:p>
-        </p:txBody>
-      </p:sp>
-      <p:sp>
-        <p:nvSpPr>
-          <p:cNvPr id="16" name="TextBox 15"/>
+            <a:endParaRPr/>
+          </a:p>
+        </p:txBody>
+      </p:sp>
+      <p:sp>
+        <p:nvSpPr>
+          <p:cNvPr id="22" name="TextBox 21">
+            <a:extLst>
+              <a:ext uri="{FF2B5EF4-FFF2-40B4-BE49-F238E27FC236}">
+                <a16:creationId xmlns:a16="http://schemas.microsoft.com/office/drawing/2014/main" id="{757DB690-3F7C-AA31-751E-77BF8D53C8A9}"/>
+              </a:ext>
+            </a:extLst>
+          </p:cNvPr>
           <p:cNvSpPr txBox="1"/>
           <p:nvPr/>
         </p:nvSpPr>
         <p:spPr>
           <a:xfrm>
-            <a:off x="1051560" y="5458968"/>
-            <a:ext cx="10515600" cy="365760"/>
+            <a:off x="1047303" y="5066596"/>
+            <a:ext cx="10515600" cy="238527"/>
           </a:xfrm>
           <a:prstGeom prst="rect">
             <a:avLst/>
@@ -10064,7 +10268,7 @@
           <a:noFill/>
         </p:spPr>
         <p:txBody>
-          <a:bodyPr wrap="square" anchor="t" lIns="0" rIns="0" tIns="0" bIns="0">
+          <a:bodyPr wrap="square" lIns="0" tIns="0" rIns="0" bIns="0" anchor="t">
             <a:spAutoFit/>
           </a:bodyPr>
           <a:lstStyle/>
@@ -10075,27 +10279,39 @@
               </a:spcAft>
             </a:pPr>
             <a:r>
-              <a:rPr sz="1550" b="1" i="0">
+              <a:rPr lang="en-US" sz="1550" b="1" dirty="0">
                 <a:solidFill>
                   <a:srgbClr val="2B4E71"/>
                 </a:solidFill>
                 <a:latin typeface="Cambria"/>
               </a:rPr>
-              <a:t>Define and test Algorithm B</a:t>
-            </a:r>
-          </a:p>
-        </p:txBody>
-      </p:sp>
-      <p:sp>
-        <p:nvSpPr>
-          <p:cNvPr id="17" name="TextBox 16"/>
+              <a:t>Implications beyond/outside of domain of aesthetics</a:t>
+            </a:r>
+            <a:endParaRPr sz="1550" b="1" i="0" dirty="0">
+              <a:solidFill>
+                <a:srgbClr val="2B4E71"/>
+              </a:solidFill>
+              <a:latin typeface="Cambria"/>
+            </a:endParaRPr>
+          </a:p>
+        </p:txBody>
+      </p:sp>
+      <p:sp>
+        <p:nvSpPr>
+          <p:cNvPr id="23" name="TextBox 22">
+            <a:extLst>
+              <a:ext uri="{FF2B5EF4-FFF2-40B4-BE49-F238E27FC236}">
+                <a16:creationId xmlns:a16="http://schemas.microsoft.com/office/drawing/2014/main" id="{88B0DC82-2DE5-8BC4-7BE4-03D3A1075CCC}"/>
+              </a:ext>
+            </a:extLst>
+          </p:cNvPr>
           <p:cNvSpPr txBox="1"/>
           <p:nvPr/>
         </p:nvSpPr>
         <p:spPr>
           <a:xfrm>
-            <a:off x="1051560" y="5870448"/>
-            <a:ext cx="10515600" cy="594360"/>
+            <a:off x="1047303" y="5478076"/>
+            <a:ext cx="10515600" cy="200055"/>
           </a:xfrm>
           <a:prstGeom prst="rect">
             <a:avLst/>
@@ -10103,7 +10319,7 @@
           <a:noFill/>
         </p:spPr>
         <p:txBody>
-          <a:bodyPr wrap="square" anchor="t" lIns="0" rIns="0" tIns="0" bIns="0">
+          <a:bodyPr wrap="square" lIns="0" tIns="0" rIns="0" bIns="0" anchor="t">
             <a:spAutoFit/>
           </a:bodyPr>
           <a:lstStyle/>
@@ -10114,14 +10330,20 @@
               </a:spcAft>
             </a:pPr>
             <a:r>
-              <a:rPr sz="1300" b="0" i="0">
+              <a:rPr lang="en-US" sz="1300" dirty="0">
                 <a:solidFill>
                   <a:srgbClr val="2A2A2A"/>
                 </a:solidFill>
                 <a:latin typeface="Calibri"/>
               </a:rPr>
-              <a:t>A similarity-based counterpart to activation-difference, to see whether a different memory mechanism reproduces the same qualitative results.</a:t>
-            </a:r>
+              <a:t>Just thought I’d ask.  Any ideas?</a:t>
+            </a:r>
+            <a:endParaRPr sz="1300" b="0" i="0" dirty="0">
+              <a:solidFill>
+                <a:srgbClr val="2A2A2A"/>
+              </a:solidFill>
+              <a:latin typeface="Calibri"/>
+            </a:endParaRPr>
           </a:p>
         </p:txBody>
       </p:sp>
@@ -10134,7 +10356,7 @@
 </file>
 
 <file path=ppt/slides/slide16.xml><?xml version="1.0" encoding="utf-8"?>
-<p:sld xmlns:a="http://schemas.openxmlformats.org/drawingml/2006/main" xmlns:p="http://schemas.openxmlformats.org/presentationml/2006/main" xmlns:r="http://schemas.openxmlformats.org/officeDocument/2006/relationships">
+<p:sld xmlns:a="http://schemas.openxmlformats.org/drawingml/2006/main" xmlns:r="http://schemas.openxmlformats.org/officeDocument/2006/relationships" xmlns:p="http://schemas.openxmlformats.org/presentationml/2006/main">
   <p:cSld>
     <p:bg>
       <p:bgPr>
@@ -10150,7 +10372,14 @@
         <p:cNvGrpSpPr/>
         <p:nvPr/>
       </p:nvGrpSpPr>
-      <p:grpSpPr/>
+      <p:grpSpPr>
+        <a:xfrm>
+          <a:off x="0" y="0"/>
+          <a:ext cx="0" cy="0"/>
+          <a:chOff x="0" y="0"/>
+          <a:chExt cx="0" cy="0"/>
+        </a:xfrm>
+      </p:grpSpPr>
       <p:sp>
         <p:nvSpPr>
           <p:cNvPr id="2" name="TextBox 1"/>
@@ -10168,7 +10397,7 @@
           <a:noFill/>
         </p:spPr>
         <p:txBody>
-          <a:bodyPr wrap="square" anchor="t" lIns="0" rIns="0" tIns="0" bIns="0">
+          <a:bodyPr wrap="square" lIns="0" tIns="0" rIns="0" bIns="0" anchor="t">
             <a:spAutoFit/>
           </a:bodyPr>
           <a:lstStyle/>
@@ -10179,7 +10408,7 @@
               </a:spcAft>
             </a:pPr>
             <a:r>
-              <a:rPr sz="3400" b="1" i="0">
+              <a:rPr sz="3400" b="1" i="0" dirty="0">
                 <a:solidFill>
                   <a:srgbClr val="FFFFFF"/>
                 </a:solidFill>
@@ -10192,14 +10421,14 @@
       </p:sp>
       <p:sp>
         <p:nvSpPr>
-          <p:cNvPr id="3" name="TextBox 2"/>
+          <p:cNvPr id="5" name="TextBox 4"/>
           <p:cNvSpPr txBox="1"/>
           <p:nvPr/>
         </p:nvSpPr>
         <p:spPr>
           <a:xfrm>
-            <a:off x="822960" y="3291840"/>
-            <a:ext cx="10515600" cy="914400"/>
+            <a:off x="822960" y="4754880"/>
+            <a:ext cx="10515600" cy="507831"/>
           </a:xfrm>
           <a:prstGeom prst="rect">
             <a:avLst/>
@@ -10207,103 +10436,43 @@
           <a:noFill/>
         </p:spPr>
         <p:txBody>
-          <a:bodyPr wrap="square" anchor="t" lIns="0" rIns="0" tIns="0" bIns="0">
+          <a:bodyPr wrap="square" lIns="0" tIns="0" rIns="0" bIns="0" anchor="t">
             <a:spAutoFit/>
           </a:bodyPr>
           <a:lstStyle/>
           <a:p>
-            <a:pPr algn="l">
+            <a:pPr>
               <a:spcAft>
                 <a:spcPts val="600"/>
               </a:spcAft>
             </a:pPr>
             <a:r>
-              <a:rPr sz="1600" b="0" i="0">
+              <a:rPr lang="en-US" sz="1400" dirty="0">
                 <a:solidFill>
                   <a:srgbClr val="C9C9C7"/>
                 </a:solidFill>
-                <a:latin typeface="Calibri"/>
-              </a:rPr>
-              <a:t>Algorithm B (similarity-based) and the style/expertise replications above remain the clearest open threads.</a:t>
-            </a:r>
-          </a:p>
-        </p:txBody>
-      </p:sp>
-      <p:sp>
-        <p:nvSpPr>
-          <p:cNvPr id="4" name="TextBox 3"/>
-          <p:cNvSpPr txBox="1"/>
-          <p:nvPr/>
-        </p:nvSpPr>
-        <p:spPr>
-          <a:xfrm>
-            <a:off x="822960" y="4297680"/>
-            <a:ext cx="10515600" cy="457200"/>
-          </a:xfrm>
-          <a:prstGeom prst="rect">
-            <a:avLst/>
-          </a:prstGeom>
-          <a:noFill/>
-        </p:spPr>
-        <p:txBody>
-          <a:bodyPr wrap="square" anchor="t" lIns="0" rIns="0" tIns="0" bIns="0">
-            <a:spAutoFit/>
-          </a:bodyPr>
-          <a:lstStyle/>
-          <a:p>
-            <a:pPr algn="l">
+                <a:hlinkClick r:id="rId2"/>
+              </a:rPr>
+              <a:t>https://github.com/mark-orr/aesthetic-memory-model</a:t>
+            </a:r>
+            <a:endParaRPr lang="en-US" sz="1400" dirty="0">
+              <a:solidFill>
+                <a:srgbClr val="C9C9C7"/>
+              </a:solidFill>
+            </a:endParaRPr>
+          </a:p>
+          <a:p>
+            <a:pPr>
               <a:spcAft>
                 <a:spcPts val="600"/>
               </a:spcAft>
             </a:pPr>
-            <a:r>
-              <a:rPr sz="1600" b="1" i="0">
-                <a:solidFill>
-                  <a:srgbClr val="D9A61C"/>
-                </a:solidFill>
-                <a:latin typeface="Courier New"/>
-              </a:rPr>
-              <a:t>mark-orr.github.io/aesthetic-memory-model</a:t>
-            </a:r>
-          </a:p>
-        </p:txBody>
-      </p:sp>
-      <p:sp>
-        <p:nvSpPr>
-          <p:cNvPr id="5" name="TextBox 4"/>
-          <p:cNvSpPr txBox="1"/>
-          <p:nvPr/>
-        </p:nvSpPr>
-        <p:spPr>
-          <a:xfrm>
-            <a:off x="822960" y="4754880"/>
-            <a:ext cx="10515600" cy="365760"/>
-          </a:xfrm>
-          <a:prstGeom prst="rect">
-            <a:avLst/>
-          </a:prstGeom>
-          <a:noFill/>
-        </p:spPr>
-        <p:txBody>
-          <a:bodyPr wrap="square" anchor="t" lIns="0" rIns="0" tIns="0" bIns="0">
-            <a:spAutoFit/>
-          </a:bodyPr>
-          <a:lstStyle/>
-          <a:p>
-            <a:pPr algn="l">
-              <a:spcAft>
-                <a:spcPts val="600"/>
-              </a:spcAft>
-            </a:pPr>
-            <a:r>
-              <a:rPr sz="1400" b="0" i="0">
-                <a:solidFill>
-                  <a:srgbClr val="C9C9C7"/>
-                </a:solidFill>
-                <a:latin typeface="Calibri"/>
-              </a:rPr>
-              <a:t>github.com/mark-orr/aesthetic-memory-model</a:t>
-            </a:r>
+            <a:endParaRPr sz="1400" b="0" i="0" dirty="0">
+              <a:solidFill>
+                <a:srgbClr val="C9C9C7"/>
+              </a:solidFill>
+              <a:latin typeface="Calibri"/>
+            </a:endParaRPr>
           </a:p>
         </p:txBody>
       </p:sp>
@@ -10316,7 +10485,7 @@
 </file>
 
 <file path=ppt/slides/slide2.xml><?xml version="1.0" encoding="utf-8"?>
-<p:sld xmlns:a="http://schemas.openxmlformats.org/drawingml/2006/main" xmlns:p="http://schemas.openxmlformats.org/presentationml/2006/main" xmlns:r="http://schemas.openxmlformats.org/officeDocument/2006/relationships">
+<p:sld xmlns:a="http://schemas.openxmlformats.org/drawingml/2006/main" xmlns:r="http://schemas.openxmlformats.org/officeDocument/2006/relationships" xmlns:p="http://schemas.openxmlformats.org/presentationml/2006/main">
   <p:cSld>
     <p:bg>
       <p:bgPr>
@@ -10332,7 +10501,14 @@
         <p:cNvGrpSpPr/>
         <p:nvPr/>
       </p:nvGrpSpPr>
-      <p:grpSpPr/>
+      <p:grpSpPr>
+        <a:xfrm>
+          <a:off x="0" y="0"/>
+          <a:ext cx="0" cy="0"/>
+          <a:chOff x="0" y="0"/>
+          <a:chExt cx="0" cy="0"/>
+        </a:xfrm>
+      </p:grpSpPr>
       <p:sp>
         <p:nvSpPr>
           <p:cNvPr id="2" name="Oval 1"/>
@@ -10370,7 +10546,7 @@
           </a:fontRef>
         </p:style>
         <p:txBody>
-          <a:bodyPr rtlCol="0" anchor="ctr" wrap="none" lIns="0" rIns="0" tIns="0" bIns="0"/>
+          <a:bodyPr wrap="none" lIns="0" tIns="0" rIns="0" bIns="0" rtlCol="0" anchor="ctr"/>
           <a:lstStyle/>
           <a:p>
             <a:pPr algn="ctr"/>
@@ -10403,7 +10579,7 @@
           <a:noFill/>
         </p:spPr>
         <p:txBody>
-          <a:bodyPr wrap="square" anchor="t" lIns="0" rIns="0" tIns="0" bIns="0">
+          <a:bodyPr wrap="square" lIns="0" tIns="0" rIns="0" bIns="0" anchor="t">
             <a:spAutoFit/>
           </a:bodyPr>
           <a:lstStyle/>
@@ -10442,7 +10618,7 @@
           <a:noFill/>
         </p:spPr>
         <p:txBody>
-          <a:bodyPr wrap="square" anchor="t" lIns="0" rIns="0" tIns="0" bIns="0">
+          <a:bodyPr wrap="square" lIns="0" tIns="0" rIns="0" bIns="0" anchor="t">
             <a:spAutoFit/>
           </a:bodyPr>
           <a:lstStyle/>
@@ -10481,7 +10657,7 @@
           <a:noFill/>
         </p:spPr>
         <p:txBody>
-          <a:bodyPr wrap="square" anchor="t" lIns="0" rIns="0" tIns="0" bIns="0">
+          <a:bodyPr wrap="square" lIns="0" tIns="0" rIns="0" bIns="0" anchor="t">
             <a:spAutoFit/>
           </a:bodyPr>
           <a:lstStyle/>
@@ -10492,13 +10668,22 @@
               </a:spcAft>
             </a:pPr>
             <a:r>
-              <a:rPr sz="1800" b="1" i="0">
+              <a:rPr sz="1800" b="1" i="0" dirty="0" err="1">
                 <a:solidFill>
                   <a:srgbClr val="2B4E71"/>
                 </a:solidFill>
                 <a:latin typeface="Cambria"/>
               </a:rPr>
-              <a:t>Berlyne's inverted-U hypothesis</a:t>
+              <a:t>Berlyne's</a:t>
+            </a:r>
+            <a:r>
+              <a:rPr sz="1800" b="1" i="0" dirty="0">
+                <a:solidFill>
+                  <a:srgbClr val="2B4E71"/>
+                </a:solidFill>
+                <a:latin typeface="Cambria"/>
+              </a:rPr>
+              <a:t> inverted-U hypothesis</a:t>
             </a:r>
           </a:p>
           <a:p>
@@ -10509,7 +10694,7 @@
               <a:buChar char="•"/>
             </a:pPr>
             <a:r>
-              <a:rPr sz="1500" b="0" i="0">
+              <a:rPr sz="1500" b="0" i="0" dirty="0">
                 <a:solidFill>
                   <a:srgbClr val="2A2A2A"/>
                 </a:solidFill>
@@ -10526,7 +10711,7 @@
               <a:buChar char="•"/>
             </a:pPr>
             <a:r>
-              <a:rPr sz="1500" b="0" i="0">
+              <a:rPr sz="1500" b="0" i="0" dirty="0">
                 <a:solidFill>
                   <a:srgbClr val="2A2A2A"/>
                 </a:solidFill>
@@ -10543,7 +10728,7 @@
               <a:buChar char="•"/>
             </a:pPr>
             <a:r>
-              <a:rPr sz="1500" b="0" i="0">
+              <a:rPr sz="1500" b="0" i="0" dirty="0">
                 <a:solidFill>
                   <a:srgbClr val="2A2A2A"/>
                 </a:solidFill>
@@ -10597,6 +10782,7 @@
           <a:lstStyle/>
           <a:p>
             <a:pPr algn="ctr"/>
+            <a:endParaRPr/>
           </a:p>
         </p:txBody>
       </p:sp>
@@ -10617,7 +10803,7 @@
           <a:noFill/>
         </p:spPr>
         <p:txBody>
-          <a:bodyPr wrap="square" anchor="t" lIns="0" rIns="0" tIns="0" bIns="0">
+          <a:bodyPr wrap="square" lIns="0" tIns="0" rIns="0" bIns="0" anchor="t">
             <a:spAutoFit/>
           </a:bodyPr>
           <a:lstStyle/>
@@ -10656,7 +10842,7 @@
           <a:noFill/>
         </p:spPr>
         <p:txBody>
-          <a:bodyPr wrap="square" anchor="t" lIns="0" rIns="0" tIns="0" bIns="0">
+          <a:bodyPr wrap="square" lIns="0" tIns="0" rIns="0" bIns="0" anchor="t">
             <a:spAutoFit/>
           </a:bodyPr>
           <a:lstStyle/>
@@ -10695,7 +10881,7 @@
           <a:noFill/>
         </p:spPr>
         <p:txBody>
-          <a:bodyPr wrap="square" anchor="t" lIns="0" rIns="0" tIns="0" bIns="0">
+          <a:bodyPr wrap="square" lIns="0" tIns="0" rIns="0" bIns="0" anchor="t">
             <a:spAutoFit/>
           </a:bodyPr>
           <a:lstStyle/>
@@ -10734,7 +10920,7 @@
           <a:noFill/>
         </p:spPr>
         <p:txBody>
-          <a:bodyPr wrap="square" anchor="t" lIns="0" rIns="0" tIns="0" bIns="0">
+          <a:bodyPr wrap="square" lIns="0" tIns="0" rIns="0" bIns="0" anchor="t">
             <a:spAutoFit/>
           </a:bodyPr>
           <a:lstStyle/>
@@ -10765,7 +10951,7 @@
 </file>
 
 <file path=ppt/slides/slide3.xml><?xml version="1.0" encoding="utf-8"?>
-<p:sld xmlns:a="http://schemas.openxmlformats.org/drawingml/2006/main" xmlns:p="http://schemas.openxmlformats.org/presentationml/2006/main" xmlns:r="http://schemas.openxmlformats.org/officeDocument/2006/relationships">
+<p:sld xmlns:a="http://schemas.openxmlformats.org/drawingml/2006/main" xmlns:r="http://schemas.openxmlformats.org/officeDocument/2006/relationships" xmlns:p="http://schemas.openxmlformats.org/presentationml/2006/main">
   <p:cSld>
     <p:bg>
       <p:bgPr>
@@ -10781,7 +10967,14 @@
         <p:cNvGrpSpPr/>
         <p:nvPr/>
       </p:nvGrpSpPr>
-      <p:grpSpPr/>
+      <p:grpSpPr>
+        <a:xfrm>
+          <a:off x="0" y="0"/>
+          <a:ext cx="0" cy="0"/>
+          <a:chOff x="0" y="0"/>
+          <a:chExt cx="0" cy="0"/>
+        </a:xfrm>
+      </p:grpSpPr>
       <p:sp>
         <p:nvSpPr>
           <p:cNvPr id="2" name="Oval 1"/>
@@ -10819,7 +11012,7 @@
           </a:fontRef>
         </p:style>
         <p:txBody>
-          <a:bodyPr rtlCol="0" anchor="ctr" wrap="none" lIns="0" rIns="0" tIns="0" bIns="0"/>
+          <a:bodyPr wrap="none" lIns="0" tIns="0" rIns="0" bIns="0" rtlCol="0" anchor="ctr"/>
           <a:lstStyle/>
           <a:p>
             <a:pPr algn="ctr"/>
@@ -10852,7 +11045,7 @@
           <a:noFill/>
         </p:spPr>
         <p:txBody>
-          <a:bodyPr wrap="square" anchor="t" lIns="0" rIns="0" tIns="0" bIns="0">
+          <a:bodyPr wrap="square" lIns="0" tIns="0" rIns="0" bIns="0" anchor="t">
             <a:spAutoFit/>
           </a:bodyPr>
           <a:lstStyle/>
@@ -10891,7 +11084,7 @@
           <a:noFill/>
         </p:spPr>
         <p:txBody>
-          <a:bodyPr wrap="square" anchor="t" lIns="0" rIns="0" tIns="0" bIns="0">
+          <a:bodyPr wrap="square" lIns="0" tIns="0" rIns="0" bIns="0" anchor="t">
             <a:spAutoFit/>
           </a:bodyPr>
           <a:lstStyle/>
@@ -10930,7 +11123,7 @@
           <a:noFill/>
         </p:spPr>
         <p:txBody>
-          <a:bodyPr wrap="square" anchor="t" lIns="0" rIns="0" tIns="0" bIns="0">
+          <a:bodyPr wrap="square" lIns="0" tIns="0" rIns="0" bIns="0" anchor="t">
             <a:spAutoFit/>
           </a:bodyPr>
           <a:lstStyle/>
@@ -11065,6 +11258,7 @@
           <a:lstStyle/>
           <a:p>
             <a:pPr algn="ctr"/>
+            <a:endParaRPr/>
           </a:p>
         </p:txBody>
       </p:sp>
@@ -11185,7 +11379,7 @@
           <a:noFill/>
         </p:spPr>
         <p:txBody>
-          <a:bodyPr wrap="square" anchor="t" lIns="0" rIns="0" tIns="0" bIns="0">
+          <a:bodyPr wrap="square" lIns="0" tIns="0" rIns="0" bIns="0" anchor="t">
             <a:spAutoFit/>
           </a:bodyPr>
           <a:lstStyle/>
@@ -11252,6 +11446,7 @@
           <a:lstStyle/>
           <a:p>
             <a:pPr algn="ctr"/>
+            <a:endParaRPr/>
           </a:p>
         </p:txBody>
       </p:sp>
@@ -11307,7 +11502,7 @@
           <a:noFill/>
         </p:spPr>
         <p:txBody>
-          <a:bodyPr wrap="square" anchor="t" lIns="0" rIns="0" tIns="0" bIns="0">
+          <a:bodyPr wrap="square" lIns="0" tIns="0" rIns="0" bIns="0" anchor="t">
             <a:spAutoFit/>
           </a:bodyPr>
           <a:lstStyle/>
@@ -11346,7 +11541,7 @@
           <a:noFill/>
         </p:spPr>
         <p:txBody>
-          <a:bodyPr wrap="square" anchor="t" lIns="0" rIns="0" tIns="0" bIns="0">
+          <a:bodyPr wrap="square" lIns="0" tIns="0" rIns="0" bIns="0" anchor="t">
             <a:spAutoFit/>
           </a:bodyPr>
           <a:lstStyle/>
@@ -11385,7 +11580,7 @@
           <a:noFill/>
         </p:spPr>
         <p:txBody>
-          <a:bodyPr wrap="square" anchor="t" lIns="0" rIns="0" tIns="0" bIns="0">
+          <a:bodyPr wrap="square" lIns="0" tIns="0" rIns="0" bIns="0" anchor="t">
             <a:spAutoFit/>
           </a:bodyPr>
           <a:lstStyle/>
@@ -11416,7 +11611,7 @@
 </file>
 
 <file path=ppt/slides/slide4.xml><?xml version="1.0" encoding="utf-8"?>
-<p:sld xmlns:a="http://schemas.openxmlformats.org/drawingml/2006/main" xmlns:p="http://schemas.openxmlformats.org/presentationml/2006/main" xmlns:r="http://schemas.openxmlformats.org/officeDocument/2006/relationships">
+<p:sld xmlns:a="http://schemas.openxmlformats.org/drawingml/2006/main" xmlns:r="http://schemas.openxmlformats.org/officeDocument/2006/relationships" xmlns:p="http://schemas.openxmlformats.org/presentationml/2006/main">
   <p:cSld>
     <p:bg>
       <p:bgPr>
@@ -11432,7 +11627,14 @@
         <p:cNvGrpSpPr/>
         <p:nvPr/>
       </p:nvGrpSpPr>
-      <p:grpSpPr/>
+      <p:grpSpPr>
+        <a:xfrm>
+          <a:off x="0" y="0"/>
+          <a:ext cx="0" cy="0"/>
+          <a:chOff x="0" y="0"/>
+          <a:chExt cx="0" cy="0"/>
+        </a:xfrm>
+      </p:grpSpPr>
       <p:sp>
         <p:nvSpPr>
           <p:cNvPr id="2" name="Oval 1"/>
@@ -11470,7 +11672,7 @@
           </a:fontRef>
         </p:style>
         <p:txBody>
-          <a:bodyPr rtlCol="0" anchor="ctr" wrap="none" lIns="0" rIns="0" tIns="0" bIns="0"/>
+          <a:bodyPr wrap="none" lIns="0" tIns="0" rIns="0" bIns="0" rtlCol="0" anchor="ctr"/>
           <a:lstStyle/>
           <a:p>
             <a:pPr algn="ctr"/>
@@ -11503,7 +11705,7 @@
           <a:noFill/>
         </p:spPr>
         <p:txBody>
-          <a:bodyPr wrap="square" anchor="t" lIns="0" rIns="0" tIns="0" bIns="0">
+          <a:bodyPr wrap="square" lIns="0" tIns="0" rIns="0" bIns="0" anchor="t">
             <a:spAutoFit/>
           </a:bodyPr>
           <a:lstStyle/>
@@ -11542,7 +11744,7 @@
           <a:noFill/>
         </p:spPr>
         <p:txBody>
-          <a:bodyPr wrap="square" anchor="t" lIns="0" rIns="0" tIns="0" bIns="0">
+          <a:bodyPr wrap="square" lIns="0" tIns="0" rIns="0" bIns="0" anchor="t">
             <a:spAutoFit/>
           </a:bodyPr>
           <a:lstStyle/>
@@ -11581,7 +11783,7 @@
           <a:noFill/>
         </p:spPr>
         <p:txBody>
-          <a:bodyPr wrap="square" anchor="t" lIns="0" rIns="0" tIns="0" bIns="0">
+          <a:bodyPr wrap="square" lIns="0" tIns="0" rIns="0" bIns="0" anchor="t">
             <a:spAutoFit/>
           </a:bodyPr>
           <a:lstStyle/>
@@ -11714,6 +11916,7 @@
           <a:lstStyle/>
           <a:p>
             <a:pPr algn="ctr"/>
+            <a:endParaRPr/>
           </a:p>
         </p:txBody>
       </p:sp>
@@ -11734,7 +11937,7 @@
           <a:noFill/>
         </p:spPr>
         <p:txBody>
-          <a:bodyPr wrap="square" anchor="t" lIns="0" rIns="0" tIns="0" bIns="0">
+          <a:bodyPr wrap="square" lIns="0" tIns="0" rIns="0" bIns="0" anchor="t">
             <a:spAutoFit/>
           </a:bodyPr>
           <a:lstStyle/>
@@ -11773,7 +11976,7 @@
           <a:noFill/>
         </p:spPr>
         <p:txBody>
-          <a:bodyPr wrap="square" anchor="t" lIns="0" rIns="0" tIns="0" bIns="0">
+          <a:bodyPr wrap="square" lIns="0" tIns="0" rIns="0" bIns="0" anchor="t">
             <a:spAutoFit/>
           </a:bodyPr>
           <a:lstStyle/>
@@ -11812,7 +12015,7 @@
           <a:noFill/>
         </p:spPr>
         <p:txBody>
-          <a:bodyPr wrap="square" anchor="t" lIns="0" rIns="0" tIns="0" bIns="0">
+          <a:bodyPr wrap="square" lIns="0" tIns="0" rIns="0" bIns="0" anchor="t">
             <a:spAutoFit/>
           </a:bodyPr>
           <a:lstStyle/>
@@ -11875,6 +12078,7 @@
           <a:lstStyle/>
           <a:p>
             <a:pPr algn="ctr"/>
+            <a:endParaRPr/>
           </a:p>
         </p:txBody>
       </p:sp>
@@ -11895,7 +12099,7 @@
           <a:noFill/>
         </p:spPr>
         <p:txBody>
-          <a:bodyPr wrap="square" anchor="t" lIns="0" rIns="0" tIns="0" bIns="0">
+          <a:bodyPr wrap="square" lIns="0" tIns="0" rIns="0" bIns="0" anchor="t">
             <a:spAutoFit/>
           </a:bodyPr>
           <a:lstStyle/>
@@ -11958,6 +12162,7 @@
           <a:lstStyle/>
           <a:p>
             <a:pPr algn="ctr"/>
+            <a:endParaRPr/>
           </a:p>
         </p:txBody>
       </p:sp>
@@ -11978,7 +12183,7 @@
           <a:noFill/>
         </p:spPr>
         <p:txBody>
-          <a:bodyPr wrap="square" anchor="t" lIns="0" rIns="0" tIns="0" bIns="0">
+          <a:bodyPr wrap="square" lIns="0" tIns="0" rIns="0" bIns="0" anchor="t">
             <a:spAutoFit/>
           </a:bodyPr>
           <a:lstStyle/>
@@ -12041,6 +12246,7 @@
           <a:lstStyle/>
           <a:p>
             <a:pPr algn="ctr"/>
+            <a:endParaRPr/>
           </a:p>
         </p:txBody>
       </p:sp>
@@ -12061,7 +12267,7 @@
           <a:noFill/>
         </p:spPr>
         <p:txBody>
-          <a:bodyPr wrap="square" anchor="t" lIns="0" rIns="0" tIns="0" bIns="0">
+          <a:bodyPr wrap="square" lIns="0" tIns="0" rIns="0" bIns="0" anchor="t">
             <a:spAutoFit/>
           </a:bodyPr>
           <a:lstStyle/>
@@ -12100,7 +12306,7 @@
           <a:noFill/>
         </p:spPr>
         <p:txBody>
-          <a:bodyPr wrap="square" anchor="t" lIns="0" rIns="0" tIns="0" bIns="0">
+          <a:bodyPr wrap="square" lIns="0" tIns="0" rIns="0" bIns="0" anchor="t">
             <a:spAutoFit/>
           </a:bodyPr>
           <a:lstStyle/>
@@ -12139,7 +12345,7 @@
           <a:noFill/>
         </p:spPr>
         <p:txBody>
-          <a:bodyPr wrap="square" anchor="t" lIns="0" rIns="0" tIns="0" bIns="0">
+          <a:bodyPr wrap="square" lIns="0" tIns="0" rIns="0" bIns="0" anchor="t">
             <a:spAutoFit/>
           </a:bodyPr>
           <a:lstStyle/>
@@ -12170,7 +12376,7 @@
 </file>
 
 <file path=ppt/slides/slide5.xml><?xml version="1.0" encoding="utf-8"?>
-<p:sld xmlns:a="http://schemas.openxmlformats.org/drawingml/2006/main" xmlns:p="http://schemas.openxmlformats.org/presentationml/2006/main" xmlns:r="http://schemas.openxmlformats.org/officeDocument/2006/relationships">
+<p:sld xmlns:a="http://schemas.openxmlformats.org/drawingml/2006/main" xmlns:r="http://schemas.openxmlformats.org/officeDocument/2006/relationships" xmlns:p="http://schemas.openxmlformats.org/presentationml/2006/main">
   <p:cSld>
     <p:bg>
       <p:bgPr>
@@ -12186,7 +12392,14 @@
         <p:cNvGrpSpPr/>
         <p:nvPr/>
       </p:nvGrpSpPr>
-      <p:grpSpPr/>
+      <p:grpSpPr>
+        <a:xfrm>
+          <a:off x="0" y="0"/>
+          <a:ext cx="0" cy="0"/>
+          <a:chOff x="0" y="0"/>
+          <a:chExt cx="0" cy="0"/>
+        </a:xfrm>
+      </p:grpSpPr>
       <p:sp>
         <p:nvSpPr>
           <p:cNvPr id="2" name="Oval 1"/>
@@ -12224,7 +12437,7 @@
           </a:fontRef>
         </p:style>
         <p:txBody>
-          <a:bodyPr rtlCol="0" anchor="ctr" wrap="none" lIns="0" rIns="0" tIns="0" bIns="0"/>
+          <a:bodyPr wrap="none" lIns="0" tIns="0" rIns="0" bIns="0" rtlCol="0" anchor="ctr"/>
           <a:lstStyle/>
           <a:p>
             <a:pPr algn="ctr"/>
@@ -12257,7 +12470,7 @@
           <a:noFill/>
         </p:spPr>
         <p:txBody>
-          <a:bodyPr wrap="square" anchor="t" lIns="0" rIns="0" tIns="0" bIns="0">
+          <a:bodyPr wrap="square" lIns="0" tIns="0" rIns="0" bIns="0" anchor="t">
             <a:spAutoFit/>
           </a:bodyPr>
           <a:lstStyle/>
@@ -12296,7 +12509,7 @@
           <a:noFill/>
         </p:spPr>
         <p:txBody>
-          <a:bodyPr wrap="square" anchor="t" lIns="0" rIns="0" tIns="0" bIns="0">
+          <a:bodyPr wrap="square" lIns="0" tIns="0" rIns="0" bIns="0" anchor="t">
             <a:spAutoFit/>
           </a:bodyPr>
           <a:lstStyle/>
@@ -12335,7 +12548,7 @@
           <a:noFill/>
         </p:spPr>
         <p:txBody>
-          <a:bodyPr wrap="square" anchor="t" lIns="0" rIns="0" tIns="0" bIns="0">
+          <a:bodyPr wrap="square" lIns="0" tIns="0" rIns="0" bIns="0" anchor="t">
             <a:spAutoFit/>
           </a:bodyPr>
           <a:lstStyle/>
@@ -12402,6 +12615,7 @@
           <a:lstStyle/>
           <a:p>
             <a:pPr algn="ctr"/>
+            <a:endParaRPr/>
           </a:p>
         </p:txBody>
       </p:sp>
@@ -12422,7 +12636,7 @@
           <a:noFill/>
         </p:spPr>
         <p:txBody>
-          <a:bodyPr wrap="square" anchor="t" lIns="0" rIns="0" tIns="0" bIns="0">
+          <a:bodyPr wrap="square" lIns="0" tIns="0" rIns="0" bIns="0" anchor="t">
             <a:spAutoFit/>
           </a:bodyPr>
           <a:lstStyle/>
@@ -12461,7 +12675,7 @@
           <a:noFill/>
         </p:spPr>
         <p:txBody>
-          <a:bodyPr wrap="square" anchor="t" lIns="0" rIns="0" tIns="0" bIns="0">
+          <a:bodyPr wrap="square" lIns="0" tIns="0" rIns="0" bIns="0" anchor="t">
             <a:spAutoFit/>
           </a:bodyPr>
           <a:lstStyle/>
@@ -12528,6 +12742,7 @@
           <a:lstStyle/>
           <a:p>
             <a:pPr algn="ctr"/>
+            <a:endParaRPr/>
           </a:p>
         </p:txBody>
       </p:sp>
@@ -12548,7 +12763,7 @@
           <a:noFill/>
         </p:spPr>
         <p:txBody>
-          <a:bodyPr wrap="square" anchor="t" lIns="0" rIns="0" tIns="0" bIns="0">
+          <a:bodyPr wrap="square" lIns="0" tIns="0" rIns="0" bIns="0" anchor="t">
             <a:spAutoFit/>
           </a:bodyPr>
           <a:lstStyle/>
@@ -12587,7 +12802,7 @@
           <a:noFill/>
         </p:spPr>
         <p:txBody>
-          <a:bodyPr wrap="square" anchor="t" lIns="0" rIns="0" tIns="0" bIns="0">
+          <a:bodyPr wrap="square" lIns="0" tIns="0" rIns="0" bIns="0" anchor="t">
             <a:spAutoFit/>
           </a:bodyPr>
           <a:lstStyle/>
@@ -12626,7 +12841,7 @@
           <a:noFill/>
         </p:spPr>
         <p:txBody>
-          <a:bodyPr wrap="square" anchor="t" lIns="0" rIns="0" tIns="0" bIns="0">
+          <a:bodyPr wrap="square" lIns="0" tIns="0" rIns="0" bIns="0" anchor="t">
             <a:spAutoFit/>
           </a:bodyPr>
           <a:lstStyle/>
@@ -12657,7 +12872,7 @@
 </file>
 
 <file path=ppt/slides/slide6.xml><?xml version="1.0" encoding="utf-8"?>
-<p:sld xmlns:a="http://schemas.openxmlformats.org/drawingml/2006/main" xmlns:p="http://schemas.openxmlformats.org/presentationml/2006/main" xmlns:r="http://schemas.openxmlformats.org/officeDocument/2006/relationships">
+<p:sld xmlns:a="http://schemas.openxmlformats.org/drawingml/2006/main" xmlns:r="http://schemas.openxmlformats.org/officeDocument/2006/relationships" xmlns:p="http://schemas.openxmlformats.org/presentationml/2006/main">
   <p:cSld>
     <p:bg>
       <p:bgPr>
@@ -12673,7 +12888,14 @@
         <p:cNvGrpSpPr/>
         <p:nvPr/>
       </p:nvGrpSpPr>
-      <p:grpSpPr/>
+      <p:grpSpPr>
+        <a:xfrm>
+          <a:off x="0" y="0"/>
+          <a:ext cx="0" cy="0"/>
+          <a:chOff x="0" y="0"/>
+          <a:chExt cx="0" cy="0"/>
+        </a:xfrm>
+      </p:grpSpPr>
       <p:sp>
         <p:nvSpPr>
           <p:cNvPr id="2" name="Oval 1"/>
@@ -12711,7 +12933,7 @@
           </a:fontRef>
         </p:style>
         <p:txBody>
-          <a:bodyPr rtlCol="0" anchor="ctr" wrap="none" lIns="0" rIns="0" tIns="0" bIns="0"/>
+          <a:bodyPr wrap="none" lIns="0" tIns="0" rIns="0" bIns="0" rtlCol="0" anchor="ctr"/>
           <a:lstStyle/>
           <a:p>
             <a:pPr algn="ctr"/>
@@ -12744,7 +12966,7 @@
           <a:noFill/>
         </p:spPr>
         <p:txBody>
-          <a:bodyPr wrap="square" anchor="t" lIns="0" rIns="0" tIns="0" bIns="0">
+          <a:bodyPr wrap="square" lIns="0" tIns="0" rIns="0" bIns="0" anchor="t">
             <a:spAutoFit/>
           </a:bodyPr>
           <a:lstStyle/>
@@ -12783,7 +13005,7 @@
           <a:noFill/>
         </p:spPr>
         <p:txBody>
-          <a:bodyPr wrap="square" anchor="t" lIns="0" rIns="0" tIns="0" bIns="0">
+          <a:bodyPr wrap="square" lIns="0" tIns="0" rIns="0" bIns="0" anchor="t">
             <a:spAutoFit/>
           </a:bodyPr>
           <a:lstStyle/>
@@ -12822,7 +13044,7 @@
           <a:noFill/>
         </p:spPr>
         <p:txBody>
-          <a:bodyPr wrap="square" anchor="t" lIns="0" rIns="0" tIns="0" bIns="0">
+          <a:bodyPr wrap="square" lIns="0" tIns="0" rIns="0" bIns="0" anchor="t">
             <a:spAutoFit/>
           </a:bodyPr>
           <a:lstStyle/>
@@ -12834,13 +13056,31 @@
               <a:buChar char="•"/>
             </a:pPr>
             <a:r>
-              <a:rPr sz="1550" b="0" i="0">
+              <a:rPr sz="1550" b="0" i="0" dirty="0">
                 <a:solidFill>
                   <a:srgbClr val="2A2A2A"/>
                 </a:solidFill>
                 <a:latin typeface="Calibri"/>
               </a:rPr>
-              <a:t>Each exposure to a song is encoded as one memory chunk (instance-based learning, ACT-R / pyactup).</a:t>
+              <a:t>Each exposure to a song is encoded as one memory chunk (instance-based learning, ACT-R / </a:t>
+            </a:r>
+            <a:r>
+              <a:rPr sz="1550" b="0" i="0" dirty="0" err="1">
+                <a:solidFill>
+                  <a:srgbClr val="2A2A2A"/>
+                </a:solidFill>
+                <a:latin typeface="Calibri"/>
+              </a:rPr>
+              <a:t>pyactup</a:t>
+            </a:r>
+            <a:r>
+              <a:rPr sz="1550" b="0" i="0" dirty="0">
+                <a:solidFill>
+                  <a:srgbClr val="2A2A2A"/>
+                </a:solidFill>
+                <a:latin typeface="Calibri"/>
+              </a:rPr>
+              <a:t>).</a:t>
             </a:r>
           </a:p>
           <a:p>
@@ -12851,7 +13091,7 @@
               <a:buChar char="•"/>
             </a:pPr>
             <a:r>
-              <a:rPr sz="1550" b="0" i="0">
+              <a:rPr sz="1550" b="0" i="0" dirty="0">
                 <a:solidFill>
                   <a:srgbClr val="2A2A2A"/>
                 </a:solidFill>
@@ -12868,7 +13108,7 @@
               <a:buChar char="•"/>
             </a:pPr>
             <a:r>
-              <a:rPr sz="1550" b="0" i="0">
+              <a:rPr sz="1550" b="0" i="0" dirty="0">
                 <a:solidFill>
                   <a:srgbClr val="2A2A2A"/>
                 </a:solidFill>
@@ -12885,13 +13125,31 @@
               <a:buChar char="•"/>
             </a:pPr>
             <a:r>
-              <a:rPr sz="1550" b="0" i="0">
+              <a:rPr sz="1550" b="0" i="0" dirty="0">
                 <a:solidFill>
                   <a:srgbClr val="2A2A2A"/>
                 </a:solidFill>
                 <a:latin typeface="Calibri"/>
               </a:rPr>
-              <a:t>That gap — predicted vs. actual activation — is the raw material for aesthetic judgment: “aesthetic_basis.”</a:t>
+              <a:t>That gap — predicted vs. actual activation — is the raw material for aesthetic judgment: “</a:t>
+            </a:r>
+            <a:r>
+              <a:rPr sz="1550" b="0" i="0" dirty="0" err="1">
+                <a:solidFill>
+                  <a:srgbClr val="2A2A2A"/>
+                </a:solidFill>
+                <a:latin typeface="Calibri"/>
+              </a:rPr>
+              <a:t>aesthetic_basis</a:t>
+            </a:r>
+            <a:r>
+              <a:rPr sz="1550" b="0" i="0" dirty="0">
+                <a:solidFill>
+                  <a:srgbClr val="2A2A2A"/>
+                </a:solidFill>
+                <a:latin typeface="Calibri"/>
+              </a:rPr>
+              <a:t>.”</a:t>
             </a:r>
           </a:p>
         </p:txBody>
@@ -12939,6 +13197,7 @@
           <a:lstStyle/>
           <a:p>
             <a:pPr algn="ctr"/>
+            <a:endParaRPr/>
           </a:p>
         </p:txBody>
       </p:sp>
@@ -12959,7 +13218,7 @@
           <a:noFill/>
         </p:spPr>
         <p:txBody>
-          <a:bodyPr wrap="square" anchor="t" lIns="0" rIns="0" tIns="0" bIns="0">
+          <a:bodyPr wrap="square" lIns="0" tIns="0" rIns="0" bIns="0" anchor="t">
             <a:spAutoFit/>
           </a:bodyPr>
           <a:lstStyle/>
@@ -12998,7 +13257,7 @@
           <a:noFill/>
         </p:spPr>
         <p:txBody>
-          <a:bodyPr wrap="square" anchor="t" lIns="0" rIns="0" tIns="0" bIns="0">
+          <a:bodyPr wrap="square" lIns="0" tIns="0" rIns="0" bIns="0" anchor="t">
             <a:spAutoFit/>
           </a:bodyPr>
           <a:lstStyle/>
@@ -13037,7 +13296,7 @@
           <a:noFill/>
         </p:spPr>
         <p:txBody>
-          <a:bodyPr wrap="square" anchor="t" lIns="0" rIns="0" tIns="0" bIns="0">
+          <a:bodyPr wrap="square" lIns="0" tIns="0" rIns="0" bIns="0" anchor="t">
             <a:spAutoFit/>
           </a:bodyPr>
           <a:lstStyle/>
@@ -13076,7 +13335,7 @@
           <a:noFill/>
         </p:spPr>
         <p:txBody>
-          <a:bodyPr wrap="square" anchor="t" lIns="0" rIns="0" tIns="0" bIns="0">
+          <a:bodyPr wrap="square" lIns="0" tIns="0" rIns="0" bIns="0" anchor="t">
             <a:spAutoFit/>
           </a:bodyPr>
           <a:lstStyle/>
@@ -13107,7 +13366,7 @@
         <p:spPr>
           <a:xfrm>
             <a:off x="6903720" y="4251960"/>
-            <a:ext cx="4480560" cy="1371600"/>
+            <a:ext cx="4480560" cy="600164"/>
           </a:xfrm>
           <a:prstGeom prst="rect">
             <a:avLst/>
@@ -13115,7 +13374,7 @@
           <a:noFill/>
         </p:spPr>
         <p:txBody>
-          <a:bodyPr wrap="square" anchor="t" lIns="0" rIns="0" tIns="0" bIns="0">
+          <a:bodyPr wrap="square" lIns="0" tIns="0" rIns="0" bIns="0" anchor="t">
             <a:spAutoFit/>
           </a:bodyPr>
           <a:lstStyle/>
@@ -13126,13 +13385,31 @@
               </a:spcAft>
             </a:pPr>
             <a:r>
-              <a:rPr sz="1300" b="0" i="1">
+              <a:rPr sz="1300" b="0" i="1" dirty="0">
                 <a:solidFill>
                   <a:srgbClr val="747474"/>
                 </a:solidFill>
                 <a:latin typeface="Calibri"/>
               </a:rPr>
-              <a:t>Chunks currently carry two slots: a song identifier and a value (complexity, or later, evaluation itself). Aesthetic_basis is only defined once a song has a chunk of its own — i.e. from its second exposure onward.</a:t>
+              <a:t>Chunks currently carry two slots: a song identifier and a value (evaluation itself). </a:t>
+            </a:r>
+            <a:r>
+              <a:rPr sz="1300" b="0" i="1" dirty="0" err="1">
+                <a:solidFill>
+                  <a:srgbClr val="747474"/>
+                </a:solidFill>
+                <a:latin typeface="Calibri"/>
+              </a:rPr>
+              <a:t>Aesthetic_basis</a:t>
+            </a:r>
+            <a:r>
+              <a:rPr sz="1300" b="0" i="1" dirty="0">
+                <a:solidFill>
+                  <a:srgbClr val="747474"/>
+                </a:solidFill>
+                <a:latin typeface="Calibri"/>
+              </a:rPr>
+              <a:t> is only defined once a song has a chunk of its own — i.e. from its second exposure onward.</a:t>
             </a:r>
           </a:p>
         </p:txBody>
@@ -13146,7 +13423,7 @@
 </file>
 
 <file path=ppt/slides/slide7.xml><?xml version="1.0" encoding="utf-8"?>
-<p:sld xmlns:a="http://schemas.openxmlformats.org/drawingml/2006/main" xmlns:p="http://schemas.openxmlformats.org/presentationml/2006/main" xmlns:r="http://schemas.openxmlformats.org/officeDocument/2006/relationships">
+<p:sld xmlns:a="http://schemas.openxmlformats.org/drawingml/2006/main" xmlns:r="http://schemas.openxmlformats.org/officeDocument/2006/relationships" xmlns:p="http://schemas.openxmlformats.org/presentationml/2006/main">
   <p:cSld>
     <p:bg>
       <p:bgPr>
@@ -13162,7 +13439,14 @@
         <p:cNvGrpSpPr/>
         <p:nvPr/>
       </p:nvGrpSpPr>
-      <p:grpSpPr/>
+      <p:grpSpPr>
+        <a:xfrm>
+          <a:off x="0" y="0"/>
+          <a:ext cx="0" cy="0"/>
+          <a:chOff x="0" y="0"/>
+          <a:chExt cx="0" cy="0"/>
+        </a:xfrm>
+      </p:grpSpPr>
       <p:sp>
         <p:nvSpPr>
           <p:cNvPr id="2" name="Oval 1"/>
@@ -13200,7 +13484,7 @@
           </a:fontRef>
         </p:style>
         <p:txBody>
-          <a:bodyPr rtlCol="0" anchor="ctr" wrap="none" lIns="0" rIns="0" tIns="0" bIns="0"/>
+          <a:bodyPr wrap="none" lIns="0" tIns="0" rIns="0" bIns="0" rtlCol="0" anchor="ctr"/>
           <a:lstStyle/>
           <a:p>
             <a:pPr algn="ctr"/>
@@ -13233,7 +13517,7 @@
           <a:noFill/>
         </p:spPr>
         <p:txBody>
-          <a:bodyPr wrap="square" anchor="t" lIns="0" rIns="0" tIns="0" bIns="0">
+          <a:bodyPr wrap="square" lIns="0" tIns="0" rIns="0" bIns="0" anchor="t">
             <a:spAutoFit/>
           </a:bodyPr>
           <a:lstStyle/>
@@ -13272,7 +13556,7 @@
           <a:noFill/>
         </p:spPr>
         <p:txBody>
-          <a:bodyPr wrap="square" anchor="t" lIns="0" rIns="0" tIns="0" bIns="0">
+          <a:bodyPr wrap="square" lIns="0" tIns="0" rIns="0" bIns="0" anchor="t">
             <a:spAutoFit/>
           </a:bodyPr>
           <a:lstStyle/>
@@ -13303,7 +13587,7 @@
         <p:spPr>
           <a:xfrm>
             <a:off x="502920" y="1691640"/>
-            <a:ext cx="5852160" cy="4297680"/>
+            <a:ext cx="5852160" cy="2346796"/>
           </a:xfrm>
           <a:prstGeom prst="rect">
             <a:avLst/>
@@ -13311,7 +13595,7 @@
           <a:noFill/>
         </p:spPr>
         <p:txBody>
-          <a:bodyPr wrap="square" anchor="t" lIns="0" rIns="0" tIns="0" bIns="0">
+          <a:bodyPr wrap="square" lIns="0" tIns="0" rIns="0" bIns="0" anchor="t">
             <a:spAutoFit/>
           </a:bodyPr>
           <a:lstStyle/>
@@ -13323,13 +13607,31 @@
               <a:buChar char="•"/>
             </a:pPr>
             <a:r>
-              <a:rPr sz="1500" b="0" i="0">
+              <a:rPr sz="1500" b="0" i="0" dirty="0">
                 <a:solidFill>
                   <a:srgbClr val="2A2A2A"/>
                 </a:solidFill>
                 <a:latin typeface="Calibri"/>
               </a:rPr>
-              <a:t>A4 keeps a running average of aesthetic_basis over the whole simulation — cumulative, or a moving window — as a live estimate of “how surprising has this environment been lately.”</a:t>
+              <a:t>A4 keeps a running average of </a:t>
+            </a:r>
+            <a:r>
+              <a:rPr sz="1500" b="0" i="0" dirty="0" err="1">
+                <a:solidFill>
+                  <a:srgbClr val="2A2A2A"/>
+                </a:solidFill>
+                <a:latin typeface="Calibri"/>
+              </a:rPr>
+              <a:t>aesthetic_basis</a:t>
+            </a:r>
+            <a:r>
+              <a:rPr sz="1500" b="0" i="0" dirty="0">
+                <a:solidFill>
+                  <a:srgbClr val="2A2A2A"/>
+                </a:solidFill>
+                <a:latin typeface="Calibri"/>
+              </a:rPr>
+              <a:t> over the whole simulation — cumulative, or a moving window — as a live estimate of “how surprising has this environment been lately.”</a:t>
             </a:r>
           </a:p>
           <a:p>
@@ -13340,14 +13642,47 @@
               <a:buChar char="•"/>
             </a:pPr>
             <a:r>
-              <a:rPr sz="1500" b="0" i="0">
+              <a:rPr sz="1500" b="0" i="0" dirty="0">
                 <a:solidFill>
                   <a:srgbClr val="2A2A2A"/>
                 </a:solidFill>
                 <a:latin typeface="Calibri"/>
               </a:rPr>
-              <a:t>That average, scaled by a free parameter γ (gamma), sets r: the target amount of surprise for peak enjoyment.</a:t>
-            </a:r>
+              <a:t>That average, scaled by a free parameter </a:t>
+            </a:r>
+            <a:r>
+              <a:rPr sz="1500" b="0" i="0" dirty="0" err="1">
+                <a:solidFill>
+                  <a:srgbClr val="2A2A2A"/>
+                </a:solidFill>
+                <a:latin typeface="Calibri"/>
+              </a:rPr>
+              <a:t>γ</a:t>
+            </a:r>
+            <a:r>
+              <a:rPr sz="1500" b="0" i="0" dirty="0">
+                <a:solidFill>
+                  <a:srgbClr val="2A2A2A"/>
+                </a:solidFill>
+                <a:latin typeface="Calibri"/>
+              </a:rPr>
+              <a:t> (gamma), sets r</a:t>
+            </a:r>
+            <a:r>
+              <a:rPr lang="en-US" sz="1500" dirty="0">
+                <a:solidFill>
+                  <a:srgbClr val="2A2A2A"/>
+                </a:solidFill>
+                <a:latin typeface="Calibri"/>
+              </a:rPr>
+              <a:t>.</a:t>
+            </a:r>
+            <a:endParaRPr sz="1500" b="0" i="0" dirty="0">
+              <a:solidFill>
+                <a:srgbClr val="2A2A2A"/>
+              </a:solidFill>
+              <a:latin typeface="Calibri"/>
+            </a:endParaRPr>
           </a:p>
           <a:p>
             <a:pPr algn="l">
@@ -13357,13 +13692,31 @@
               <a:buChar char="•"/>
             </a:pPr>
             <a:r>
-              <a:rPr sz="1500" b="0" i="0">
+              <a:rPr sz="1500" b="0" i="0" dirty="0">
                 <a:solidFill>
                   <a:srgbClr val="2A2A2A"/>
                 </a:solidFill>
                 <a:latin typeface="Calibri"/>
               </a:rPr>
-              <a:t>evaluation is a parabola in aesthetic_basis, anchored at 0, peaking at x = r/2, and returning to 0 at x = r — an inverted-U, literally.</a:t>
+              <a:t>evaluation is a parabola in </a:t>
+            </a:r>
+            <a:r>
+              <a:rPr sz="1500" b="0" i="0" dirty="0" err="1">
+                <a:solidFill>
+                  <a:srgbClr val="2A2A2A"/>
+                </a:solidFill>
+                <a:latin typeface="Calibri"/>
+              </a:rPr>
+              <a:t>aesthetic_basis</a:t>
+            </a:r>
+            <a:r>
+              <a:rPr sz="1500" b="0" i="0" dirty="0">
+                <a:solidFill>
+                  <a:srgbClr val="2A2A2A"/>
+                </a:solidFill>
+                <a:latin typeface="Calibri"/>
+              </a:rPr>
+              <a:t>, anchored at 0, peaking at x = r/2, and returning to 0 at x = r — an inverted-U, literally.</a:t>
             </a:r>
           </a:p>
           <a:p>
@@ -13374,7 +13727,7 @@
               <a:buChar char="•"/>
             </a:pPr>
             <a:r>
-              <a:rPr sz="1500" b="0" i="0">
+              <a:rPr sz="1500" b="0" i="0" dirty="0">
                 <a:solidFill>
                   <a:srgbClr val="2A2A2A"/>
                 </a:solidFill>
@@ -13428,6 +13781,7 @@
           <a:lstStyle/>
           <a:p>
             <a:pPr algn="ctr"/>
+            <a:endParaRPr/>
           </a:p>
         </p:txBody>
       </p:sp>
@@ -13448,7 +13802,7 @@
           <a:noFill/>
         </p:spPr>
         <p:txBody>
-          <a:bodyPr wrap="square" anchor="t" lIns="0" rIns="0" tIns="0" bIns="0">
+          <a:bodyPr wrap="square" lIns="0" tIns="0" rIns="0" bIns="0" anchor="t">
             <a:spAutoFit/>
           </a:bodyPr>
           <a:lstStyle/>
@@ -13487,7 +13841,7 @@
           <a:noFill/>
         </p:spPr>
         <p:txBody>
-          <a:bodyPr wrap="square" anchor="t" lIns="0" rIns="0" tIns="0" bIns="0">
+          <a:bodyPr wrap="square" lIns="0" tIns="0" rIns="0" bIns="0" anchor="t">
             <a:spAutoFit/>
           </a:bodyPr>
           <a:lstStyle/>
@@ -13526,7 +13880,7 @@
           <a:noFill/>
         </p:spPr>
         <p:txBody>
-          <a:bodyPr wrap="square" anchor="t" lIns="0" rIns="0" tIns="0" bIns="0">
+          <a:bodyPr wrap="square" lIns="0" tIns="0" rIns="0" bIns="0" anchor="t">
             <a:spAutoFit/>
           </a:bodyPr>
           <a:lstStyle/>
@@ -13565,7 +13919,7 @@
           <a:noFill/>
         </p:spPr>
         <p:txBody>
-          <a:bodyPr wrap="square" anchor="t" lIns="0" rIns="0" tIns="0" bIns="0">
+          <a:bodyPr wrap="square" lIns="0" tIns="0" rIns="0" bIns="0" anchor="t">
             <a:spAutoFit/>
           </a:bodyPr>
           <a:lstStyle/>
@@ -13604,7 +13958,7 @@
           <a:noFill/>
         </p:spPr>
         <p:txBody>
-          <a:bodyPr wrap="square" anchor="t" lIns="0" rIns="0" tIns="0" bIns="0">
+          <a:bodyPr wrap="square" lIns="0" tIns="0" rIns="0" bIns="0" anchor="t">
             <a:spAutoFit/>
           </a:bodyPr>
           <a:lstStyle/>
@@ -13643,7 +13997,7 @@
           <a:noFill/>
         </p:spPr>
         <p:txBody>
-          <a:bodyPr wrap="square" anchor="t" lIns="0" rIns="0" tIns="0" bIns="0">
+          <a:bodyPr wrap="square" lIns="0" tIns="0" rIns="0" bIns="0" anchor="t">
             <a:spAutoFit/>
           </a:bodyPr>
           <a:lstStyle/>
@@ -13674,7 +14028,7 @@
 </file>
 
 <file path=ppt/slides/slide8.xml><?xml version="1.0" encoding="utf-8"?>
-<p:sld xmlns:a="http://schemas.openxmlformats.org/drawingml/2006/main" xmlns:p="http://schemas.openxmlformats.org/presentationml/2006/main" xmlns:r="http://schemas.openxmlformats.org/officeDocument/2006/relationships">
+<p:sld xmlns:a="http://schemas.openxmlformats.org/drawingml/2006/main" xmlns:r="http://schemas.openxmlformats.org/officeDocument/2006/relationships" xmlns:p="http://schemas.openxmlformats.org/presentationml/2006/main">
   <p:cSld>
     <p:bg>
       <p:bgPr>
@@ -13690,7 +14044,14 @@
         <p:cNvGrpSpPr/>
         <p:nvPr/>
       </p:nvGrpSpPr>
-      <p:grpSpPr/>
+      <p:grpSpPr>
+        <a:xfrm>
+          <a:off x="0" y="0"/>
+          <a:ext cx="0" cy="0"/>
+          <a:chOff x="0" y="0"/>
+          <a:chExt cx="0" cy="0"/>
+        </a:xfrm>
+      </p:grpSpPr>
       <p:sp>
         <p:nvSpPr>
           <p:cNvPr id="2" name="Oval 1"/>
@@ -13728,7 +14089,7 @@
           </a:fontRef>
         </p:style>
         <p:txBody>
-          <a:bodyPr rtlCol="0" anchor="ctr" wrap="none" lIns="0" rIns="0" tIns="0" bIns="0"/>
+          <a:bodyPr wrap="none" lIns="0" tIns="0" rIns="0" bIns="0" rtlCol="0" anchor="ctr"/>
           <a:lstStyle/>
           <a:p>
             <a:pPr algn="ctr"/>
@@ -13761,7 +14122,7 @@
           <a:noFill/>
         </p:spPr>
         <p:txBody>
-          <a:bodyPr wrap="square" anchor="t" lIns="0" rIns="0" tIns="0" bIns="0">
+          <a:bodyPr wrap="square" lIns="0" tIns="0" rIns="0" bIns="0" anchor="t">
             <a:spAutoFit/>
           </a:bodyPr>
           <a:lstStyle/>
@@ -13800,7 +14161,7 @@
           <a:noFill/>
         </p:spPr>
         <p:txBody>
-          <a:bodyPr wrap="square" anchor="t" lIns="0" rIns="0" tIns="0" bIns="0">
+          <a:bodyPr wrap="square" lIns="0" tIns="0" rIns="0" bIns="0" anchor="t">
             <a:spAutoFit/>
           </a:bodyPr>
           <a:lstStyle/>
@@ -13839,7 +14200,7 @@
           <a:noFill/>
         </p:spPr>
         <p:txBody>
-          <a:bodyPr wrap="square" anchor="t" lIns="0" rIns="0" tIns="0" bIns="0">
+          <a:bodyPr wrap="square" lIns="0" tIns="0" rIns="0" bIns="0" anchor="t">
             <a:spAutoFit/>
           </a:bodyPr>
           <a:lstStyle/>
@@ -13870,7 +14231,7 @@
         <p:spPr>
           <a:xfrm>
             <a:off x="502920" y="2148840"/>
-            <a:ext cx="11155680" cy="3108960"/>
+            <a:ext cx="11155680" cy="2015936"/>
           </a:xfrm>
           <a:prstGeom prst="rect">
             <a:avLst/>
@@ -13878,7 +14239,7 @@
           <a:noFill/>
         </p:spPr>
         <p:txBody>
-          <a:bodyPr wrap="square" anchor="t" lIns="0" rIns="0" tIns="0" bIns="0">
+          <a:bodyPr wrap="square" lIns="0" tIns="0" rIns="0" bIns="0" anchor="t">
             <a:spAutoFit/>
           </a:bodyPr>
           <a:lstStyle/>
@@ -13890,13 +14251,13 @@
               <a:buChar char="•"/>
             </a:pPr>
             <a:r>
-              <a:rPr sz="1600" b="0" i="0">
+              <a:rPr sz="1600" b="0" i="0" dirty="0">
                 <a:solidFill>
                   <a:srgbClr val="2A2A2A"/>
                 </a:solidFill>
                 <a:latin typeface="Calibri"/>
               </a:rPr>
-              <a:t>100 songs, each with a fixed complexity drawn once — a stationary, “ergodic” environment (Anderson's own assumption).</a:t>
+              <a:t>100 songs, each with a fixed complexity drawn once — a stationary, “ergodic” environment.</a:t>
             </a:r>
           </a:p>
           <a:p>
@@ -13907,13 +14268,31 @@
               <a:buChar char="•"/>
             </a:pPr>
             <a:r>
-              <a:rPr sz="1600" b="0" i="0">
+              <a:rPr sz="1600" b="0" i="0" dirty="0">
                 <a:solidFill>
                   <a:srgbClr val="2A2A2A"/>
                 </a:solidFill>
                 <a:latin typeface="Calibri"/>
               </a:rPr>
-              <a:t>Songs are drawn i.i.d. with replacement, uniformly at random, over thousands of exposures — no controller, no listener choice.</a:t>
+              <a:t>Songs are drawn </a:t>
+            </a:r>
+            <a:r>
+              <a:rPr sz="1600" b="0" i="0" dirty="0" err="1">
+                <a:solidFill>
+                  <a:srgbClr val="2A2A2A"/>
+                </a:solidFill>
+                <a:latin typeface="Calibri"/>
+              </a:rPr>
+              <a:t>i.i.d.</a:t>
+            </a:r>
+            <a:r>
+              <a:rPr sz="1600" b="0" i="0" dirty="0">
+                <a:solidFill>
+                  <a:srgbClr val="2A2A2A"/>
+                </a:solidFill>
+                <a:latin typeface="Calibri"/>
+              </a:rPr>
+              <a:t> with replacement, uniformly at random, over thousands of exposures — no controller, no listener choice.</a:t>
             </a:r>
           </a:p>
           <a:p>
@@ -13924,13 +14303,49 @@
               <a:buChar char="•"/>
             </a:pPr>
             <a:r>
-              <a:rPr sz="1600" b="0" i="0">
+              <a:rPr sz="1600" b="0" i="0" dirty="0">
                 <a:solidFill>
                   <a:srgbClr val="2A2A2A"/>
                 </a:solidFill>
                 <a:latin typeface="Calibri"/>
               </a:rPr>
-              <a:t>Each repeat exposure runs Algorithm A4: aesthetic_basis → running average r → evaluation → a new {song_id, evaluation} chunk is learned.</a:t>
+              <a:t>Each repeat exposure runs Algorithm A4: </a:t>
+            </a:r>
+            <a:r>
+              <a:rPr sz="1600" b="0" i="0" dirty="0" err="1">
+                <a:solidFill>
+                  <a:srgbClr val="2A2A2A"/>
+                </a:solidFill>
+                <a:latin typeface="Calibri"/>
+              </a:rPr>
+              <a:t>aesthetic_basis</a:t>
+            </a:r>
+            <a:r>
+              <a:rPr sz="1600" b="0" i="0" dirty="0">
+                <a:solidFill>
+                  <a:srgbClr val="2A2A2A"/>
+                </a:solidFill>
+                <a:latin typeface="Calibri"/>
+              </a:rPr>
+              <a:t> → running average r → evaluation → a new {</a:t>
+            </a:r>
+            <a:r>
+              <a:rPr sz="1600" b="0" i="0" dirty="0" err="1">
+                <a:solidFill>
+                  <a:srgbClr val="2A2A2A"/>
+                </a:solidFill>
+                <a:latin typeface="Calibri"/>
+              </a:rPr>
+              <a:t>song_id</a:t>
+            </a:r>
+            <a:r>
+              <a:rPr sz="1600" b="0" i="0" dirty="0">
+                <a:solidFill>
+                  <a:srgbClr val="2A2A2A"/>
+                </a:solidFill>
+                <a:latin typeface="Calibri"/>
+              </a:rPr>
+              <a:t>, evaluation} chunk is learned.</a:t>
             </a:r>
           </a:p>
           <a:p>
@@ -13941,13 +14356,31 @@
               <a:buChar char="•"/>
             </a:pPr>
             <a:r>
-              <a:rPr sz="1600" b="0" i="0">
+              <a:rPr sz="1600" b="0" i="0" dirty="0">
                 <a:solidFill>
                   <a:srgbClr val="2A2A2A"/>
                 </a:solidFill>
                 <a:latin typeface="Calibri"/>
               </a:rPr>
-              <a:t>Two things are tracked over time: evaluation itself, and A4's own live time_averaged_aesthetic_basis — does the environment's memory-eye-view of “how surprising” settle down?</a:t>
+              <a:t>Two things are tracked over time: evaluation itself, and A4's own live </a:t>
+            </a:r>
+            <a:r>
+              <a:rPr sz="1600" b="0" i="0" dirty="0" err="1">
+                <a:solidFill>
+                  <a:srgbClr val="2A2A2A"/>
+                </a:solidFill>
+                <a:latin typeface="Calibri"/>
+              </a:rPr>
+              <a:t>time_averaged_aesthetic_basis</a:t>
+            </a:r>
+            <a:r>
+              <a:rPr sz="1600" b="0" i="0" dirty="0">
+                <a:solidFill>
+                  <a:srgbClr val="2A2A2A"/>
+                </a:solidFill>
+                <a:latin typeface="Calibri"/>
+              </a:rPr>
+              <a:t> — does the environment's memory-eye-view of “how surprising” settle down?</a:t>
             </a:r>
           </a:p>
         </p:txBody>
@@ -13961,7 +14394,7 @@
 </file>
 
 <file path=ppt/slides/slide9.xml><?xml version="1.0" encoding="utf-8"?>
-<p:sld xmlns:a="http://schemas.openxmlformats.org/drawingml/2006/main" xmlns:p="http://schemas.openxmlformats.org/presentationml/2006/main" xmlns:r="http://schemas.openxmlformats.org/officeDocument/2006/relationships">
+<p:sld xmlns:a="http://schemas.openxmlformats.org/drawingml/2006/main" xmlns:r="http://schemas.openxmlformats.org/officeDocument/2006/relationships" xmlns:p="http://schemas.openxmlformats.org/presentationml/2006/main">
   <p:cSld>
     <p:bg>
       <p:bgPr>
@@ -13977,7 +14410,14 @@
         <p:cNvGrpSpPr/>
         <p:nvPr/>
       </p:nvGrpSpPr>
-      <p:grpSpPr/>
+      <p:grpSpPr>
+        <a:xfrm>
+          <a:off x="0" y="0"/>
+          <a:ext cx="0" cy="0"/>
+          <a:chOff x="0" y="0"/>
+          <a:chExt cx="0" cy="0"/>
+        </a:xfrm>
+      </p:grpSpPr>
       <p:sp>
         <p:nvSpPr>
           <p:cNvPr id="2" name="Oval 1"/>
@@ -14015,7 +14455,7 @@
           </a:fontRef>
         </p:style>
         <p:txBody>
-          <a:bodyPr rtlCol="0" anchor="ctr" wrap="none" lIns="0" rIns="0" tIns="0" bIns="0"/>
+          <a:bodyPr wrap="none" lIns="0" tIns="0" rIns="0" bIns="0" rtlCol="0" anchor="ctr"/>
           <a:lstStyle/>
           <a:p>
             <a:pPr algn="ctr"/>
@@ -14048,7 +14488,7 @@
           <a:noFill/>
         </p:spPr>
         <p:txBody>
-          <a:bodyPr wrap="square" anchor="t" lIns="0" rIns="0" tIns="0" bIns="0">
+          <a:bodyPr wrap="square" lIns="0" tIns="0" rIns="0" bIns="0" anchor="t">
             <a:spAutoFit/>
           </a:bodyPr>
           <a:lstStyle/>
@@ -14087,7 +14527,7 @@
           <a:noFill/>
         </p:spPr>
         <p:txBody>
-          <a:bodyPr wrap="square" anchor="t" lIns="0" rIns="0" tIns="0" bIns="0">
+          <a:bodyPr wrap="square" lIns="0" tIns="0" rIns="0" bIns="0" anchor="t">
             <a:spAutoFit/>
           </a:bodyPr>
           <a:lstStyle/>
@@ -14123,7 +14563,7 @@
         </p:xfrm>
         <a:graphic>
           <a:graphicData uri="http://schemas.openxmlformats.org/drawingml/2006/chart">
-            <c:chart xmlns:c="http://schemas.openxmlformats.org/drawingml/2006/chart" r:id="rId2"/>
+            <c:chart xmlns:c="http://schemas.openxmlformats.org/drawingml/2006/chart" xmlns:r="http://schemas.openxmlformats.org/officeDocument/2006/relationships" r:id="rId2"/>
           </a:graphicData>
         </a:graphic>
       </p:graphicFrame>
@@ -14144,7 +14584,7 @@
           <a:noFill/>
         </p:spPr>
         <p:txBody>
-          <a:bodyPr wrap="square" anchor="t" lIns="0" rIns="0" tIns="0" bIns="0">
+          <a:bodyPr wrap="square" lIns="0" tIns="0" rIns="0" bIns="0" anchor="t">
             <a:spAutoFit/>
           </a:bodyPr>
           <a:lstStyle/>
@@ -14183,7 +14623,7 @@
           <a:noFill/>
         </p:spPr>
         <p:txBody>
-          <a:bodyPr wrap="square" anchor="t" lIns="0" rIns="0" tIns="0" bIns="0">
+          <a:bodyPr wrap="square" lIns="0" tIns="0" rIns="0" bIns="0" anchor="t">
             <a:spAutoFit/>
           </a:bodyPr>
           <a:lstStyle/>
@@ -14222,7 +14662,7 @@
           <a:noFill/>
         </p:spPr>
         <p:txBody>
-          <a:bodyPr wrap="square" anchor="t" lIns="0" rIns="0" tIns="0" bIns="0">
+          <a:bodyPr wrap="square" lIns="0" tIns="0" rIns="0" bIns="0" anchor="t">
             <a:spAutoFit/>
           </a:bodyPr>
           <a:lstStyle/>
@@ -14261,7 +14701,7 @@
           <a:noFill/>
         </p:spPr>
         <p:txBody>
-          <a:bodyPr wrap="square" anchor="t" lIns="0" rIns="0" tIns="0" bIns="0">
+          <a:bodyPr wrap="square" lIns="0" tIns="0" rIns="0" bIns="0" anchor="t">
             <a:spAutoFit/>
           </a:bodyPr>
           <a:lstStyle/>
@@ -14300,7 +14740,7 @@
           <a:noFill/>
         </p:spPr>
         <p:txBody>
-          <a:bodyPr wrap="square" anchor="t" lIns="0" rIns="0" tIns="0" bIns="0">
+          <a:bodyPr wrap="square" lIns="0" tIns="0" rIns="0" bIns="0" anchor="t">
             <a:spAutoFit/>
           </a:bodyPr>
           <a:lstStyle/>
@@ -14339,7 +14779,7 @@
           <a:noFill/>
         </p:spPr>
         <p:txBody>
-          <a:bodyPr wrap="square" anchor="t" lIns="0" rIns="0" tIns="0" bIns="0">
+          <a:bodyPr wrap="square" lIns="0" tIns="0" rIns="0" bIns="0" anchor="t">
             <a:spAutoFit/>
           </a:bodyPr>
           <a:lstStyle/>
@@ -14378,7 +14818,7 @@
           <a:noFill/>
         </p:spPr>
         <p:txBody>
-          <a:bodyPr wrap="square" anchor="t" lIns="0" rIns="0" tIns="0" bIns="0">
+          <a:bodyPr wrap="square" lIns="0" tIns="0" rIns="0" bIns="0" anchor="t">
             <a:spAutoFit/>
           </a:bodyPr>
           <a:lstStyle/>
